--- a/polarized_trees/Polarized_Trees_Presentation.pptx
+++ b/polarized_trees/Polarized_Trees_Presentation.pptx
@@ -5,7 +5,7 @@
     <p:sldMasterId id="2147483648" r:id="rId1"/>
   </p:sldMasterIdLst>
   <p:notesMasterIdLst>
-    <p:notesMasterId r:id="rId15"/>
+    <p:notesMasterId r:id="rId16"/>
   </p:notesMasterIdLst>
   <p:sldIdLst>
     <p:sldId id="256" r:id="rId2"/>
@@ -21,6 +21,7 @@
     <p:sldId id="265" r:id="rId12"/>
     <p:sldId id="266" r:id="rId13"/>
     <p:sldId id="267" r:id="rId14"/>
+    <p:sldId id="270" r:id="rId15"/>
   </p:sldIdLst>
   <p:sldSz cx="12192000" cy="6858000"/>
   <p:notesSz cx="6858000" cy="12192000"/>
@@ -127,7 +128,7 @@
 <file path=ppt/revisionInfo.xml><?xml version="1.0" encoding="utf-8"?>
 <p1510:revInfo xmlns:a="http://schemas.openxmlformats.org/drawingml/2006/main" xmlns:r="http://schemas.openxmlformats.org/officeDocument/2006/relationships" xmlns:p1510="http://schemas.microsoft.com/office/powerpoint/2015/10/main">
   <p1510:revLst>
-    <p1510:client id="{34429F44-65AC-4083-9E7B-F04BABE182CC}" v="6" dt="2026-09-15T07:52:30.592"/>
+    <p1510:client id="{25214FB4-F113-47E4-A546-66C05D33C6BD}" v="29" dt="2026-09-17T09:38:34.872"/>
   </p1510:revLst>
 </p1510:revInfo>
 </file>
@@ -136,8 +137,8 @@
 <pc:chgInfo xmlns:a="http://schemas.openxmlformats.org/drawingml/2006/main" xmlns:r="http://schemas.openxmlformats.org/officeDocument/2006/relationships" xmlns:ac="http://schemas.microsoft.com/office/drawing/2013/main/command" xmlns:pc="http://schemas.microsoft.com/office/powerpoint/2013/main/command">
   <pc:docChgLst>
     <pc:chgData name="Swkratis Giannoutsos" userId="635c5988b0ac75cb" providerId="LiveId" clId="{2A7595ED-FB9C-4431-944F-C1113FEFC942}"/>
-    <pc:docChg chg="undo custSel addSld modSld sldOrd">
-      <pc:chgData name="Swkratis Giannoutsos" userId="635c5988b0ac75cb" providerId="LiveId" clId="{2A7595ED-FB9C-4431-944F-C1113FEFC942}" dt="2026-09-15T08:33:29.224" v="1317" actId="20577"/>
+    <pc:docChg chg="undo custSel addSld delSld modSld sldOrd">
+      <pc:chgData name="Swkratis Giannoutsos" userId="635c5988b0ac75cb" providerId="LiveId" clId="{2A7595ED-FB9C-4431-944F-C1113FEFC942}" dt="2026-09-17T09:40:23.020" v="2470" actId="1076"/>
       <pc:docMkLst>
         <pc:docMk/>
       </pc:docMkLst>
@@ -156,14 +157,37 @@
           </ac:spMkLst>
         </pc:spChg>
       </pc:sldChg>
+      <pc:sldChg chg="modSp mod modNotesTx">
+        <pc:chgData name="Swkratis Giannoutsos" userId="635c5988b0ac75cb" providerId="LiveId" clId="{2A7595ED-FB9C-4431-944F-C1113FEFC942}" dt="2026-09-17T09:26:48.010" v="2339" actId="20577"/>
+        <pc:sldMkLst>
+          <pc:docMk/>
+          <pc:sldMk cId="0" sldId="257"/>
+        </pc:sldMkLst>
+        <pc:spChg chg="mod">
+          <ac:chgData name="Swkratis Giannoutsos" userId="635c5988b0ac75cb" providerId="LiveId" clId="{2A7595ED-FB9C-4431-944F-C1113FEFC942}" dt="2026-09-17T06:25:16.777" v="1926" actId="20577"/>
+          <ac:spMkLst>
+            <pc:docMk/>
+            <pc:sldMk cId="0" sldId="257"/>
+            <ac:spMk id="7" creationId="{00000000-0000-0000-0000-000000000000}"/>
+          </ac:spMkLst>
+        </pc:spChg>
+      </pc:sldChg>
       <pc:sldChg chg="modSp mod">
-        <pc:chgData name="Swkratis Giannoutsos" userId="635c5988b0ac75cb" providerId="LiveId" clId="{2A7595ED-FB9C-4431-944F-C1113FEFC942}" dt="2026-09-15T07:57:10.482" v="1203" actId="6549"/>
+        <pc:chgData name="Swkratis Giannoutsos" userId="635c5988b0ac75cb" providerId="LiveId" clId="{2A7595ED-FB9C-4431-944F-C1113FEFC942}" dt="2026-09-16T11:13:59.218" v="1712" actId="20577"/>
         <pc:sldMkLst>
           <pc:docMk/>
           <pc:sldMk cId="0" sldId="258"/>
         </pc:sldMkLst>
         <pc:spChg chg="mod">
-          <ac:chgData name="Swkratis Giannoutsos" userId="635c5988b0ac75cb" providerId="LiveId" clId="{2A7595ED-FB9C-4431-944F-C1113FEFC942}" dt="2026-09-14T09:53:21.529" v="15" actId="122"/>
+          <ac:chgData name="Swkratis Giannoutsos" userId="635c5988b0ac75cb" providerId="LiveId" clId="{2A7595ED-FB9C-4431-944F-C1113FEFC942}" dt="2026-09-16T11:13:21.090" v="1649" actId="20577"/>
+          <ac:spMkLst>
+            <pc:docMk/>
+            <pc:sldMk cId="0" sldId="258"/>
+            <ac:spMk id="5" creationId="{00000000-0000-0000-0000-000000000000}"/>
+          </ac:spMkLst>
+        </pc:spChg>
+        <pc:spChg chg="mod">
+          <ac:chgData name="Swkratis Giannoutsos" userId="635c5988b0ac75cb" providerId="LiveId" clId="{2A7595ED-FB9C-4431-944F-C1113FEFC942}" dt="2026-09-16T10:55:32.970" v="1339" actId="20577"/>
           <ac:spMkLst>
             <pc:docMk/>
             <pc:sldMk cId="0" sldId="258"/>
@@ -171,7 +195,7 @@
           </ac:spMkLst>
         </pc:spChg>
         <pc:spChg chg="mod">
-          <ac:chgData name="Swkratis Giannoutsos" userId="635c5988b0ac75cb" providerId="LiveId" clId="{2A7595ED-FB9C-4431-944F-C1113FEFC942}" dt="2026-09-14T09:54:07.640" v="60" actId="20577"/>
+          <ac:chgData name="Swkratis Giannoutsos" userId="635c5988b0ac75cb" providerId="LiveId" clId="{2A7595ED-FB9C-4431-944F-C1113FEFC942}" dt="2026-09-16T11:13:59.218" v="1712" actId="20577"/>
           <ac:spMkLst>
             <pc:docMk/>
             <pc:sldMk cId="0" sldId="258"/>
@@ -187,16 +211,24 @@
           </ac:spMkLst>
         </pc:spChg>
         <pc:spChg chg="mod">
-          <ac:chgData name="Swkratis Giannoutsos" userId="635c5988b0ac75cb" providerId="LiveId" clId="{2A7595ED-FB9C-4431-944F-C1113FEFC942}" dt="2026-09-15T07:57:10.482" v="1203" actId="6549"/>
+          <ac:chgData name="Swkratis Giannoutsos" userId="635c5988b0ac75cb" providerId="LiveId" clId="{2A7595ED-FB9C-4431-944F-C1113FEFC942}" dt="2026-09-16T10:57:08.315" v="1527" actId="20577"/>
           <ac:spMkLst>
             <pc:docMk/>
             <pc:sldMk cId="0" sldId="258"/>
             <ac:spMk id="11" creationId="{00000000-0000-0000-0000-000000000000}"/>
           </ac:spMkLst>
         </pc:spChg>
+        <pc:spChg chg="mod">
+          <ac:chgData name="Swkratis Giannoutsos" userId="635c5988b0ac75cb" providerId="LiveId" clId="{2A7595ED-FB9C-4431-944F-C1113FEFC942}" dt="2026-09-16T10:58:23.953" v="1606" actId="20577"/>
+          <ac:spMkLst>
+            <pc:docMk/>
+            <pc:sldMk cId="0" sldId="258"/>
+            <ac:spMk id="13" creationId="{00000000-0000-0000-0000-000000000000}"/>
+          </ac:spMkLst>
+        </pc:spChg>
       </pc:sldChg>
-      <pc:sldChg chg="addSp delSp modSp mod ord">
-        <pc:chgData name="Swkratis Giannoutsos" userId="635c5988b0ac75cb" providerId="LiveId" clId="{2A7595ED-FB9C-4431-944F-C1113FEFC942}" dt="2026-09-15T07:51:25.396" v="825" actId="207"/>
+      <pc:sldChg chg="addSp delSp modSp mod ord modNotesTx">
+        <pc:chgData name="Swkratis Giannoutsos" userId="635c5988b0ac75cb" providerId="LiveId" clId="{2A7595ED-FB9C-4431-944F-C1113FEFC942}" dt="2026-09-17T07:18:51.150" v="2228" actId="20577"/>
         <pc:sldMkLst>
           <pc:docMk/>
           <pc:sldMk cId="0" sldId="259"/>
@@ -226,7 +258,7 @@
           </ac:spMkLst>
         </pc:spChg>
         <pc:spChg chg="mod">
-          <ac:chgData name="Swkratis Giannoutsos" userId="635c5988b0ac75cb" providerId="LiveId" clId="{2A7595ED-FB9C-4431-944F-C1113FEFC942}" dt="2026-09-15T07:51:25.396" v="825" actId="207"/>
+          <ac:chgData name="Swkratis Giannoutsos" userId="635c5988b0ac75cb" providerId="LiveId" clId="{2A7595ED-FB9C-4431-944F-C1113FEFC942}" dt="2026-09-17T07:16:23.394" v="2163" actId="20577"/>
           <ac:spMkLst>
             <pc:docMk/>
             <pc:sldMk cId="0" sldId="259"/>
@@ -258,7 +290,7 @@
           </ac:spMkLst>
         </pc:spChg>
         <pc:spChg chg="mod">
-          <ac:chgData name="Swkratis Giannoutsos" userId="635c5988b0ac75cb" providerId="LiveId" clId="{2A7595ED-FB9C-4431-944F-C1113FEFC942}" dt="2026-09-15T07:51:21.070" v="824" actId="207"/>
+          <ac:chgData name="Swkratis Giannoutsos" userId="635c5988b0ac75cb" providerId="LiveId" clId="{2A7595ED-FB9C-4431-944F-C1113FEFC942}" dt="2026-09-17T07:16:28.445" v="2172" actId="20577"/>
           <ac:spMkLst>
             <pc:docMk/>
             <pc:sldMk cId="0" sldId="259"/>
@@ -290,24 +322,55 @@
           </ac:spMkLst>
         </pc:spChg>
         <pc:spChg chg="mod">
-          <ac:chgData name="Swkratis Giannoutsos" userId="635c5988b0ac75cb" providerId="LiveId" clId="{2A7595ED-FB9C-4431-944F-C1113FEFC942}" dt="2026-09-15T07:51:17.107" v="823" actId="207"/>
+          <ac:chgData name="Swkratis Giannoutsos" userId="635c5988b0ac75cb" providerId="LiveId" clId="{2A7595ED-FB9C-4431-944F-C1113FEFC942}" dt="2026-09-17T07:16:51.031" v="2196" actId="20577"/>
+          <ac:spMkLst>
+            <pc:docMk/>
+            <pc:sldMk cId="0" sldId="259"/>
+            <ac:spMk id="28" creationId="{00000000-0000-0000-0000-000000000000}"/>
+          </ac:spMkLst>
+        </pc:spChg>
+        <pc:spChg chg="mod">
+          <ac:chgData name="Swkratis Giannoutsos" userId="635c5988b0ac75cb" providerId="LiveId" clId="{2A7595ED-FB9C-4431-944F-C1113FEFC942}" dt="2026-09-17T07:16:44.343" v="2192" actId="20577"/>
+          <ac:spMkLst>
+            <pc:docMk/>
+            <pc:sldMk cId="0" sldId="259"/>
+            <ac:spMk id="30" creationId="{00000000-0000-0000-0000-000000000000}"/>
+          </ac:spMkLst>
+        </pc:spChg>
+        <pc:spChg chg="mod">
+          <ac:chgData name="Swkratis Giannoutsos" userId="635c5988b0ac75cb" providerId="LiveId" clId="{2A7595ED-FB9C-4431-944F-C1113FEFC942}" dt="2026-09-17T07:16:33.881" v="2176" actId="20577"/>
           <ac:spMkLst>
             <pc:docMk/>
             <pc:sldMk cId="0" sldId="259"/>
             <ac:spMk id="32" creationId="{00000000-0000-0000-0000-000000000000}"/>
           </ac:spMkLst>
         </pc:spChg>
-        <pc:spChg chg="add del mod">
-          <ac:chgData name="Swkratis Giannoutsos" userId="635c5988b0ac75cb" providerId="LiveId" clId="{2A7595ED-FB9C-4431-944F-C1113FEFC942}" dt="2026-09-14T12:08:02.075" v="310"/>
+      </pc:sldChg>
+      <pc:sldChg chg="modSp mod">
+        <pc:chgData name="Swkratis Giannoutsos" userId="635c5988b0ac75cb" providerId="LiveId" clId="{2A7595ED-FB9C-4431-944F-C1113FEFC942}" dt="2026-09-16T11:16:28.076" v="1872" actId="20577"/>
+        <pc:sldMkLst>
+          <pc:docMk/>
+          <pc:sldMk cId="0" sldId="260"/>
+        </pc:sldMkLst>
+        <pc:spChg chg="mod">
+          <ac:chgData name="Swkratis Giannoutsos" userId="635c5988b0ac75cb" providerId="LiveId" clId="{2A7595ED-FB9C-4431-944F-C1113FEFC942}" dt="2026-09-16T11:15:44.301" v="1737" actId="20577"/>
           <ac:spMkLst>
             <pc:docMk/>
-            <pc:sldMk cId="0" sldId="259"/>
-            <ac:spMk id="35" creationId="{7FFC1409-2A84-8927-C23B-DD4E0DD55D15}"/>
+            <pc:sldMk cId="0" sldId="260"/>
+            <ac:spMk id="13" creationId="{00000000-0000-0000-0000-000000000000}"/>
+          </ac:spMkLst>
+        </pc:spChg>
+        <pc:spChg chg="mod">
+          <ac:chgData name="Swkratis Giannoutsos" userId="635c5988b0ac75cb" providerId="LiveId" clId="{2A7595ED-FB9C-4431-944F-C1113FEFC942}" dt="2026-09-16T11:16:28.076" v="1872" actId="20577"/>
+          <ac:spMkLst>
+            <pc:docMk/>
+            <pc:sldMk cId="0" sldId="260"/>
+            <ac:spMk id="14" creationId="{00000000-0000-0000-0000-000000000000}"/>
           </ac:spMkLst>
         </pc:spChg>
       </pc:sldChg>
-      <pc:sldChg chg="modSp mod">
-        <pc:chgData name="Swkratis Giannoutsos" userId="635c5988b0ac75cb" providerId="LiveId" clId="{2A7595ED-FB9C-4431-944F-C1113FEFC942}" dt="2026-09-15T07:59:56.314" v="1225" actId="20577"/>
+      <pc:sldChg chg="modSp mod ord modNotesTx">
+        <pc:chgData name="Swkratis Giannoutsos" userId="635c5988b0ac75cb" providerId="LiveId" clId="{2A7595ED-FB9C-4431-944F-C1113FEFC942}" dt="2026-09-17T06:45:14.887" v="1930" actId="20577"/>
         <pc:sldMkLst>
           <pc:docMk/>
           <pc:sldMk cId="0" sldId="261"/>
@@ -337,23 +400,158 @@
           </ac:spMkLst>
         </pc:spChg>
       </pc:sldChg>
-      <pc:sldChg chg="modSp mod">
-        <pc:chgData name="Swkratis Giannoutsos" userId="635c5988b0ac75cb" providerId="LiveId" clId="{2A7595ED-FB9C-4431-944F-C1113FEFC942}" dt="2026-09-14T09:56:48.651" v="216" actId="6549"/>
+      <pc:sldChg chg="delSp modSp mod modNotesTx">
+        <pc:chgData name="Swkratis Giannoutsos" userId="635c5988b0ac75cb" providerId="LiveId" clId="{2A7595ED-FB9C-4431-944F-C1113FEFC942}" dt="2026-09-17T07:08:34.908" v="2146" actId="20577"/>
         <pc:sldMkLst>
           <pc:docMk/>
           <pc:sldMk cId="0" sldId="262"/>
         </pc:sldMkLst>
         <pc:spChg chg="mod">
-          <ac:chgData name="Swkratis Giannoutsos" userId="635c5988b0ac75cb" providerId="LiveId" clId="{2A7595ED-FB9C-4431-944F-C1113FEFC942}" dt="2026-09-14T09:56:48.651" v="216" actId="6549"/>
+          <ac:chgData name="Swkratis Giannoutsos" userId="635c5988b0ac75cb" providerId="LiveId" clId="{2A7595ED-FB9C-4431-944F-C1113FEFC942}" dt="2026-09-16T11:18:28.337" v="1873" actId="1076"/>
+          <ac:spMkLst>
+            <pc:docMk/>
+            <pc:sldMk cId="0" sldId="262"/>
+            <ac:spMk id="5" creationId="{00000000-0000-0000-0000-000000000000}"/>
+          </ac:spMkLst>
+        </pc:spChg>
+        <pc:spChg chg="mod">
+          <ac:chgData name="Swkratis Giannoutsos" userId="635c5988b0ac75cb" providerId="LiveId" clId="{2A7595ED-FB9C-4431-944F-C1113FEFC942}" dt="2026-09-16T13:24:29.896" v="1881" actId="1076"/>
           <ac:spMkLst>
             <pc:docMk/>
             <pc:sldMk cId="0" sldId="262"/>
             <ac:spMk id="6" creationId="{00000000-0000-0000-0000-000000000000}"/>
           </ac:spMkLst>
         </pc:spChg>
+        <pc:spChg chg="del">
+          <ac:chgData name="Swkratis Giannoutsos" userId="635c5988b0ac75cb" providerId="LiveId" clId="{2A7595ED-FB9C-4431-944F-C1113FEFC942}" dt="2026-09-16T13:24:00.822" v="1876" actId="478"/>
+          <ac:spMkLst>
+            <pc:docMk/>
+            <pc:sldMk cId="0" sldId="262"/>
+            <ac:spMk id="7" creationId="{00000000-0000-0000-0000-000000000000}"/>
+          </ac:spMkLst>
+        </pc:spChg>
+        <pc:graphicFrameChg chg="del">
+          <ac:chgData name="Swkratis Giannoutsos" userId="635c5988b0ac75cb" providerId="LiveId" clId="{2A7595ED-FB9C-4431-944F-C1113FEFC942}" dt="2026-09-16T13:23:57.128" v="1875" actId="478"/>
+          <ac:graphicFrameMkLst>
+            <pc:docMk/>
+            <pc:sldMk cId="0" sldId="262"/>
+            <ac:graphicFrameMk id="8" creationId="{00000000-0000-0000-0000-000000000000}"/>
+          </ac:graphicFrameMkLst>
+        </pc:graphicFrameChg>
       </pc:sldChg>
-      <pc:sldChg chg="modSp mod">
-        <pc:chgData name="Swkratis Giannoutsos" userId="635c5988b0ac75cb" providerId="LiveId" clId="{2A7595ED-FB9C-4431-944F-C1113FEFC942}" dt="2026-09-15T08:11:43.251" v="1252" actId="20577"/>
+      <pc:sldChg chg="delSp modSp mod modNotesTx">
+        <pc:chgData name="Swkratis Giannoutsos" userId="635c5988b0ac75cb" providerId="LiveId" clId="{2A7595ED-FB9C-4431-944F-C1113FEFC942}" dt="2026-09-17T07:26:54.523" v="2283" actId="20577"/>
+        <pc:sldMkLst>
+          <pc:docMk/>
+          <pc:sldMk cId="0" sldId="263"/>
+        </pc:sldMkLst>
+        <pc:spChg chg="mod">
+          <ac:chgData name="Swkratis Giannoutsos" userId="635c5988b0ac75cb" providerId="LiveId" clId="{2A7595ED-FB9C-4431-944F-C1113FEFC942}" dt="2026-09-16T11:00:05.236" v="1609" actId="1076"/>
+          <ac:spMkLst>
+            <pc:docMk/>
+            <pc:sldMk cId="0" sldId="263"/>
+            <ac:spMk id="5" creationId="{00000000-0000-0000-0000-000000000000}"/>
+          </ac:spMkLst>
+        </pc:spChg>
+        <pc:spChg chg="mod">
+          <ac:chgData name="Swkratis Giannoutsos" userId="635c5988b0ac75cb" providerId="LiveId" clId="{2A7595ED-FB9C-4431-944F-C1113FEFC942}" dt="2026-09-16T11:00:27.335" v="1612" actId="1076"/>
+          <ac:spMkLst>
+            <pc:docMk/>
+            <pc:sldMk cId="0" sldId="263"/>
+            <ac:spMk id="6" creationId="{00000000-0000-0000-0000-000000000000}"/>
+          </ac:spMkLst>
+        </pc:spChg>
+        <pc:spChg chg="mod">
+          <ac:chgData name="Swkratis Giannoutsos" userId="635c5988b0ac75cb" providerId="LiveId" clId="{2A7595ED-FB9C-4431-944F-C1113FEFC942}" dt="2026-09-16T11:00:27.335" v="1612" actId="1076"/>
+          <ac:spMkLst>
+            <pc:docMk/>
+            <pc:sldMk cId="0" sldId="263"/>
+            <ac:spMk id="9" creationId="{00000000-0000-0000-0000-000000000000}"/>
+          </ac:spMkLst>
+        </pc:spChg>
+        <pc:spChg chg="mod">
+          <ac:chgData name="Swkratis Giannoutsos" userId="635c5988b0ac75cb" providerId="LiveId" clId="{2A7595ED-FB9C-4431-944F-C1113FEFC942}" dt="2026-09-16T11:00:27.335" v="1612" actId="1076"/>
+          <ac:spMkLst>
+            <pc:docMk/>
+            <pc:sldMk cId="0" sldId="263"/>
+            <ac:spMk id="10" creationId="{00000000-0000-0000-0000-000000000000}"/>
+          </ac:spMkLst>
+        </pc:spChg>
+        <pc:spChg chg="mod">
+          <ac:chgData name="Swkratis Giannoutsos" userId="635c5988b0ac75cb" providerId="LiveId" clId="{2A7595ED-FB9C-4431-944F-C1113FEFC942}" dt="2026-09-16T11:00:27.335" v="1612" actId="1076"/>
+          <ac:spMkLst>
+            <pc:docMk/>
+            <pc:sldMk cId="0" sldId="263"/>
+            <ac:spMk id="12" creationId="{00000000-0000-0000-0000-000000000000}"/>
+          </ac:spMkLst>
+        </pc:spChg>
+        <pc:spChg chg="mod">
+          <ac:chgData name="Swkratis Giannoutsos" userId="635c5988b0ac75cb" providerId="LiveId" clId="{2A7595ED-FB9C-4431-944F-C1113FEFC942}" dt="2026-09-16T11:00:27.335" v="1612" actId="1076"/>
+          <ac:spMkLst>
+            <pc:docMk/>
+            <pc:sldMk cId="0" sldId="263"/>
+            <ac:spMk id="14" creationId="{00000000-0000-0000-0000-000000000000}"/>
+          </ac:spMkLst>
+        </pc:spChg>
+        <pc:spChg chg="mod">
+          <ac:chgData name="Swkratis Giannoutsos" userId="635c5988b0ac75cb" providerId="LiveId" clId="{2A7595ED-FB9C-4431-944F-C1113FEFC942}" dt="2026-09-16T11:00:27.335" v="1612" actId="1076"/>
+          <ac:spMkLst>
+            <pc:docMk/>
+            <pc:sldMk cId="0" sldId="263"/>
+            <ac:spMk id="15" creationId="{00000000-0000-0000-0000-000000000000}"/>
+          </ac:spMkLst>
+        </pc:spChg>
+        <pc:spChg chg="mod">
+          <ac:chgData name="Swkratis Giannoutsos" userId="635c5988b0ac75cb" providerId="LiveId" clId="{2A7595ED-FB9C-4431-944F-C1113FEFC942}" dt="2026-09-16T11:00:27.335" v="1612" actId="1076"/>
+          <ac:spMkLst>
+            <pc:docMk/>
+            <pc:sldMk cId="0" sldId="263"/>
+            <ac:spMk id="16" creationId="{00000000-0000-0000-0000-000000000000}"/>
+          </ac:spMkLst>
+        </pc:spChg>
+        <pc:spChg chg="mod">
+          <ac:chgData name="Swkratis Giannoutsos" userId="635c5988b0ac75cb" providerId="LiveId" clId="{2A7595ED-FB9C-4431-944F-C1113FEFC942}" dt="2026-09-16T11:00:27.335" v="1612" actId="1076"/>
+          <ac:spMkLst>
+            <pc:docMk/>
+            <pc:sldMk cId="0" sldId="263"/>
+            <ac:spMk id="19" creationId="{00000000-0000-0000-0000-000000000000}"/>
+          </ac:spMkLst>
+        </pc:spChg>
+        <pc:spChg chg="mod">
+          <ac:chgData name="Swkratis Giannoutsos" userId="635c5988b0ac75cb" providerId="LiveId" clId="{2A7595ED-FB9C-4431-944F-C1113FEFC942}" dt="2026-09-16T11:00:27.335" v="1612" actId="1076"/>
+          <ac:spMkLst>
+            <pc:docMk/>
+            <pc:sldMk cId="0" sldId="263"/>
+            <ac:spMk id="20" creationId="{00000000-0000-0000-0000-000000000000}"/>
+          </ac:spMkLst>
+        </pc:spChg>
+        <pc:spChg chg="mod">
+          <ac:chgData name="Swkratis Giannoutsos" userId="635c5988b0ac75cb" providerId="LiveId" clId="{2A7595ED-FB9C-4431-944F-C1113FEFC942}" dt="2026-09-16T11:00:27.335" v="1612" actId="1076"/>
+          <ac:spMkLst>
+            <pc:docMk/>
+            <pc:sldMk cId="0" sldId="263"/>
+            <ac:spMk id="22" creationId="{00000000-0000-0000-0000-000000000000}"/>
+          </ac:spMkLst>
+        </pc:spChg>
+        <pc:spChg chg="mod">
+          <ac:chgData name="Swkratis Giannoutsos" userId="635c5988b0ac75cb" providerId="LiveId" clId="{2A7595ED-FB9C-4431-944F-C1113FEFC942}" dt="2026-09-16T11:00:12.449" v="1610" actId="1076"/>
+          <ac:spMkLst>
+            <pc:docMk/>
+            <pc:sldMk cId="0" sldId="263"/>
+            <ac:spMk id="23" creationId="{00000000-0000-0000-0000-000000000000}"/>
+          </ac:spMkLst>
+        </pc:spChg>
+        <pc:spChg chg="del mod">
+          <ac:chgData name="Swkratis Giannoutsos" userId="635c5988b0ac75cb" providerId="LiveId" clId="{2A7595ED-FB9C-4431-944F-C1113FEFC942}" dt="2026-09-16T11:00:35.380" v="1613" actId="478"/>
+          <ac:spMkLst>
+            <pc:docMk/>
+            <pc:sldMk cId="0" sldId="263"/>
+            <ac:spMk id="24" creationId="{00000000-0000-0000-0000-000000000000}"/>
+          </ac:spMkLst>
+        </pc:spChg>
+      </pc:sldChg>
+      <pc:sldChg chg="modSp mod modNotesTx">
+        <pc:chgData name="Swkratis Giannoutsos" userId="635c5988b0ac75cb" providerId="LiveId" clId="{2A7595ED-FB9C-4431-944F-C1113FEFC942}" dt="2026-09-17T06:47:49.897" v="1945" actId="20577"/>
         <pc:sldMkLst>
           <pc:docMk/>
           <pc:sldMk cId="0" sldId="264"/>
@@ -375,14 +573,14 @@
           </ac:spMkLst>
         </pc:spChg>
       </pc:sldChg>
-      <pc:sldChg chg="modSp mod">
-        <pc:chgData name="Swkratis Giannoutsos" userId="635c5988b0ac75cb" providerId="LiveId" clId="{2A7595ED-FB9C-4431-944F-C1113FEFC942}" dt="2026-09-15T08:13:06.398" v="1254" actId="20577"/>
+      <pc:sldChg chg="modSp mod modNotesTx">
+        <pc:chgData name="Swkratis Giannoutsos" userId="635c5988b0ac75cb" providerId="LiveId" clId="{2A7595ED-FB9C-4431-944F-C1113FEFC942}" dt="2026-09-17T07:10:35.978" v="2147" actId="20577"/>
         <pc:sldMkLst>
           <pc:docMk/>
           <pc:sldMk cId="0" sldId="265"/>
         </pc:sldMkLst>
         <pc:spChg chg="mod">
-          <ac:chgData name="Swkratis Giannoutsos" userId="635c5988b0ac75cb" providerId="LiveId" clId="{2A7595ED-FB9C-4431-944F-C1113FEFC942}" dt="2026-09-15T08:13:06.398" v="1254" actId="20577"/>
+          <ac:chgData name="Swkratis Giannoutsos" userId="635c5988b0ac75cb" providerId="LiveId" clId="{2A7595ED-FB9C-4431-944F-C1113FEFC942}" dt="2026-09-16T12:08:28.064" v="1874" actId="1076"/>
           <ac:spMkLst>
             <pc:docMk/>
             <pc:sldMk cId="0" sldId="265"/>
@@ -390,14 +588,14 @@
           </ac:spMkLst>
         </pc:spChg>
       </pc:sldChg>
-      <pc:sldChg chg="modSp mod">
-        <pc:chgData name="Swkratis Giannoutsos" userId="635c5988b0ac75cb" providerId="LiveId" clId="{2A7595ED-FB9C-4431-944F-C1113FEFC942}" dt="2026-09-15T08:17:52.701" v="1291" actId="207"/>
+      <pc:sldChg chg="modSp mod modNotesTx">
+        <pc:chgData name="Swkratis Giannoutsos" userId="635c5988b0ac75cb" providerId="LiveId" clId="{2A7595ED-FB9C-4431-944F-C1113FEFC942}" dt="2026-09-17T09:33:32.545" v="2340" actId="20577"/>
         <pc:sldMkLst>
           <pc:docMk/>
           <pc:sldMk cId="0" sldId="266"/>
         </pc:sldMkLst>
         <pc:spChg chg="mod">
-          <ac:chgData name="Swkratis Giannoutsos" userId="635c5988b0ac75cb" providerId="LiveId" clId="{2A7595ED-FB9C-4431-944F-C1113FEFC942}" dt="2026-09-15T08:17:11.432" v="1286" actId="207"/>
+          <ac:chgData name="Swkratis Giannoutsos" userId="635c5988b0ac75cb" providerId="LiveId" clId="{2A7595ED-FB9C-4431-944F-C1113FEFC942}" dt="2026-09-16T10:47:47.826" v="1321" actId="207"/>
           <ac:spMkLst>
             <pc:docMk/>
             <pc:sldMk cId="0" sldId="266"/>
@@ -413,7 +611,7 @@
           </ac:spMkLst>
         </pc:spChg>
         <pc:spChg chg="mod">
-          <ac:chgData name="Swkratis Giannoutsos" userId="635c5988b0ac75cb" providerId="LiveId" clId="{2A7595ED-FB9C-4431-944F-C1113FEFC942}" dt="2026-09-15T08:17:35.125" v="1287" actId="207"/>
+          <ac:chgData name="Swkratis Giannoutsos" userId="635c5988b0ac75cb" providerId="LiveId" clId="{2A7595ED-FB9C-4431-944F-C1113FEFC942}" dt="2026-09-16T10:47:53.732" v="1322" actId="207"/>
           <ac:spMkLst>
             <pc:docMk/>
             <pc:sldMk cId="0" sldId="266"/>
@@ -429,7 +627,7 @@
           </ac:spMkLst>
         </pc:spChg>
         <pc:spChg chg="mod">
-          <ac:chgData name="Swkratis Giannoutsos" userId="635c5988b0ac75cb" providerId="LiveId" clId="{2A7595ED-FB9C-4431-944F-C1113FEFC942}" dt="2026-09-15T08:17:38.311" v="1288" actId="207"/>
+          <ac:chgData name="Swkratis Giannoutsos" userId="635c5988b0ac75cb" providerId="LiveId" clId="{2A7595ED-FB9C-4431-944F-C1113FEFC942}" dt="2026-09-16T10:47:36.829" v="1318" actId="207"/>
           <ac:spMkLst>
             <pc:docMk/>
             <pc:sldMk cId="0" sldId="266"/>
@@ -437,7 +635,7 @@
           </ac:spMkLst>
         </pc:spChg>
         <pc:spChg chg="mod">
-          <ac:chgData name="Swkratis Giannoutsos" userId="635c5988b0ac75cb" providerId="LiveId" clId="{2A7595ED-FB9C-4431-944F-C1113FEFC942}" dt="2026-09-15T08:17:48.828" v="1290" actId="207"/>
+          <ac:chgData name="Swkratis Giannoutsos" userId="635c5988b0ac75cb" providerId="LiveId" clId="{2A7595ED-FB9C-4431-944F-C1113FEFC942}" dt="2026-09-16T10:47:41" v="1319" actId="207"/>
           <ac:spMkLst>
             <pc:docMk/>
             <pc:sldMk cId="0" sldId="266"/>
@@ -445,7 +643,7 @@
           </ac:spMkLst>
         </pc:spChg>
         <pc:spChg chg="mod">
-          <ac:chgData name="Swkratis Giannoutsos" userId="635c5988b0ac75cb" providerId="LiveId" clId="{2A7595ED-FB9C-4431-944F-C1113FEFC942}" dt="2026-09-15T08:17:42.531" v="1289" actId="207"/>
+          <ac:chgData name="Swkratis Giannoutsos" userId="635c5988b0ac75cb" providerId="LiveId" clId="{2A7595ED-FB9C-4431-944F-C1113FEFC942}" dt="2026-09-16T10:47:44.664" v="1320" actId="207"/>
           <ac:spMkLst>
             <pc:docMk/>
             <pc:sldMk cId="0" sldId="266"/>
@@ -453,7 +651,7 @@
           </ac:spMkLst>
         </pc:spChg>
         <pc:spChg chg="mod">
-          <ac:chgData name="Swkratis Giannoutsos" userId="635c5988b0ac75cb" providerId="LiveId" clId="{2A7595ED-FB9C-4431-944F-C1113FEFC942}" dt="2026-09-15T08:17:52.701" v="1291" actId="207"/>
+          <ac:chgData name="Swkratis Giannoutsos" userId="635c5988b0ac75cb" providerId="LiveId" clId="{2A7595ED-FB9C-4431-944F-C1113FEFC942}" dt="2026-09-16T10:47:57.827" v="1323" actId="207"/>
           <ac:spMkLst>
             <pc:docMk/>
             <pc:sldMk cId="0" sldId="266"/>
@@ -461,14 +659,37 @@
           </ac:spMkLst>
         </pc:spChg>
       </pc:sldChg>
-      <pc:sldChg chg="delSp modSp add mod setBg">
-        <pc:chgData name="Swkratis Giannoutsos" userId="635c5988b0ac75cb" providerId="LiveId" clId="{2A7595ED-FB9C-4431-944F-C1113FEFC942}" dt="2026-09-15T08:33:29.224" v="1317" actId="20577"/>
+      <pc:sldChg chg="modSp mod">
+        <pc:chgData name="Swkratis Giannoutsos" userId="635c5988b0ac75cb" providerId="LiveId" clId="{2A7595ED-FB9C-4431-944F-C1113FEFC942}" dt="2026-09-17T09:36:04.091" v="2357" actId="20577"/>
+        <pc:sldMkLst>
+          <pc:docMk/>
+          <pc:sldMk cId="0" sldId="267"/>
+        </pc:sldMkLst>
+        <pc:spChg chg="mod">
+          <ac:chgData name="Swkratis Giannoutsos" userId="635c5988b0ac75cb" providerId="LiveId" clId="{2A7595ED-FB9C-4431-944F-C1113FEFC942}" dt="2026-09-17T09:36:04.091" v="2357" actId="20577"/>
+          <ac:spMkLst>
+            <pc:docMk/>
+            <pc:sldMk cId="0" sldId="267"/>
+            <ac:spMk id="7" creationId="{00000000-0000-0000-0000-000000000000}"/>
+          </ac:spMkLst>
+        </pc:spChg>
+      </pc:sldChg>
+      <pc:sldChg chg="delSp modSp add mod setBg modNotesTx">
+        <pc:chgData name="Swkratis Giannoutsos" userId="635c5988b0ac75cb" providerId="LiveId" clId="{2A7595ED-FB9C-4431-944F-C1113FEFC942}" dt="2026-09-17T07:14:40.017" v="2154" actId="20577"/>
         <pc:sldMkLst>
           <pc:docMk/>
           <pc:sldMk cId="0" sldId="268"/>
         </pc:sldMkLst>
+        <pc:spChg chg="del">
+          <ac:chgData name="Swkratis Giannoutsos" userId="635c5988b0ac75cb" providerId="LiveId" clId="{2A7595ED-FB9C-4431-944F-C1113FEFC942}" dt="2026-09-16T10:50:18.284" v="1329" actId="478"/>
+          <ac:spMkLst>
+            <pc:docMk/>
+            <pc:sldMk cId="0" sldId="268"/>
+            <ac:spMk id="6" creationId="{00000000-0000-0000-0000-000000000000}"/>
+          </ac:spMkLst>
+        </pc:spChg>
         <pc:spChg chg="mod">
-          <ac:chgData name="Swkratis Giannoutsos" userId="635c5988b0ac75cb" providerId="LiveId" clId="{2A7595ED-FB9C-4431-944F-C1113FEFC942}" dt="2026-09-15T07:41:58.047" v="355" actId="20577"/>
+          <ac:chgData name="Swkratis Giannoutsos" userId="635c5988b0ac75cb" providerId="LiveId" clId="{2A7595ED-FB9C-4431-944F-C1113FEFC942}" dt="2026-09-16T10:50:42.929" v="1334" actId="1076"/>
           <ac:spMkLst>
             <pc:docMk/>
             <pc:sldMk cId="0" sldId="268"/>
@@ -476,11 +697,43 @@
           </ac:spMkLst>
         </pc:spChg>
         <pc:spChg chg="mod">
-          <ac:chgData name="Swkratis Giannoutsos" userId="635c5988b0ac75cb" providerId="LiveId" clId="{2A7595ED-FB9C-4431-944F-C1113FEFC942}" dt="2026-09-15T07:43:39.443" v="379" actId="20577"/>
+          <ac:chgData name="Swkratis Giannoutsos" userId="635c5988b0ac75cb" providerId="LiveId" clId="{2A7595ED-FB9C-4431-944F-C1113FEFC942}" dt="2026-09-16T10:50:42.929" v="1334" actId="1076"/>
+          <ac:spMkLst>
+            <pc:docMk/>
+            <pc:sldMk cId="0" sldId="268"/>
+            <ac:spMk id="8" creationId="{00000000-0000-0000-0000-000000000000}"/>
+          </ac:spMkLst>
+        </pc:spChg>
+        <pc:spChg chg="mod">
+          <ac:chgData name="Swkratis Giannoutsos" userId="635c5988b0ac75cb" providerId="LiveId" clId="{2A7595ED-FB9C-4431-944F-C1113FEFC942}" dt="2026-09-16T10:50:42.929" v="1334" actId="1076"/>
+          <ac:spMkLst>
+            <pc:docMk/>
+            <pc:sldMk cId="0" sldId="268"/>
+            <ac:spMk id="9" creationId="{00000000-0000-0000-0000-000000000000}"/>
+          </ac:spMkLst>
+        </pc:spChg>
+        <pc:spChg chg="mod">
+          <ac:chgData name="Swkratis Giannoutsos" userId="635c5988b0ac75cb" providerId="LiveId" clId="{2A7595ED-FB9C-4431-944F-C1113FEFC942}" dt="2026-09-16T10:50:42.929" v="1334" actId="1076"/>
+          <ac:spMkLst>
+            <pc:docMk/>
+            <pc:sldMk cId="0" sldId="268"/>
+            <ac:spMk id="10" creationId="{00000000-0000-0000-0000-000000000000}"/>
+          </ac:spMkLst>
+        </pc:spChg>
+        <pc:spChg chg="mod">
+          <ac:chgData name="Swkratis Giannoutsos" userId="635c5988b0ac75cb" providerId="LiveId" clId="{2A7595ED-FB9C-4431-944F-C1113FEFC942}" dt="2026-09-16T10:50:42.929" v="1334" actId="1076"/>
           <ac:spMkLst>
             <pc:docMk/>
             <pc:sldMk cId="0" sldId="268"/>
             <ac:spMk id="11" creationId="{00000000-0000-0000-0000-000000000000}"/>
+          </ac:spMkLst>
+        </pc:spChg>
+        <pc:spChg chg="mod">
+          <ac:chgData name="Swkratis Giannoutsos" userId="635c5988b0ac75cb" providerId="LiveId" clId="{2A7595ED-FB9C-4431-944F-C1113FEFC942}" dt="2026-09-16T10:50:42.929" v="1334" actId="1076"/>
+          <ac:spMkLst>
+            <pc:docMk/>
+            <pc:sldMk cId="0" sldId="268"/>
+            <ac:spMk id="12" creationId="{00000000-0000-0000-0000-000000000000}"/>
           </ac:spMkLst>
         </pc:spChg>
         <pc:spChg chg="mod">
@@ -492,21 +745,115 @@
           </ac:spMkLst>
         </pc:spChg>
         <pc:spChg chg="mod">
-          <ac:chgData name="Swkratis Giannoutsos" userId="635c5988b0ac75cb" providerId="LiveId" clId="{2A7595ED-FB9C-4431-944F-C1113FEFC942}" dt="2026-09-15T07:55:58.715" v="1178" actId="20577"/>
+          <ac:chgData name="Swkratis Giannoutsos" userId="635c5988b0ac75cb" providerId="LiveId" clId="{2A7595ED-FB9C-4431-944F-C1113FEFC942}" dt="2026-09-16T10:49:31.892" v="1328" actId="20577"/>
           <ac:spMkLst>
             <pc:docMk/>
             <pc:sldMk cId="0" sldId="268"/>
-            <ac:spMk id="19" creationId="{00000000-0000-0000-0000-000000000000}"/>
+            <ac:spMk id="14" creationId="{00000000-0000-0000-0000-000000000000}"/>
+          </ac:spMkLst>
+        </pc:spChg>
+      </pc:sldChg>
+      <pc:sldChg chg="new del">
+        <pc:chgData name="Swkratis Giannoutsos" userId="635c5988b0ac75cb" providerId="LiveId" clId="{2A7595ED-FB9C-4431-944F-C1113FEFC942}" dt="2026-09-17T09:38:04.458" v="2360" actId="47"/>
+        <pc:sldMkLst>
+          <pc:docMk/>
+          <pc:sldMk cId="2373207329" sldId="269"/>
+        </pc:sldMkLst>
+      </pc:sldChg>
+      <pc:sldChg chg="addSp delSp modSp add mod">
+        <pc:chgData name="Swkratis Giannoutsos" userId="635c5988b0ac75cb" providerId="LiveId" clId="{2A7595ED-FB9C-4431-944F-C1113FEFC942}" dt="2026-09-17T09:40:23.020" v="2470" actId="1076"/>
+        <pc:sldMkLst>
+          <pc:docMk/>
+          <pc:sldMk cId="3544987491" sldId="270"/>
+        </pc:sldMkLst>
+        <pc:spChg chg="mod">
+          <ac:chgData name="Swkratis Giannoutsos" userId="635c5988b0ac75cb" providerId="LiveId" clId="{2A7595ED-FB9C-4431-944F-C1113FEFC942}" dt="2026-09-17T09:38:24.761" v="2397" actId="122"/>
+          <ac:spMkLst>
+            <pc:docMk/>
+            <pc:sldMk cId="3544987491" sldId="270"/>
+            <ac:spMk id="5" creationId="{FA694F63-A757-F2A1-3BB2-EAEA0E1F1C66}"/>
           </ac:spMkLst>
         </pc:spChg>
         <pc:spChg chg="del">
-          <ac:chgData name="Swkratis Giannoutsos" userId="635c5988b0ac75cb" providerId="LiveId" clId="{2A7595ED-FB9C-4431-944F-C1113FEFC942}" dt="2026-09-14T10:04:50.422" v="305" actId="478"/>
+          <ac:chgData name="Swkratis Giannoutsos" userId="635c5988b0ac75cb" providerId="LiveId" clId="{2A7595ED-FB9C-4431-944F-C1113FEFC942}" dt="2026-09-17T09:38:11.879" v="2364" actId="478"/>
           <ac:spMkLst>
             <pc:docMk/>
-            <pc:sldMk cId="0" sldId="268"/>
-            <ac:spMk id="20" creationId="{00000000-0000-0000-0000-000000000000}"/>
+            <pc:sldMk cId="3544987491" sldId="270"/>
+            <ac:spMk id="6" creationId="{C89CCF77-96D0-BA23-0828-B2B430680A46}"/>
           </ac:spMkLst>
         </pc:spChg>
+        <pc:spChg chg="del">
+          <ac:chgData name="Swkratis Giannoutsos" userId="635c5988b0ac75cb" providerId="LiveId" clId="{2A7595ED-FB9C-4431-944F-C1113FEFC942}" dt="2026-09-17T09:38:11.879" v="2364" actId="478"/>
+          <ac:spMkLst>
+            <pc:docMk/>
+            <pc:sldMk cId="3544987491" sldId="270"/>
+            <ac:spMk id="7" creationId="{4FF33371-37B0-AE4C-6A23-4E7CE80A9A5A}"/>
+          </ac:spMkLst>
+        </pc:spChg>
+        <pc:spChg chg="del">
+          <ac:chgData name="Swkratis Giannoutsos" userId="635c5988b0ac75cb" providerId="LiveId" clId="{2A7595ED-FB9C-4431-944F-C1113FEFC942}" dt="2026-09-17T09:38:11.879" v="2364" actId="478"/>
+          <ac:spMkLst>
+            <pc:docMk/>
+            <pc:sldMk cId="3544987491" sldId="270"/>
+            <ac:spMk id="8" creationId="{3C8D85CE-6025-2BAA-3D63-87E865C107FF}"/>
+          </ac:spMkLst>
+        </pc:spChg>
+        <pc:spChg chg="del">
+          <ac:chgData name="Swkratis Giannoutsos" userId="635c5988b0ac75cb" providerId="LiveId" clId="{2A7595ED-FB9C-4431-944F-C1113FEFC942}" dt="2026-09-17T09:38:11.879" v="2364" actId="478"/>
+          <ac:spMkLst>
+            <pc:docMk/>
+            <pc:sldMk cId="3544987491" sldId="270"/>
+            <ac:spMk id="9" creationId="{3040E961-6459-8AB1-1F3F-F9803FF1C81C}"/>
+          </ac:spMkLst>
+        </pc:spChg>
+        <pc:spChg chg="add del mod">
+          <ac:chgData name="Swkratis Giannoutsos" userId="635c5988b0ac75cb" providerId="LiveId" clId="{2A7595ED-FB9C-4431-944F-C1113FEFC942}" dt="2026-09-17T09:38:10.227" v="2363"/>
+          <ac:spMkLst>
+            <pc:docMk/>
+            <pc:sldMk cId="3544987491" sldId="270"/>
+            <ac:spMk id="11" creationId="{1EC9A65B-A5F8-5732-E131-AF66F2CFF7A8}"/>
+          </ac:spMkLst>
+        </pc:spChg>
+        <pc:spChg chg="add del mod">
+          <ac:chgData name="Swkratis Giannoutsos" userId="635c5988b0ac75cb" providerId="LiveId" clId="{2A7595ED-FB9C-4431-944F-C1113FEFC942}" dt="2026-09-17T09:38:33.562" v="2402"/>
+          <ac:spMkLst>
+            <pc:docMk/>
+            <pc:sldMk cId="3544987491" sldId="270"/>
+            <ac:spMk id="14" creationId="{02CAB4F5-A481-AECB-657C-81F708EBFAE2}"/>
+          </ac:spMkLst>
+        </pc:spChg>
+        <pc:spChg chg="add mod">
+          <ac:chgData name="Swkratis Giannoutsos" userId="635c5988b0ac75cb" providerId="LiveId" clId="{2A7595ED-FB9C-4431-944F-C1113FEFC942}" dt="2026-09-17T09:40:23.020" v="2470" actId="1076"/>
+          <ac:spMkLst>
+            <pc:docMk/>
+            <pc:sldMk cId="3544987491" sldId="270"/>
+            <ac:spMk id="15" creationId="{7852D628-175D-0330-C095-602EFC7AA686}"/>
+          </ac:spMkLst>
+        </pc:spChg>
+        <pc:spChg chg="add mod">
+          <ac:chgData name="Swkratis Giannoutsos" userId="635c5988b0ac75cb" providerId="LiveId" clId="{2A7595ED-FB9C-4431-944F-C1113FEFC942}" dt="2026-09-17T09:40:17.274" v="2468" actId="1076"/>
+          <ac:spMkLst>
+            <pc:docMk/>
+            <pc:sldMk cId="3544987491" sldId="270"/>
+            <ac:spMk id="17" creationId="{F9F9A7B0-7F5F-F2C3-50C2-C3D849B13450}"/>
+          </ac:spMkLst>
+        </pc:spChg>
+        <pc:picChg chg="add mod">
+          <ac:chgData name="Swkratis Giannoutsos" userId="635c5988b0ac75cb" providerId="LiveId" clId="{2A7595ED-FB9C-4431-944F-C1113FEFC942}" dt="2026-09-17T09:40:20.363" v="2469" actId="1076"/>
+          <ac:picMkLst>
+            <pc:docMk/>
+            <pc:sldMk cId="3544987491" sldId="270"/>
+            <ac:picMk id="13" creationId="{5438932D-F789-59E9-86B8-6534D772882F}"/>
+          </ac:picMkLst>
+        </pc:picChg>
+        <pc:picChg chg="add mod">
+          <ac:chgData name="Swkratis Giannoutsos" userId="635c5988b0ac75cb" providerId="LiveId" clId="{2A7595ED-FB9C-4431-944F-C1113FEFC942}" dt="2026-09-17T09:40:00.650" v="2442" actId="14100"/>
+          <ac:picMkLst>
+            <pc:docMk/>
+            <pc:sldMk cId="3544987491" sldId="270"/>
+            <ac:picMk id="19" creationId="{0808FDEA-DBF6-A2F7-F46A-F42D0DD6C492}"/>
+          </ac:picMkLst>
+        </pc:picChg>
       </pc:sldChg>
     </pc:docChg>
   </pc:docChgLst>
@@ -514,347 +861,6 @@
 </file>
 
 <file path=ppt/charts/chart1.xml><?xml version="1.0" encoding="utf-8"?>
-<c:chartSpace xmlns:c="http://schemas.openxmlformats.org/drawingml/2006/chart" xmlns:a="http://schemas.openxmlformats.org/drawingml/2006/main" xmlns:r="http://schemas.openxmlformats.org/officeDocument/2006/relationships" xmlns:c16r2="http://schemas.microsoft.com/office/drawing/2015/06/chart">
-  <c:date1904 val="0"/>
-  <c:lang val="en-US"/>
-  <c:roundedCorners val="1"/>
-  <c:style val="2"/>
-  <c:chart>
-    <c:autoTitleDeleted val="1"/>
-    <c:plotArea>
-      <c:layout/>
-      <c:lineChart>
-        <c:grouping val="standard"/>
-        <c:varyColors val="0"/>
-        <c:ser>
-          <c:idx val="0"/>
-          <c:order val="0"/>
-          <c:tx>
-            <c:strRef>
-              <c:f>Sheet1!$B$1</c:f>
-              <c:strCache>
-                <c:ptCount val="1"/>
-                <c:pt idx="0">
-                  <c:v>Absolute PEG</c:v>
-                </c:pt>
-              </c:strCache>
-            </c:strRef>
-          </c:tx>
-          <c:spPr>
-            <a:ln w="31750" cap="flat">
-              <a:solidFill>
-                <a:srgbClr val="E4572E"/>
-              </a:solidFill>
-              <a:prstDash val="solid"/>
-              <a:round/>
-            </a:ln>
-            <a:effectLst/>
-          </c:spPr>
-          <c:marker>
-            <c:symbol val="circle"/>
-            <c:size val="6"/>
-            <c:spPr>
-              <a:solidFill>
-                <a:srgbClr val="E4572E"/>
-              </a:solidFill>
-              <a:ln w="9525" cap="flat">
-                <a:solidFill>
-                  <a:srgbClr val="E4572E"/>
-                </a:solidFill>
-                <a:prstDash val="solid"/>
-                <a:round/>
-              </a:ln>
-              <a:effectLst/>
-            </c:spPr>
-          </c:marker>
-          <c:cat>
-            <c:strRef>
-              <c:f>Sheet1!$A$2:$A$5</c:f>
-              <c:strCache>
-                <c:ptCount val="4"/>
-                <c:pt idx="0">
-                  <c:v>h=0.05</c:v>
-                </c:pt>
-                <c:pt idx="1">
-                  <c:v>h=0.10</c:v>
-                </c:pt>
-                <c:pt idx="2">
-                  <c:v>h=0.15</c:v>
-                </c:pt>
-                <c:pt idx="3">
-                  <c:v>h=0.20</c:v>
-                </c:pt>
-              </c:strCache>
-            </c:strRef>
-          </c:cat>
-          <c:val>
-            <c:numRef>
-              <c:f>Sheet1!$B$2:$B$5</c:f>
-              <c:numCache>
-                <c:formatCode>General</c:formatCode>
-                <c:ptCount val="4"/>
-                <c:pt idx="0">
-                  <c:v>0.80800000000000005</c:v>
-                </c:pt>
-                <c:pt idx="1">
-                  <c:v>0.749</c:v>
-                </c:pt>
-                <c:pt idx="2">
-                  <c:v>0.65300000000000002</c:v>
-                </c:pt>
-                <c:pt idx="3">
-                  <c:v>0.57199999999999995</c:v>
-                </c:pt>
-              </c:numCache>
-            </c:numRef>
-          </c:val>
-          <c:smooth val="0"/>
-          <c:extLst>
-            <c:ext xmlns:c16="http://schemas.microsoft.com/office/drawing/2014/chart" uri="{C3380CC4-5D6E-409C-BE32-E72D297353CC}">
-              <c16:uniqueId val="{00000000-2E40-4AF7-8AB2-BCCD20684224}"/>
-            </c:ext>
-          </c:extLst>
-        </c:ser>
-        <c:ser>
-          <c:idx val="1"/>
-          <c:order val="1"/>
-          <c:tx>
-            <c:strRef>
-              <c:f>Sheet1!$C$1</c:f>
-              <c:strCache>
-                <c:ptCount val="1"/>
-                <c:pt idx="0">
-                  <c:v>Normalized PEG (used)</c:v>
-                </c:pt>
-              </c:strCache>
-            </c:strRef>
-          </c:tx>
-          <c:spPr>
-            <a:ln w="31750" cap="flat">
-              <a:solidFill>
-                <a:srgbClr val="2F6FED"/>
-              </a:solidFill>
-              <a:prstDash val="solid"/>
-              <a:round/>
-            </a:ln>
-            <a:effectLst/>
-          </c:spPr>
-          <c:marker>
-            <c:symbol val="circle"/>
-            <c:size val="6"/>
-            <c:spPr>
-              <a:solidFill>
-                <a:srgbClr val="2F6FED"/>
-              </a:solidFill>
-              <a:ln w="9525" cap="flat">
-                <a:solidFill>
-                  <a:srgbClr val="2F6FED"/>
-                </a:solidFill>
-                <a:prstDash val="solid"/>
-                <a:round/>
-              </a:ln>
-              <a:effectLst/>
-            </c:spPr>
-          </c:marker>
-          <c:cat>
-            <c:strRef>
-              <c:f>Sheet1!$A$2:$A$5</c:f>
-              <c:strCache>
-                <c:ptCount val="4"/>
-                <c:pt idx="0">
-                  <c:v>h=0.05</c:v>
-                </c:pt>
-                <c:pt idx="1">
-                  <c:v>h=0.10</c:v>
-                </c:pt>
-                <c:pt idx="2">
-                  <c:v>h=0.15</c:v>
-                </c:pt>
-                <c:pt idx="3">
-                  <c:v>h=0.20</c:v>
-                </c:pt>
-              </c:strCache>
-            </c:strRef>
-          </c:cat>
-          <c:val>
-            <c:numRef>
-              <c:f>Sheet1!$C$2:$C$5</c:f>
-              <c:numCache>
-                <c:formatCode>General</c:formatCode>
-                <c:ptCount val="4"/>
-                <c:pt idx="0">
-                  <c:v>0.81899999999999995</c:v>
-                </c:pt>
-                <c:pt idx="1">
-                  <c:v>0.83399999999999996</c:v>
-                </c:pt>
-                <c:pt idx="2">
-                  <c:v>0.83199999999999996</c:v>
-                </c:pt>
-                <c:pt idx="3">
-                  <c:v>0.82299999999999995</c:v>
-                </c:pt>
-              </c:numCache>
-            </c:numRef>
-          </c:val>
-          <c:smooth val="0"/>
-          <c:extLst>
-            <c:ext xmlns:c16="http://schemas.microsoft.com/office/drawing/2014/chart" uri="{C3380CC4-5D6E-409C-BE32-E72D297353CC}">
-              <c16:uniqueId val="{00000001-2E40-4AF7-8AB2-BCCD20684224}"/>
-            </c:ext>
-          </c:extLst>
-        </c:ser>
-        <c:dLbls>
-          <c:showLegendKey val="0"/>
-          <c:showVal val="0"/>
-          <c:showCatName val="0"/>
-          <c:showSerName val="0"/>
-          <c:showPercent val="0"/>
-          <c:showBubbleSize val="0"/>
-        </c:dLbls>
-        <c:marker val="1"/>
-        <c:smooth val="0"/>
-        <c:axId val="2094734554"/>
-        <c:axId val="2094734552"/>
-      </c:lineChart>
-      <c:catAx>
-        <c:axId val="2094734554"/>
-        <c:scaling>
-          <c:orientation val="minMax"/>
-        </c:scaling>
-        <c:delete val="0"/>
-        <c:axPos val="b"/>
-        <c:numFmt formatCode="General" sourceLinked="1"/>
-        <c:majorTickMark val="out"/>
-        <c:minorTickMark val="none"/>
-        <c:tickLblPos val="low"/>
-        <c:spPr>
-          <a:ln w="12700" cap="flat">
-            <a:solidFill>
-              <a:srgbClr val="888888"/>
-            </a:solidFill>
-            <a:prstDash val="solid"/>
-            <a:round/>
-          </a:ln>
-        </c:spPr>
-        <c:txPr>
-          <a:bodyPr/>
-          <a:lstStyle/>
-          <a:p>
-            <a:pPr>
-              <a:defRPr sz="1100" b="0" i="0" u="none" strike="noStrike">
-                <a:solidFill>
-                  <a:srgbClr val="6B7280"/>
-                </a:solidFill>
-                <a:latin typeface="Arial"/>
-              </a:defRPr>
-            </a:pPr>
-            <a:endParaRPr lang="en-US"/>
-          </a:p>
-        </c:txPr>
-        <c:crossAx val="2094734552"/>
-        <c:crosses val="autoZero"/>
-        <c:auto val="1"/>
-        <c:lblAlgn val="ctr"/>
-        <c:lblOffset val="100"/>
-        <c:noMultiLvlLbl val="1"/>
-      </c:catAx>
-      <c:valAx>
-        <c:axId val="2094734552"/>
-        <c:scaling>
-          <c:orientation val="minMax"/>
-          <c:max val="0.9"/>
-          <c:min val="0.4"/>
-        </c:scaling>
-        <c:delete val="0"/>
-        <c:axPos val="l"/>
-        <c:majorGridlines>
-          <c:spPr>
-            <a:ln w="12700" cap="flat">
-              <a:solidFill>
-                <a:srgbClr val="DDE1EE"/>
-              </a:solidFill>
-              <a:prstDash val="solid"/>
-              <a:round/>
-            </a:ln>
-          </c:spPr>
-        </c:majorGridlines>
-        <c:numFmt formatCode="General" sourceLinked="0"/>
-        <c:majorTickMark val="out"/>
-        <c:minorTickMark val="none"/>
-        <c:tickLblPos val="nextTo"/>
-        <c:spPr>
-          <a:ln w="12700" cap="flat">
-            <a:solidFill>
-              <a:srgbClr val="888888"/>
-            </a:solidFill>
-            <a:prstDash val="solid"/>
-            <a:round/>
-          </a:ln>
-        </c:spPr>
-        <c:txPr>
-          <a:bodyPr/>
-          <a:lstStyle/>
-          <a:p>
-            <a:pPr>
-              <a:defRPr sz="1100" b="0" i="0" u="none" strike="noStrike">
-                <a:solidFill>
-                  <a:srgbClr val="6B7280"/>
-                </a:solidFill>
-                <a:latin typeface="Arial"/>
-              </a:defRPr>
-            </a:pPr>
-            <a:endParaRPr lang="en-US"/>
-          </a:p>
-        </c:txPr>
-        <c:crossAx val="2094734554"/>
-        <c:crosses val="autoZero"/>
-        <c:crossBetween val="between"/>
-      </c:valAx>
-      <c:spPr>
-        <a:noFill/>
-        <a:ln>
-          <a:noFill/>
-        </a:ln>
-        <a:effectLst/>
-      </c:spPr>
-    </c:plotArea>
-    <c:legend>
-      <c:legendPos val="b"/>
-      <c:overlay val="0"/>
-      <c:txPr>
-        <a:bodyPr/>
-        <a:lstStyle/>
-        <a:p>
-          <a:pPr>
-            <a:defRPr sz="1100">
-              <a:solidFill>
-                <a:srgbClr val="6B7280"/>
-              </a:solidFill>
-            </a:defRPr>
-          </a:pPr>
-          <a:endParaRPr lang="en-US"/>
-        </a:p>
-      </c:txPr>
-    </c:legend>
-    <c:plotVisOnly val="1"/>
-    <c:dispBlanksAs val="span"/>
-    <c:showDLblsOverMax val="1"/>
-  </c:chart>
-  <c:spPr>
-    <a:noFill/>
-    <a:ln>
-      <a:noFill/>
-    </a:ln>
-    <a:effectLst/>
-  </c:spPr>
-  <c:externalData r:id="rId1">
-    <c:autoUpdate val="0"/>
-  </c:externalData>
-</c:chartSpace>
-</file>
-
-<file path=ppt/charts/chart2.xml><?xml version="1.0" encoding="utf-8"?>
 <c:chartSpace xmlns:c="http://schemas.openxmlformats.org/drawingml/2006/chart" xmlns:a="http://schemas.openxmlformats.org/drawingml/2006/main" xmlns:r="http://schemas.openxmlformats.org/officeDocument/2006/relationships" xmlns:c16r2="http://schemas.microsoft.com/office/drawing/2015/06/chart">
   <c:date1904 val="0"/>
   <c:lang val="en-US"/>
@@ -1473,6 +1479,42 @@
           <a:bodyPr/>
           <a:lstStyle/>
           <a:p>
+            <a:r>
+              <a:rPr lang="en-US" sz="1200" kern="1200" dirty="0">
+                <a:solidFill>
+                  <a:schemeClr val="tx1"/>
+                </a:solidFill>
+                <a:latin typeface="+mn-lt"/>
+                <a:ea typeface="+mn-ea"/>
+                <a:cs typeface="+mn-cs"/>
+              </a:rPr>
+              <a:t>Now we move to real-world analysis. We picked DICES because it's one of the few datasets with that many annotations per text, and that density matters a lot for us, since our study expands in many dimensions.</a:t>
+            </a:r>
+          </a:p>
+          <a:p>
+            <a:endParaRPr lang="el-GR" sz="1200" kern="1200" dirty="0">
+              <a:solidFill>
+                <a:schemeClr val="tx1"/>
+              </a:solidFill>
+              <a:latin typeface="+mn-lt"/>
+              <a:ea typeface="+mn-ea"/>
+              <a:cs typeface="+mn-cs"/>
+            </a:endParaRPr>
+          </a:p>
+          <a:p>
+            <a:r>
+              <a:rPr lang="en-US" sz="1200" kern="1200" dirty="0">
+                <a:solidFill>
+                  <a:schemeClr val="tx1"/>
+                </a:solidFill>
+                <a:latin typeface="+mn-lt"/>
+                <a:ea typeface="+mn-ea"/>
+                <a:cs typeface="+mn-cs"/>
+              </a:rPr>
+              <a:t>We used four traits here, gender, race, age, education, and tested against the Q3 bias overall rating.</a:t>
+            </a:r>
+          </a:p>
+          <a:p>
             <a:endParaRPr lang="en-US" dirty="0"/>
           </a:p>
         </p:txBody>
@@ -1557,7 +1599,820 @@
           <a:bodyPr/>
           <a:lstStyle/>
           <a:p>
-            <a:endParaRPr lang="en-US" dirty="0"/>
+            <a:pPr rtl="0"/>
+            <a:r>
+              <a:rPr lang="el-GR" dirty="0" err="1"/>
+              <a:t>Now</a:t>
+            </a:r>
+            <a:r>
+              <a:rPr lang="el-GR" dirty="0"/>
+              <a:t> </a:t>
+            </a:r>
+            <a:r>
+              <a:rPr lang="el-GR" dirty="0" err="1"/>
+              <a:t>we</a:t>
+            </a:r>
+            <a:r>
+              <a:rPr lang="el-GR" dirty="0"/>
+              <a:t> </a:t>
+            </a:r>
+            <a:r>
+              <a:rPr lang="el-GR" dirty="0" err="1"/>
+              <a:t>move</a:t>
+            </a:r>
+            <a:r>
+              <a:rPr lang="el-GR" dirty="0"/>
+              <a:t> </a:t>
+            </a:r>
+            <a:r>
+              <a:rPr lang="el-GR" dirty="0" err="1"/>
+              <a:t>to</a:t>
+            </a:r>
+            <a:r>
+              <a:rPr lang="el-GR" dirty="0"/>
+              <a:t> </a:t>
+            </a:r>
+            <a:r>
+              <a:rPr lang="el-GR" dirty="0" err="1"/>
+              <a:t>quantitative</a:t>
+            </a:r>
+            <a:r>
+              <a:rPr lang="el-GR" dirty="0"/>
+              <a:t> </a:t>
+            </a:r>
+            <a:r>
+              <a:rPr lang="el-GR" dirty="0" err="1"/>
+              <a:t>analysis</a:t>
+            </a:r>
+            <a:r>
+              <a:rPr lang="el-GR" dirty="0"/>
+              <a:t>. </a:t>
+            </a:r>
+            <a:r>
+              <a:rPr lang="el-GR" dirty="0" err="1"/>
+              <a:t>About</a:t>
+            </a:r>
+            <a:r>
+              <a:rPr lang="el-GR" dirty="0"/>
+              <a:t> 10% of </a:t>
+            </a:r>
+            <a:r>
+              <a:rPr lang="el-GR" dirty="0" err="1"/>
+              <a:t>items</a:t>
+            </a:r>
+            <a:r>
+              <a:rPr lang="el-GR" dirty="0"/>
+              <a:t> </a:t>
+            </a:r>
+            <a:r>
+              <a:rPr lang="el-GR" dirty="0" err="1"/>
+              <a:t>are</a:t>
+            </a:r>
+            <a:r>
+              <a:rPr lang="el-GR" dirty="0"/>
+              <a:t> </a:t>
+            </a:r>
+            <a:r>
+              <a:rPr lang="el-GR" dirty="0" err="1"/>
+              <a:t>polarized</a:t>
+            </a:r>
+            <a:r>
+              <a:rPr lang="el-GR" dirty="0"/>
+              <a:t> </a:t>
+            </a:r>
+            <a:r>
+              <a:rPr lang="el-GR" dirty="0" err="1"/>
+              <a:t>enough</a:t>
+            </a:r>
+            <a:r>
+              <a:rPr lang="el-GR" dirty="0"/>
+              <a:t> </a:t>
+            </a:r>
+            <a:r>
+              <a:rPr lang="el-GR" dirty="0" err="1"/>
+              <a:t>to</a:t>
+            </a:r>
+            <a:r>
+              <a:rPr lang="el-GR" dirty="0"/>
+              <a:t> </a:t>
+            </a:r>
+            <a:r>
+              <a:rPr lang="el-GR" dirty="0" err="1"/>
+              <a:t>build</a:t>
+            </a:r>
+            <a:r>
+              <a:rPr lang="el-GR" dirty="0"/>
+              <a:t> a </a:t>
+            </a:r>
+            <a:r>
+              <a:rPr lang="el-GR" dirty="0" err="1"/>
+              <a:t>tree</a:t>
+            </a:r>
+            <a:r>
+              <a:rPr lang="el-GR" dirty="0"/>
+              <a:t> on, </a:t>
+            </a:r>
+            <a:r>
+              <a:rPr lang="el-GR" dirty="0" err="1"/>
+              <a:t>that's</a:t>
+            </a:r>
+            <a:r>
+              <a:rPr lang="el-GR" dirty="0"/>
+              <a:t> </a:t>
+            </a:r>
+            <a:r>
+              <a:rPr lang="el-GR" dirty="0" err="1"/>
+              <a:t>expected</a:t>
+            </a:r>
+            <a:r>
+              <a:rPr lang="el-GR" dirty="0"/>
+              <a:t>, </a:t>
+            </a:r>
+            <a:r>
+              <a:rPr lang="el-GR" dirty="0" err="1"/>
+              <a:t>most</a:t>
+            </a:r>
+            <a:r>
+              <a:rPr lang="el-GR" dirty="0"/>
+              <a:t> </a:t>
+            </a:r>
+            <a:r>
+              <a:rPr lang="el-GR" dirty="0" err="1"/>
+              <a:t>items</a:t>
+            </a:r>
+            <a:r>
+              <a:rPr lang="el-GR" dirty="0"/>
+              <a:t> </a:t>
+            </a:r>
+            <a:r>
+              <a:rPr lang="el-GR" dirty="0" err="1"/>
+              <a:t>aren't</a:t>
+            </a:r>
+            <a:r>
+              <a:rPr lang="el-GR" dirty="0"/>
+              <a:t> </a:t>
+            </a:r>
+            <a:r>
+              <a:rPr lang="el-GR" dirty="0" err="1"/>
+              <a:t>controversial</a:t>
+            </a:r>
+            <a:r>
+              <a:rPr lang="el-GR" dirty="0"/>
+              <a:t>.</a:t>
+            </a:r>
+          </a:p>
+          <a:p>
+            <a:pPr rtl="0"/>
+            <a:r>
+              <a:rPr lang="el-GR" dirty="0" err="1"/>
+              <a:t>Where</a:t>
+            </a:r>
+            <a:r>
+              <a:rPr lang="el-GR" dirty="0"/>
+              <a:t> the </a:t>
+            </a:r>
+            <a:r>
+              <a:rPr lang="el-GR" dirty="0" err="1"/>
+              <a:t>trees</a:t>
+            </a:r>
+            <a:r>
+              <a:rPr lang="el-GR" dirty="0"/>
+              <a:t> </a:t>
+            </a:r>
+            <a:r>
+              <a:rPr lang="el-GR" dirty="0" err="1"/>
+              <a:t>do</a:t>
+            </a:r>
+            <a:r>
+              <a:rPr lang="el-GR" dirty="0"/>
+              <a:t> </a:t>
+            </a:r>
+            <a:r>
+              <a:rPr lang="el-GR" dirty="0" err="1"/>
+              <a:t>form</a:t>
+            </a:r>
+            <a:r>
+              <a:rPr lang="el-GR" dirty="0"/>
+              <a:t>, </a:t>
+            </a:r>
+            <a:r>
+              <a:rPr lang="el-GR" dirty="0" err="1"/>
+              <a:t>race</a:t>
+            </a:r>
+            <a:r>
+              <a:rPr lang="el-GR" dirty="0"/>
+              <a:t> </a:t>
+            </a:r>
+            <a:r>
+              <a:rPr lang="el-GR" dirty="0" err="1"/>
+              <a:t>is</a:t>
+            </a:r>
+            <a:r>
+              <a:rPr lang="el-GR" dirty="0"/>
+              <a:t> </a:t>
+            </a:r>
+            <a:r>
+              <a:rPr lang="el-GR" dirty="0" err="1"/>
+              <a:t>almost</a:t>
+            </a:r>
+            <a:r>
+              <a:rPr lang="el-GR" dirty="0"/>
+              <a:t> </a:t>
+            </a:r>
+            <a:r>
+              <a:rPr lang="el-GR" dirty="0" err="1"/>
+              <a:t>always</a:t>
+            </a:r>
+            <a:r>
+              <a:rPr lang="el-GR" dirty="0"/>
+              <a:t> the </a:t>
+            </a:r>
+            <a:r>
+              <a:rPr lang="el-GR" dirty="0" err="1"/>
+              <a:t>first</a:t>
+            </a:r>
+            <a:r>
+              <a:rPr lang="el-GR" dirty="0"/>
+              <a:t> </a:t>
+            </a:r>
+            <a:r>
+              <a:rPr lang="el-GR" dirty="0" err="1"/>
+              <a:t>split</a:t>
+            </a:r>
+            <a:r>
+              <a:rPr lang="el-GR" dirty="0"/>
+              <a:t>. </a:t>
+            </a:r>
+            <a:r>
+              <a:rPr lang="el-GR" dirty="0" err="1"/>
+              <a:t>Why</a:t>
+            </a:r>
+            <a:r>
+              <a:rPr lang="el-GR" dirty="0"/>
+              <a:t> </a:t>
+            </a:r>
+            <a:r>
+              <a:rPr lang="el-GR" dirty="0" err="1"/>
+              <a:t>does</a:t>
+            </a:r>
+            <a:r>
+              <a:rPr lang="el-GR" dirty="0"/>
+              <a:t> </a:t>
+            </a:r>
+            <a:r>
+              <a:rPr lang="el-GR" dirty="0" err="1"/>
+              <a:t>that</a:t>
+            </a:r>
+            <a:r>
+              <a:rPr lang="el-GR" dirty="0"/>
+              <a:t> </a:t>
+            </a:r>
+            <a:r>
+              <a:rPr lang="el-GR" dirty="0" err="1"/>
+              <a:t>matter</a:t>
+            </a:r>
+            <a:r>
+              <a:rPr lang="el-GR" dirty="0"/>
+              <a:t>? </a:t>
+            </a:r>
+            <a:r>
+              <a:rPr lang="el-GR" dirty="0" err="1"/>
+              <a:t>It's</a:t>
+            </a:r>
+            <a:r>
+              <a:rPr lang="el-GR" dirty="0"/>
+              <a:t> </a:t>
+            </a:r>
+            <a:r>
+              <a:rPr lang="el-GR" dirty="0" err="1"/>
+              <a:t>probably</a:t>
+            </a:r>
+            <a:r>
+              <a:rPr lang="el-GR" dirty="0"/>
+              <a:t> the </a:t>
+            </a:r>
+            <a:r>
+              <a:rPr lang="el-GR" dirty="0" err="1"/>
+              <a:t>single</a:t>
+            </a:r>
+            <a:r>
+              <a:rPr lang="el-GR" dirty="0"/>
+              <a:t> </a:t>
+            </a:r>
+            <a:r>
+              <a:rPr lang="el-GR" dirty="0" err="1"/>
+              <a:t>best</a:t>
+            </a:r>
+            <a:r>
+              <a:rPr lang="el-GR" dirty="0"/>
+              <a:t> </a:t>
+            </a:r>
+            <a:r>
+              <a:rPr lang="el-GR" dirty="0" err="1"/>
+              <a:t>explanator</a:t>
+            </a:r>
+            <a:r>
+              <a:rPr lang="el-GR" dirty="0"/>
+              <a:t> </a:t>
+            </a:r>
+            <a:r>
+              <a:rPr lang="el-GR" dirty="0" err="1"/>
+              <a:t>across</a:t>
+            </a:r>
+            <a:r>
+              <a:rPr lang="el-GR" dirty="0"/>
+              <a:t> </a:t>
+            </a:r>
+            <a:r>
+              <a:rPr lang="el-GR" dirty="0" err="1"/>
+              <a:t>all</a:t>
+            </a:r>
+            <a:r>
+              <a:rPr lang="el-GR" dirty="0"/>
+              <a:t> </a:t>
+            </a:r>
+            <a:r>
+              <a:rPr lang="el-GR" dirty="0" err="1"/>
+              <a:t>texts</a:t>
+            </a:r>
+            <a:r>
+              <a:rPr lang="el-GR" dirty="0"/>
+              <a:t>, on </a:t>
+            </a:r>
+            <a:r>
+              <a:rPr lang="el-GR" dirty="0" err="1"/>
+              <a:t>average</a:t>
+            </a:r>
+            <a:r>
+              <a:rPr lang="el-GR" dirty="0"/>
+              <a:t>, </a:t>
+            </a:r>
+            <a:r>
+              <a:rPr lang="el-GR" dirty="0" err="1"/>
+              <a:t>no</a:t>
+            </a:r>
+            <a:r>
+              <a:rPr lang="el-GR" dirty="0"/>
+              <a:t> </a:t>
+            </a:r>
+            <a:r>
+              <a:rPr lang="el-GR" dirty="0" err="1"/>
+              <a:t>other</a:t>
+            </a:r>
+            <a:r>
+              <a:rPr lang="el-GR" dirty="0"/>
+              <a:t> </a:t>
+            </a:r>
+            <a:r>
+              <a:rPr lang="el-GR" dirty="0" err="1"/>
+              <a:t>trait</a:t>
+            </a:r>
+            <a:r>
+              <a:rPr lang="el-GR" dirty="0"/>
+              <a:t> </a:t>
+            </a:r>
+            <a:r>
+              <a:rPr lang="el-GR" dirty="0" err="1"/>
+              <a:t>separates</a:t>
+            </a:r>
+            <a:r>
+              <a:rPr lang="el-GR" dirty="0"/>
+              <a:t> </a:t>
+            </a:r>
+            <a:r>
+              <a:rPr lang="el-GR" dirty="0" err="1"/>
+              <a:t>opinion</a:t>
+            </a:r>
+            <a:r>
+              <a:rPr lang="el-GR" dirty="0"/>
+              <a:t> </a:t>
+            </a:r>
+            <a:r>
+              <a:rPr lang="el-GR" dirty="0" err="1"/>
+              <a:t>as</a:t>
+            </a:r>
+            <a:r>
+              <a:rPr lang="el-GR" dirty="0"/>
+              <a:t> </a:t>
+            </a:r>
+            <a:r>
+              <a:rPr lang="el-GR" dirty="0" err="1"/>
+              <a:t>reliably</a:t>
+            </a:r>
+            <a:r>
+              <a:rPr lang="el-GR" dirty="0"/>
+              <a:t>. </a:t>
+            </a:r>
+            <a:r>
+              <a:rPr lang="el-GR" dirty="0" err="1"/>
+              <a:t>But</a:t>
+            </a:r>
+            <a:r>
+              <a:rPr lang="el-GR" dirty="0"/>
+              <a:t> '</a:t>
+            </a:r>
+            <a:r>
+              <a:rPr lang="el-GR" dirty="0" err="1"/>
+              <a:t>best</a:t>
+            </a:r>
+            <a:r>
+              <a:rPr lang="el-GR" dirty="0"/>
+              <a:t> on </a:t>
+            </a:r>
+            <a:r>
+              <a:rPr lang="el-GR" dirty="0" err="1"/>
+              <a:t>average</a:t>
+            </a:r>
+            <a:r>
+              <a:rPr lang="el-GR" dirty="0"/>
+              <a:t>' </a:t>
+            </a:r>
+            <a:r>
+              <a:rPr lang="el-GR" dirty="0" err="1"/>
+              <a:t>doesn't</a:t>
+            </a:r>
+            <a:r>
+              <a:rPr lang="el-GR" dirty="0"/>
+              <a:t> </a:t>
+            </a:r>
+            <a:r>
+              <a:rPr lang="el-GR" dirty="0" err="1"/>
+              <a:t>mean</a:t>
+            </a:r>
+            <a:r>
+              <a:rPr lang="el-GR" dirty="0"/>
+              <a:t> '</a:t>
+            </a:r>
+            <a:r>
+              <a:rPr lang="el-GR" dirty="0" err="1"/>
+              <a:t>sufficient</a:t>
+            </a:r>
+            <a:r>
+              <a:rPr lang="el-GR" dirty="0"/>
+              <a:t>', </a:t>
+            </a:r>
+            <a:r>
+              <a:rPr lang="el-GR" dirty="0" err="1"/>
+              <a:t>alone</a:t>
+            </a:r>
+            <a:r>
+              <a:rPr lang="el-GR" dirty="0"/>
+              <a:t>, </a:t>
+            </a:r>
+            <a:r>
+              <a:rPr lang="el-GR" dirty="0" err="1"/>
+              <a:t>it</a:t>
+            </a:r>
+            <a:r>
+              <a:rPr lang="el-GR" dirty="0"/>
+              <a:t> </a:t>
+            </a:r>
+            <a:r>
+              <a:rPr lang="el-GR" dirty="0" err="1"/>
+              <a:t>can't</a:t>
+            </a:r>
+            <a:r>
+              <a:rPr lang="el-GR" dirty="0"/>
+              <a:t> </a:t>
+            </a:r>
+            <a:r>
+              <a:rPr lang="el-GR" dirty="0" err="1"/>
+              <a:t>explain</a:t>
+            </a:r>
+            <a:r>
+              <a:rPr lang="el-GR" dirty="0"/>
+              <a:t> </a:t>
+            </a:r>
+            <a:r>
+              <a:rPr lang="el-GR" dirty="0" err="1"/>
+              <a:t>much</a:t>
+            </a:r>
+            <a:r>
+              <a:rPr lang="el-GR" dirty="0"/>
+              <a:t>. </a:t>
+            </a:r>
+          </a:p>
+          <a:p>
+            <a:pPr rtl="0"/>
+            <a:r>
+              <a:rPr lang="el-GR" dirty="0" err="1"/>
+              <a:t>Past</a:t>
+            </a:r>
+            <a:r>
+              <a:rPr lang="el-GR" dirty="0"/>
+              <a:t> </a:t>
+            </a:r>
+            <a:r>
+              <a:rPr lang="el-GR" dirty="0" err="1"/>
+              <a:t>that</a:t>
+            </a:r>
+            <a:r>
+              <a:rPr lang="el-GR" dirty="0"/>
+              <a:t> </a:t>
+            </a:r>
+            <a:r>
+              <a:rPr lang="el-GR" dirty="0" err="1"/>
+              <a:t>first</a:t>
+            </a:r>
+            <a:r>
+              <a:rPr lang="el-GR" dirty="0"/>
+              <a:t> </a:t>
+            </a:r>
+            <a:r>
+              <a:rPr lang="el-GR" dirty="0" err="1"/>
+              <a:t>split</a:t>
+            </a:r>
+            <a:r>
+              <a:rPr lang="el-GR" dirty="0"/>
+              <a:t>, </a:t>
+            </a:r>
+            <a:r>
+              <a:rPr lang="el-GR" dirty="0" err="1"/>
+              <a:t>race</a:t>
+            </a:r>
+            <a:r>
+              <a:rPr lang="el-GR" dirty="0"/>
+              <a:t> </a:t>
+            </a:r>
+            <a:r>
+              <a:rPr lang="el-GR" dirty="0" err="1"/>
+              <a:t>barely</a:t>
+            </a:r>
+            <a:r>
+              <a:rPr lang="el-GR" dirty="0"/>
+              <a:t> </a:t>
+            </a:r>
+            <a:r>
+              <a:rPr lang="el-GR" dirty="0" err="1"/>
+              <a:t>shows</a:t>
+            </a:r>
+            <a:r>
+              <a:rPr lang="el-GR" dirty="0"/>
+              <a:t> </a:t>
+            </a:r>
+            <a:r>
+              <a:rPr lang="el-GR" dirty="0" err="1"/>
+              <a:t>up</a:t>
+            </a:r>
+            <a:r>
+              <a:rPr lang="el-GR" dirty="0"/>
+              <a:t> </a:t>
+            </a:r>
+            <a:r>
+              <a:rPr lang="el-GR" dirty="0" err="1"/>
+              <a:t>again</a:t>
+            </a:r>
+            <a:r>
+              <a:rPr lang="el-GR" dirty="0"/>
+              <a:t>, </a:t>
+            </a:r>
+            <a:r>
+              <a:rPr lang="el-GR" dirty="0" err="1"/>
+              <a:t>gender</a:t>
+            </a:r>
+            <a:r>
+              <a:rPr lang="el-GR" dirty="0"/>
+              <a:t> and </a:t>
+            </a:r>
+            <a:r>
+              <a:rPr lang="el-GR" dirty="0" err="1"/>
+              <a:t>age</a:t>
+            </a:r>
+            <a:r>
+              <a:rPr lang="el-GR" dirty="0"/>
+              <a:t> </a:t>
+            </a:r>
+            <a:r>
+              <a:rPr lang="el-GR" dirty="0" err="1"/>
+              <a:t>take</a:t>
+            </a:r>
+            <a:r>
+              <a:rPr lang="el-GR" dirty="0"/>
+              <a:t> </a:t>
+            </a:r>
+            <a:r>
+              <a:rPr lang="el-GR" dirty="0" err="1"/>
+              <a:t>over</a:t>
+            </a:r>
+            <a:r>
+              <a:rPr lang="el-GR" dirty="0"/>
+              <a:t> </a:t>
+            </a:r>
+            <a:r>
+              <a:rPr lang="el-GR" dirty="0" err="1"/>
+              <a:t>as</a:t>
+            </a:r>
+            <a:r>
+              <a:rPr lang="el-GR" dirty="0"/>
+              <a:t> </a:t>
+            </a:r>
+            <a:r>
+              <a:rPr lang="el-GR" dirty="0" err="1"/>
+              <a:t>you</a:t>
+            </a:r>
+            <a:r>
+              <a:rPr lang="el-GR" dirty="0"/>
+              <a:t> </a:t>
+            </a:r>
+            <a:r>
+              <a:rPr lang="el-GR" dirty="0" err="1"/>
+              <a:t>go</a:t>
+            </a:r>
+            <a:r>
+              <a:rPr lang="el-GR" dirty="0"/>
+              <a:t> </a:t>
+            </a:r>
+            <a:r>
+              <a:rPr lang="el-GR" dirty="0" err="1"/>
+              <a:t>deeper</a:t>
+            </a:r>
+            <a:r>
+              <a:rPr lang="el-GR" dirty="0"/>
+              <a:t>.</a:t>
+            </a:r>
+          </a:p>
+          <a:p>
+            <a:pPr rtl="0"/>
+            <a:r>
+              <a:rPr lang="el-GR" dirty="0"/>
+              <a:t>The </a:t>
+            </a:r>
+            <a:r>
+              <a:rPr lang="el-GR" dirty="0" err="1"/>
+              <a:t>trees</a:t>
+            </a:r>
+            <a:r>
+              <a:rPr lang="el-GR" dirty="0"/>
+              <a:t>' </a:t>
+            </a:r>
+            <a:r>
+              <a:rPr lang="el-GR" dirty="0" err="1"/>
+              <a:t>mean</a:t>
+            </a:r>
+            <a:r>
+              <a:rPr lang="el-GR" dirty="0"/>
+              <a:t> </a:t>
+            </a:r>
+            <a:r>
+              <a:rPr lang="el-GR" dirty="0" err="1"/>
+              <a:t>depth</a:t>
+            </a:r>
+            <a:r>
+              <a:rPr lang="el-GR" dirty="0"/>
+              <a:t> </a:t>
+            </a:r>
+            <a:r>
+              <a:rPr lang="el-GR" dirty="0" err="1"/>
+              <a:t>is</a:t>
+            </a:r>
+            <a:r>
+              <a:rPr lang="el-GR" dirty="0"/>
+              <a:t> 2 </a:t>
+            </a:r>
+            <a:r>
+              <a:rPr lang="el-GR" dirty="0" err="1"/>
+              <a:t>to</a:t>
+            </a:r>
+            <a:r>
+              <a:rPr lang="el-GR" dirty="0"/>
+              <a:t> 2.4, </a:t>
+            </a:r>
+            <a:r>
+              <a:rPr lang="el-GR" dirty="0" err="1"/>
+              <a:t>which</a:t>
+            </a:r>
+            <a:r>
+              <a:rPr lang="el-GR" dirty="0"/>
+              <a:t> </a:t>
+            </a:r>
+            <a:r>
+              <a:rPr lang="el-GR" dirty="0" err="1"/>
+              <a:t>motivates</a:t>
+            </a:r>
+            <a:r>
+              <a:rPr lang="el-GR" dirty="0"/>
+              <a:t> </a:t>
+            </a:r>
+            <a:r>
+              <a:rPr lang="el-GR" dirty="0" err="1"/>
+              <a:t>our</a:t>
+            </a:r>
+            <a:r>
+              <a:rPr lang="el-GR" dirty="0"/>
+              <a:t> </a:t>
+            </a:r>
+            <a:r>
+              <a:rPr lang="el-GR" dirty="0" err="1"/>
+              <a:t>case</a:t>
+            </a:r>
+            <a:r>
+              <a:rPr lang="el-GR" dirty="0"/>
+              <a:t> </a:t>
+            </a:r>
+            <a:r>
+              <a:rPr lang="el-GR" dirty="0" err="1"/>
+              <a:t>even</a:t>
+            </a:r>
+            <a:r>
+              <a:rPr lang="el-GR" dirty="0"/>
+              <a:t> </a:t>
+            </a:r>
+            <a:r>
+              <a:rPr lang="el-GR" dirty="0" err="1"/>
+              <a:t>more</a:t>
+            </a:r>
+            <a:r>
+              <a:rPr lang="el-GR" dirty="0"/>
+              <a:t>, </a:t>
+            </a:r>
+            <a:r>
+              <a:rPr lang="el-GR" dirty="0" err="1"/>
+              <a:t>we</a:t>
+            </a:r>
+            <a:r>
+              <a:rPr lang="el-GR" dirty="0"/>
+              <a:t> </a:t>
+            </a:r>
+            <a:r>
+              <a:rPr lang="el-GR" dirty="0" err="1"/>
+              <a:t>need</a:t>
+            </a:r>
+            <a:r>
+              <a:rPr lang="el-GR" dirty="0"/>
+              <a:t> </a:t>
+            </a:r>
+            <a:r>
+              <a:rPr lang="el-GR" dirty="0" err="1"/>
+              <a:t>to</a:t>
+            </a:r>
+            <a:r>
+              <a:rPr lang="el-GR" dirty="0"/>
+              <a:t> </a:t>
+            </a:r>
+            <a:r>
+              <a:rPr lang="el-GR" dirty="0" err="1"/>
+              <a:t>look</a:t>
+            </a:r>
+            <a:r>
+              <a:rPr lang="el-GR" dirty="0"/>
+              <a:t> </a:t>
+            </a:r>
+            <a:r>
+              <a:rPr lang="el-GR" dirty="0" err="1"/>
+              <a:t>at</a:t>
+            </a:r>
+            <a:r>
+              <a:rPr lang="el-GR" dirty="0"/>
+              <a:t> </a:t>
+            </a:r>
+            <a:r>
+              <a:rPr lang="el-GR" dirty="0" err="1"/>
+              <a:t>more</a:t>
+            </a:r>
+            <a:r>
+              <a:rPr lang="el-GR" dirty="0"/>
+              <a:t> </a:t>
+            </a:r>
+            <a:r>
+              <a:rPr lang="el-GR" dirty="0" err="1"/>
+              <a:t>than</a:t>
+            </a:r>
+            <a:r>
+              <a:rPr lang="el-GR" dirty="0"/>
+              <a:t> </a:t>
+            </a:r>
+            <a:r>
+              <a:rPr lang="el-GR" dirty="0" err="1"/>
+              <a:t>one</a:t>
+            </a:r>
+            <a:r>
+              <a:rPr lang="el-GR" dirty="0"/>
+              <a:t> </a:t>
+            </a:r>
+            <a:r>
+              <a:rPr lang="el-GR" dirty="0" err="1"/>
+              <a:t>dimension</a:t>
+            </a:r>
+            <a:r>
+              <a:rPr lang="el-GR" dirty="0"/>
+              <a:t> </a:t>
+            </a:r>
+            <a:r>
+              <a:rPr lang="el-GR" dirty="0" err="1"/>
+              <a:t>at</a:t>
+            </a:r>
+            <a:r>
+              <a:rPr lang="el-GR" dirty="0"/>
+              <a:t> a </a:t>
+            </a:r>
+            <a:r>
+              <a:rPr lang="el-GR" dirty="0" err="1"/>
+              <a:t>time</a:t>
+            </a:r>
+            <a:r>
+              <a:rPr lang="el-GR" dirty="0"/>
+              <a:t>.</a:t>
+            </a:r>
           </a:p>
         </p:txBody>
       </p:sp>
@@ -1641,6 +2496,61 @@
           <a:bodyPr/>
           <a:lstStyle/>
           <a:p>
+            <a:r>
+              <a:rPr lang="en-US" sz="1200" kern="1200" dirty="0">
+                <a:solidFill>
+                  <a:schemeClr val="tx1"/>
+                </a:solidFill>
+                <a:latin typeface="+mn-lt"/>
+                <a:ea typeface="+mn-ea"/>
+                <a:cs typeface="+mn-cs"/>
+              </a:rPr>
+              <a:t>Now we move to qualitative analysis which shows exactly why this detail is necessary. We're not just saying 'these annotators disagree', we can see exactly at which depths they diverge, and how sharply.</a:t>
+            </a:r>
+            <a:endParaRPr lang="el-GR" sz="1200" kern="1200" dirty="0">
+              <a:solidFill>
+                <a:schemeClr val="tx1"/>
+              </a:solidFill>
+              <a:latin typeface="+mn-lt"/>
+              <a:ea typeface="+mn-ea"/>
+              <a:cs typeface="+mn-cs"/>
+            </a:endParaRPr>
+          </a:p>
+          <a:p>
+            <a:r>
+              <a:rPr lang="en-US" sz="1200" kern="1200" dirty="0">
+                <a:solidFill>
+                  <a:schemeClr val="tx1"/>
+                </a:solidFill>
+                <a:latin typeface="+mn-lt"/>
+                <a:ea typeface="+mn-ea"/>
+                <a:cs typeface="+mn-cs"/>
+              </a:rPr>
+              <a:t>First Item: we have fixed race and age, gender alone flips the verdict, from biased to not biased. Second Item: race alone tells you nothing, both leaves are Asian, it's age and education doing the work. Last item: no shared trait at all, two completely different identities land on opposite readings of the same response.</a:t>
+            </a:r>
+            <a:endParaRPr lang="el-GR" sz="1200" kern="1200" dirty="0">
+              <a:solidFill>
+                <a:schemeClr val="tx1"/>
+              </a:solidFill>
+              <a:latin typeface="+mn-lt"/>
+              <a:ea typeface="+mn-ea"/>
+              <a:cs typeface="+mn-cs"/>
+            </a:endParaRPr>
+          </a:p>
+          <a:p>
+            <a:r>
+              <a:rPr lang="en-US" sz="1200" kern="1200" dirty="0">
+                <a:solidFill>
+                  <a:schemeClr val="tx1"/>
+                </a:solidFill>
+                <a:latin typeface="+mn-lt"/>
+                <a:ea typeface="+mn-ea"/>
+                <a:cs typeface="+mn-cs"/>
+              </a:rPr>
+              <a:t>Three items have three different depths and three different combinations of dimensions. That's the point, you can't predict this in advance, you have to let the tree uncover the structure.</a:t>
+            </a:r>
+          </a:p>
+          <a:p>
             <a:endParaRPr lang="en-US" dirty="0"/>
           </a:p>
         </p:txBody>
@@ -1725,6 +2635,366 @@
           <a:bodyPr/>
           <a:lstStyle/>
           <a:p>
+            <a:r>
+              <a:rPr lang="el-GR" dirty="0" err="1"/>
+              <a:t>To</a:t>
+            </a:r>
+            <a:r>
+              <a:rPr lang="el-GR" dirty="0"/>
+              <a:t> </a:t>
+            </a:r>
+            <a:r>
+              <a:rPr lang="el-GR" dirty="0" err="1"/>
+              <a:t>summarize</a:t>
+            </a:r>
+            <a:r>
+              <a:rPr lang="el-GR" dirty="0"/>
+              <a:t>: </a:t>
+            </a:r>
+            <a:r>
+              <a:rPr lang="el-GR" dirty="0" err="1"/>
+              <a:t>disagreement</a:t>
+            </a:r>
+            <a:r>
+              <a:rPr lang="el-GR" dirty="0"/>
+              <a:t> in </a:t>
+            </a:r>
+            <a:r>
+              <a:rPr lang="el-GR" dirty="0" err="1"/>
+              <a:t>annotation</a:t>
+            </a:r>
+            <a:r>
+              <a:rPr lang="el-GR" dirty="0"/>
+              <a:t> </a:t>
+            </a:r>
+            <a:r>
+              <a:rPr lang="el-GR" dirty="0" err="1"/>
+              <a:t>is</a:t>
+            </a:r>
+            <a:r>
+              <a:rPr lang="el-GR" dirty="0"/>
+              <a:t> </a:t>
+            </a:r>
+            <a:r>
+              <a:rPr lang="el-GR" dirty="0" err="1"/>
+              <a:t>often</a:t>
+            </a:r>
+            <a:r>
+              <a:rPr lang="el-GR" dirty="0"/>
+              <a:t> </a:t>
+            </a:r>
+            <a:r>
+              <a:rPr lang="el-GR" dirty="0" err="1"/>
+              <a:t>real</a:t>
+            </a:r>
+            <a:r>
+              <a:rPr lang="el-GR" dirty="0"/>
+              <a:t>, </a:t>
+            </a:r>
+            <a:r>
+              <a:rPr lang="el-GR" dirty="0" err="1"/>
+              <a:t>structured</a:t>
+            </a:r>
+            <a:r>
+              <a:rPr lang="el-GR" dirty="0"/>
+              <a:t> </a:t>
+            </a:r>
+            <a:r>
+              <a:rPr lang="el-GR" dirty="0" err="1"/>
+              <a:t>polarization</a:t>
+            </a:r>
+            <a:r>
+              <a:rPr lang="el-GR" dirty="0"/>
+              <a:t>, </a:t>
+            </a:r>
+            <a:r>
+              <a:rPr lang="el-GR" dirty="0" err="1"/>
+              <a:t>not</a:t>
+            </a:r>
+            <a:r>
+              <a:rPr lang="el-GR" dirty="0"/>
+              <a:t> </a:t>
+            </a:r>
+            <a:r>
+              <a:rPr lang="el-GR" dirty="0" err="1"/>
+              <a:t>noise</a:t>
+            </a:r>
+            <a:r>
+              <a:rPr lang="el-GR" dirty="0"/>
+              <a:t>, and </a:t>
+            </a:r>
+            <a:r>
+              <a:rPr lang="el-GR" dirty="0" err="1"/>
+              <a:t>neither</a:t>
+            </a:r>
+            <a:r>
+              <a:rPr lang="el-GR" dirty="0"/>
+              <a:t> </a:t>
+            </a:r>
+            <a:r>
+              <a:rPr lang="el-GR" dirty="0" err="1"/>
+              <a:t>one</a:t>
+            </a:r>
+            <a:r>
+              <a:rPr lang="el-GR" dirty="0"/>
+              <a:t> </a:t>
+            </a:r>
+            <a:r>
+              <a:rPr lang="el-GR" dirty="0" err="1"/>
+              <a:t>label</a:t>
+            </a:r>
+            <a:r>
+              <a:rPr lang="el-GR" dirty="0"/>
+              <a:t> </a:t>
+            </a:r>
+            <a:r>
+              <a:rPr lang="el-GR" dirty="0" err="1"/>
+              <a:t>nor</a:t>
+            </a:r>
+            <a:r>
+              <a:rPr lang="el-GR" dirty="0"/>
+              <a:t> </a:t>
+            </a:r>
+            <a:r>
+              <a:rPr lang="el-GR" dirty="0" err="1"/>
+              <a:t>one</a:t>
+            </a:r>
+            <a:r>
+              <a:rPr lang="el-GR" dirty="0"/>
+              <a:t> </a:t>
+            </a:r>
+            <a:r>
+              <a:rPr lang="el-GR" dirty="0" err="1"/>
+              <a:t>trait</a:t>
+            </a:r>
+            <a:r>
+              <a:rPr lang="el-GR" dirty="0"/>
+              <a:t> </a:t>
+            </a:r>
+            <a:r>
+              <a:rPr lang="el-GR" dirty="0" err="1"/>
+              <a:t>tested</a:t>
+            </a:r>
+            <a:r>
+              <a:rPr lang="el-GR" dirty="0"/>
+              <a:t> </a:t>
+            </a:r>
+            <a:r>
+              <a:rPr lang="el-GR" dirty="0" err="1"/>
+              <a:t>alone</a:t>
+            </a:r>
+            <a:r>
+              <a:rPr lang="el-GR" dirty="0"/>
+              <a:t> </a:t>
+            </a:r>
+            <a:r>
+              <a:rPr lang="el-GR" dirty="0" err="1"/>
+              <a:t>can</a:t>
+            </a:r>
+            <a:r>
+              <a:rPr lang="el-GR" dirty="0"/>
+              <a:t> </a:t>
+            </a:r>
+            <a:r>
+              <a:rPr lang="el-GR" dirty="0" err="1"/>
+              <a:t>explain</a:t>
+            </a:r>
+            <a:r>
+              <a:rPr lang="el-GR" dirty="0"/>
+              <a:t> </a:t>
+            </a:r>
+            <a:r>
+              <a:rPr lang="el-GR" dirty="0" err="1"/>
+              <a:t>it</a:t>
+            </a:r>
+            <a:r>
+              <a:rPr lang="el-GR" dirty="0"/>
+              <a:t>. </a:t>
+            </a:r>
+            <a:r>
+              <a:rPr lang="el-GR" dirty="0" err="1"/>
+              <a:t>Polarized</a:t>
+            </a:r>
+            <a:r>
+              <a:rPr lang="el-GR" dirty="0"/>
+              <a:t> </a:t>
+            </a:r>
+            <a:r>
+              <a:rPr lang="el-GR" dirty="0" err="1"/>
+              <a:t>Trees</a:t>
+            </a:r>
+            <a:r>
+              <a:rPr lang="el-GR" dirty="0"/>
+              <a:t> </a:t>
+            </a:r>
+            <a:r>
+              <a:rPr lang="el-GR" dirty="0" err="1"/>
+              <a:t>finds</a:t>
+            </a:r>
+            <a:r>
+              <a:rPr lang="el-GR" dirty="0"/>
+              <a:t> </a:t>
+            </a:r>
+            <a:r>
+              <a:rPr lang="el-GR" dirty="0" err="1"/>
+              <a:t>which</a:t>
+            </a:r>
+            <a:r>
+              <a:rPr lang="el-GR" dirty="0"/>
+              <a:t> </a:t>
+            </a:r>
+            <a:r>
+              <a:rPr lang="el-GR" dirty="0" err="1"/>
+              <a:t>traits</a:t>
+            </a:r>
+            <a:r>
+              <a:rPr lang="el-GR" dirty="0"/>
+              <a:t>, and </a:t>
+            </a:r>
+            <a:r>
+              <a:rPr lang="el-GR" dirty="0" err="1"/>
+              <a:t>which</a:t>
+            </a:r>
+            <a:r>
+              <a:rPr lang="el-GR" dirty="0"/>
+              <a:t> </a:t>
+            </a:r>
+            <a:r>
+              <a:rPr lang="el-GR" dirty="0" err="1"/>
+              <a:t>combinations</a:t>
+            </a:r>
+            <a:r>
+              <a:rPr lang="el-GR" dirty="0"/>
+              <a:t>, </a:t>
+            </a:r>
+            <a:r>
+              <a:rPr lang="el-GR" dirty="0" err="1"/>
+              <a:t>actually</a:t>
+            </a:r>
+            <a:r>
+              <a:rPr lang="el-GR" dirty="0"/>
+              <a:t> </a:t>
+            </a:r>
+            <a:r>
+              <a:rPr lang="el-GR" dirty="0" err="1"/>
+              <a:t>do</a:t>
+            </a:r>
+            <a:r>
+              <a:rPr lang="el-GR" dirty="0"/>
+              <a:t>, </a:t>
+            </a:r>
+            <a:r>
+              <a:rPr lang="el-GR" dirty="0" err="1"/>
+              <a:t>automatically</a:t>
+            </a:r>
+            <a:r>
+              <a:rPr lang="el-GR" dirty="0"/>
+              <a:t> and </a:t>
+            </a:r>
+            <a:r>
+              <a:rPr lang="el-GR" dirty="0" err="1"/>
+              <a:t>without</a:t>
+            </a:r>
+            <a:r>
+              <a:rPr lang="el-GR" dirty="0"/>
+              <a:t> </a:t>
+            </a:r>
+            <a:r>
+              <a:rPr lang="el-GR" dirty="0" err="1"/>
+              <a:t>guessing</a:t>
+            </a:r>
+            <a:r>
+              <a:rPr lang="el-GR" dirty="0"/>
+              <a:t> </a:t>
+            </a:r>
+            <a:r>
+              <a:rPr lang="el-GR" dirty="0" err="1"/>
+              <a:t>upfront</a:t>
+            </a:r>
+            <a:r>
+              <a:rPr lang="el-GR" dirty="0"/>
+              <a:t>, </a:t>
+            </a:r>
+            <a:r>
+              <a:rPr lang="el-GR" dirty="0" err="1"/>
+              <a:t>showing</a:t>
+            </a:r>
+            <a:r>
+              <a:rPr lang="el-GR" dirty="0"/>
+              <a:t> </a:t>
+            </a:r>
+            <a:r>
+              <a:rPr lang="el-GR" dirty="0" err="1"/>
+              <a:t>us</a:t>
+            </a:r>
+            <a:r>
+              <a:rPr lang="el-GR" dirty="0"/>
+              <a:t> </a:t>
+            </a:r>
+            <a:r>
+              <a:rPr lang="el-GR" dirty="0" err="1"/>
+              <a:t>exactly</a:t>
+            </a:r>
+            <a:r>
+              <a:rPr lang="el-GR" dirty="0"/>
+              <a:t> </a:t>
+            </a:r>
+            <a:r>
+              <a:rPr lang="el-GR" dirty="0" err="1"/>
+              <a:t>where</a:t>
+            </a:r>
+            <a:r>
+              <a:rPr lang="el-GR" dirty="0"/>
+              <a:t> and </a:t>
+            </a:r>
+            <a:r>
+              <a:rPr lang="el-GR" dirty="0" err="1"/>
+              <a:t>how</a:t>
+            </a:r>
+            <a:r>
+              <a:rPr lang="el-GR" dirty="0"/>
+              <a:t> </a:t>
+            </a:r>
+            <a:r>
+              <a:rPr lang="el-GR" dirty="0" err="1"/>
+              <a:t>deep</a:t>
+            </a:r>
+            <a:r>
+              <a:rPr lang="el-GR" dirty="0"/>
+              <a:t> </a:t>
+            </a:r>
+            <a:r>
+              <a:rPr lang="el-GR" dirty="0" err="1"/>
+              <a:t>that</a:t>
+            </a:r>
+            <a:r>
+              <a:rPr lang="el-GR" dirty="0"/>
+              <a:t> </a:t>
+            </a:r>
+            <a:r>
+              <a:rPr lang="el-GR" dirty="0" err="1"/>
+              <a:t>disagreement</a:t>
+            </a:r>
+            <a:r>
+              <a:rPr lang="el-GR" dirty="0"/>
+              <a:t> </a:t>
+            </a:r>
+            <a:r>
+              <a:rPr lang="el-GR" dirty="0" err="1"/>
+              <a:t>really</a:t>
+            </a:r>
+            <a:r>
+              <a:rPr lang="el-GR" dirty="0"/>
+              <a:t> </a:t>
+            </a:r>
+            <a:r>
+              <a:rPr lang="el-GR" dirty="0" err="1"/>
+              <a:t>runs</a:t>
+            </a:r>
+            <a:r>
+              <a:rPr lang="el-GR" dirty="0"/>
+              <a:t>.</a:t>
+            </a:r>
             <a:endParaRPr lang="en-US" dirty="0"/>
           </a:p>
         </p:txBody>
@@ -1756,6 +3026,474 @@
     <p:extLst>
       <p:ext uri="{BB962C8B-B14F-4D97-AF65-F5344CB8AC3E}">
         <p14:creationId xmlns:p14="http://schemas.microsoft.com/office/powerpoint/2010/main" val="1024086991"/>
+      </p:ext>
+    </p:extLst>
+  </p:cSld>
+  <p:clrMapOvr>
+    <a:masterClrMapping/>
+  </p:clrMapOvr>
+</p:notes>
+</file>
+
+<file path=ppt/notesSlides/notesSlide14.xml><?xml version="1.0" encoding="utf-8"?>
+<p:notes xmlns:a="http://schemas.openxmlformats.org/drawingml/2006/main" xmlns:r="http://schemas.openxmlformats.org/officeDocument/2006/relationships" xmlns:p="http://schemas.openxmlformats.org/presentationml/2006/main">
+  <p:cSld>
+    <p:spTree>
+      <p:nvGrpSpPr>
+        <p:cNvPr id="1" name="">
+          <a:extLst>
+            <a:ext uri="{FF2B5EF4-FFF2-40B4-BE49-F238E27FC236}">
+              <a16:creationId xmlns:a16="http://schemas.microsoft.com/office/drawing/2014/main" id="{2396FE84-C109-E977-AEF7-BBC64AB806A6}"/>
+            </a:ext>
+          </a:extLst>
+        </p:cNvPr>
+        <p:cNvGrpSpPr/>
+        <p:nvPr/>
+      </p:nvGrpSpPr>
+      <p:grpSpPr>
+        <a:xfrm>
+          <a:off x="0" y="0"/>
+          <a:ext cx="0" cy="0"/>
+          <a:chOff x="0" y="0"/>
+          <a:chExt cx="0" cy="0"/>
+        </a:xfrm>
+      </p:grpSpPr>
+      <p:sp>
+        <p:nvSpPr>
+          <p:cNvPr id="2" name="Slide Image Placeholder 1">
+            <a:extLst>
+              <a:ext uri="{FF2B5EF4-FFF2-40B4-BE49-F238E27FC236}">
+                <a16:creationId xmlns:a16="http://schemas.microsoft.com/office/drawing/2014/main" id="{7487CC15-1F42-4EC8-1F09-25F3FCDD0D37}"/>
+              </a:ext>
+            </a:extLst>
+          </p:cNvPr>
+          <p:cNvSpPr>
+            <a:spLocks noGrp="1" noRot="1" noChangeAspect="1"/>
+          </p:cNvSpPr>
+          <p:nvPr>
+            <p:ph type="sldImg"/>
+          </p:nvPr>
+        </p:nvSpPr>
+        <p:spPr/>
+      </p:sp>
+      <p:sp>
+        <p:nvSpPr>
+          <p:cNvPr id="3" name="Notes Placeholder 2">
+            <a:extLst>
+              <a:ext uri="{FF2B5EF4-FFF2-40B4-BE49-F238E27FC236}">
+                <a16:creationId xmlns:a16="http://schemas.microsoft.com/office/drawing/2014/main" id="{E546AEB0-373C-D82E-2DB8-218A4621899F}"/>
+              </a:ext>
+            </a:extLst>
+          </p:cNvPr>
+          <p:cNvSpPr>
+            <a:spLocks noGrp="1"/>
+          </p:cNvSpPr>
+          <p:nvPr>
+            <p:ph type="body" idx="1"/>
+          </p:nvPr>
+        </p:nvSpPr>
+        <p:spPr/>
+        <p:txBody>
+          <a:bodyPr/>
+          <a:lstStyle/>
+          <a:p>
+            <a:r>
+              <a:rPr lang="el-GR" dirty="0" err="1"/>
+              <a:t>To</a:t>
+            </a:r>
+            <a:r>
+              <a:rPr lang="el-GR" dirty="0"/>
+              <a:t> </a:t>
+            </a:r>
+            <a:r>
+              <a:rPr lang="el-GR" dirty="0" err="1"/>
+              <a:t>summarize</a:t>
+            </a:r>
+            <a:r>
+              <a:rPr lang="el-GR" dirty="0"/>
+              <a:t>: </a:t>
+            </a:r>
+            <a:r>
+              <a:rPr lang="el-GR" dirty="0" err="1"/>
+              <a:t>disagreement</a:t>
+            </a:r>
+            <a:r>
+              <a:rPr lang="el-GR" dirty="0"/>
+              <a:t> in </a:t>
+            </a:r>
+            <a:r>
+              <a:rPr lang="el-GR" dirty="0" err="1"/>
+              <a:t>annotation</a:t>
+            </a:r>
+            <a:r>
+              <a:rPr lang="el-GR" dirty="0"/>
+              <a:t> </a:t>
+            </a:r>
+            <a:r>
+              <a:rPr lang="el-GR" dirty="0" err="1"/>
+              <a:t>is</a:t>
+            </a:r>
+            <a:r>
+              <a:rPr lang="el-GR" dirty="0"/>
+              <a:t> </a:t>
+            </a:r>
+            <a:r>
+              <a:rPr lang="el-GR" dirty="0" err="1"/>
+              <a:t>often</a:t>
+            </a:r>
+            <a:r>
+              <a:rPr lang="el-GR" dirty="0"/>
+              <a:t> </a:t>
+            </a:r>
+            <a:r>
+              <a:rPr lang="el-GR" dirty="0" err="1"/>
+              <a:t>real</a:t>
+            </a:r>
+            <a:r>
+              <a:rPr lang="el-GR" dirty="0"/>
+              <a:t>, </a:t>
+            </a:r>
+            <a:r>
+              <a:rPr lang="el-GR" dirty="0" err="1"/>
+              <a:t>structured</a:t>
+            </a:r>
+            <a:r>
+              <a:rPr lang="el-GR" dirty="0"/>
+              <a:t> </a:t>
+            </a:r>
+            <a:r>
+              <a:rPr lang="el-GR" dirty="0" err="1"/>
+              <a:t>polarization</a:t>
+            </a:r>
+            <a:r>
+              <a:rPr lang="el-GR" dirty="0"/>
+              <a:t>, </a:t>
+            </a:r>
+            <a:r>
+              <a:rPr lang="el-GR" dirty="0" err="1"/>
+              <a:t>not</a:t>
+            </a:r>
+            <a:r>
+              <a:rPr lang="el-GR" dirty="0"/>
+              <a:t> </a:t>
+            </a:r>
+            <a:r>
+              <a:rPr lang="el-GR" dirty="0" err="1"/>
+              <a:t>noise</a:t>
+            </a:r>
+            <a:r>
+              <a:rPr lang="el-GR" dirty="0"/>
+              <a:t>, and </a:t>
+            </a:r>
+            <a:r>
+              <a:rPr lang="el-GR" dirty="0" err="1"/>
+              <a:t>neither</a:t>
+            </a:r>
+            <a:r>
+              <a:rPr lang="el-GR" dirty="0"/>
+              <a:t> </a:t>
+            </a:r>
+            <a:r>
+              <a:rPr lang="el-GR" dirty="0" err="1"/>
+              <a:t>one</a:t>
+            </a:r>
+            <a:r>
+              <a:rPr lang="el-GR" dirty="0"/>
+              <a:t> </a:t>
+            </a:r>
+            <a:r>
+              <a:rPr lang="el-GR" dirty="0" err="1"/>
+              <a:t>label</a:t>
+            </a:r>
+            <a:r>
+              <a:rPr lang="el-GR" dirty="0"/>
+              <a:t> </a:t>
+            </a:r>
+            <a:r>
+              <a:rPr lang="el-GR" dirty="0" err="1"/>
+              <a:t>nor</a:t>
+            </a:r>
+            <a:r>
+              <a:rPr lang="el-GR" dirty="0"/>
+              <a:t> </a:t>
+            </a:r>
+            <a:r>
+              <a:rPr lang="el-GR" dirty="0" err="1"/>
+              <a:t>one</a:t>
+            </a:r>
+            <a:r>
+              <a:rPr lang="el-GR" dirty="0"/>
+              <a:t> </a:t>
+            </a:r>
+            <a:r>
+              <a:rPr lang="el-GR" dirty="0" err="1"/>
+              <a:t>trait</a:t>
+            </a:r>
+            <a:r>
+              <a:rPr lang="el-GR" dirty="0"/>
+              <a:t> </a:t>
+            </a:r>
+            <a:r>
+              <a:rPr lang="el-GR" dirty="0" err="1"/>
+              <a:t>tested</a:t>
+            </a:r>
+            <a:r>
+              <a:rPr lang="el-GR" dirty="0"/>
+              <a:t> </a:t>
+            </a:r>
+            <a:r>
+              <a:rPr lang="el-GR" dirty="0" err="1"/>
+              <a:t>alone</a:t>
+            </a:r>
+            <a:r>
+              <a:rPr lang="el-GR" dirty="0"/>
+              <a:t> </a:t>
+            </a:r>
+            <a:r>
+              <a:rPr lang="el-GR" dirty="0" err="1"/>
+              <a:t>can</a:t>
+            </a:r>
+            <a:r>
+              <a:rPr lang="el-GR" dirty="0"/>
+              <a:t> </a:t>
+            </a:r>
+            <a:r>
+              <a:rPr lang="el-GR" dirty="0" err="1"/>
+              <a:t>explain</a:t>
+            </a:r>
+            <a:r>
+              <a:rPr lang="el-GR" dirty="0"/>
+              <a:t> </a:t>
+            </a:r>
+            <a:r>
+              <a:rPr lang="el-GR" dirty="0" err="1"/>
+              <a:t>it</a:t>
+            </a:r>
+            <a:r>
+              <a:rPr lang="el-GR" dirty="0"/>
+              <a:t>. </a:t>
+            </a:r>
+            <a:r>
+              <a:rPr lang="el-GR" dirty="0" err="1"/>
+              <a:t>Polarized</a:t>
+            </a:r>
+            <a:r>
+              <a:rPr lang="el-GR" dirty="0"/>
+              <a:t> </a:t>
+            </a:r>
+            <a:r>
+              <a:rPr lang="el-GR" dirty="0" err="1"/>
+              <a:t>Trees</a:t>
+            </a:r>
+            <a:r>
+              <a:rPr lang="el-GR" dirty="0"/>
+              <a:t> </a:t>
+            </a:r>
+            <a:r>
+              <a:rPr lang="el-GR" dirty="0" err="1"/>
+              <a:t>finds</a:t>
+            </a:r>
+            <a:r>
+              <a:rPr lang="el-GR" dirty="0"/>
+              <a:t> </a:t>
+            </a:r>
+            <a:r>
+              <a:rPr lang="el-GR" dirty="0" err="1"/>
+              <a:t>which</a:t>
+            </a:r>
+            <a:r>
+              <a:rPr lang="el-GR" dirty="0"/>
+              <a:t> </a:t>
+            </a:r>
+            <a:r>
+              <a:rPr lang="el-GR" dirty="0" err="1"/>
+              <a:t>traits</a:t>
+            </a:r>
+            <a:r>
+              <a:rPr lang="el-GR" dirty="0"/>
+              <a:t>, and </a:t>
+            </a:r>
+            <a:r>
+              <a:rPr lang="el-GR" dirty="0" err="1"/>
+              <a:t>which</a:t>
+            </a:r>
+            <a:r>
+              <a:rPr lang="el-GR" dirty="0"/>
+              <a:t> </a:t>
+            </a:r>
+            <a:r>
+              <a:rPr lang="el-GR" dirty="0" err="1"/>
+              <a:t>combinations</a:t>
+            </a:r>
+            <a:r>
+              <a:rPr lang="el-GR" dirty="0"/>
+              <a:t>, </a:t>
+            </a:r>
+            <a:r>
+              <a:rPr lang="el-GR" dirty="0" err="1"/>
+              <a:t>actually</a:t>
+            </a:r>
+            <a:r>
+              <a:rPr lang="el-GR" dirty="0"/>
+              <a:t> </a:t>
+            </a:r>
+            <a:r>
+              <a:rPr lang="el-GR" dirty="0" err="1"/>
+              <a:t>do</a:t>
+            </a:r>
+            <a:r>
+              <a:rPr lang="el-GR" dirty="0"/>
+              <a:t>, </a:t>
+            </a:r>
+            <a:r>
+              <a:rPr lang="el-GR" dirty="0" err="1"/>
+              <a:t>automatically</a:t>
+            </a:r>
+            <a:r>
+              <a:rPr lang="el-GR" dirty="0"/>
+              <a:t> and </a:t>
+            </a:r>
+            <a:r>
+              <a:rPr lang="el-GR" dirty="0" err="1"/>
+              <a:t>without</a:t>
+            </a:r>
+            <a:r>
+              <a:rPr lang="el-GR" dirty="0"/>
+              <a:t> </a:t>
+            </a:r>
+            <a:r>
+              <a:rPr lang="el-GR" dirty="0" err="1"/>
+              <a:t>guessing</a:t>
+            </a:r>
+            <a:r>
+              <a:rPr lang="el-GR" dirty="0"/>
+              <a:t> </a:t>
+            </a:r>
+            <a:r>
+              <a:rPr lang="el-GR" dirty="0" err="1"/>
+              <a:t>upfront</a:t>
+            </a:r>
+            <a:r>
+              <a:rPr lang="el-GR" dirty="0"/>
+              <a:t>, </a:t>
+            </a:r>
+            <a:r>
+              <a:rPr lang="el-GR" dirty="0" err="1"/>
+              <a:t>showing</a:t>
+            </a:r>
+            <a:r>
+              <a:rPr lang="el-GR" dirty="0"/>
+              <a:t> </a:t>
+            </a:r>
+            <a:r>
+              <a:rPr lang="el-GR" dirty="0" err="1"/>
+              <a:t>us</a:t>
+            </a:r>
+            <a:r>
+              <a:rPr lang="el-GR" dirty="0"/>
+              <a:t> </a:t>
+            </a:r>
+            <a:r>
+              <a:rPr lang="el-GR" dirty="0" err="1"/>
+              <a:t>exactly</a:t>
+            </a:r>
+            <a:r>
+              <a:rPr lang="el-GR" dirty="0"/>
+              <a:t> </a:t>
+            </a:r>
+            <a:r>
+              <a:rPr lang="el-GR" dirty="0" err="1"/>
+              <a:t>where</a:t>
+            </a:r>
+            <a:r>
+              <a:rPr lang="el-GR" dirty="0"/>
+              <a:t> and </a:t>
+            </a:r>
+            <a:r>
+              <a:rPr lang="el-GR" dirty="0" err="1"/>
+              <a:t>how</a:t>
+            </a:r>
+            <a:r>
+              <a:rPr lang="el-GR" dirty="0"/>
+              <a:t> </a:t>
+            </a:r>
+            <a:r>
+              <a:rPr lang="el-GR" dirty="0" err="1"/>
+              <a:t>deep</a:t>
+            </a:r>
+            <a:r>
+              <a:rPr lang="el-GR" dirty="0"/>
+              <a:t> </a:t>
+            </a:r>
+            <a:r>
+              <a:rPr lang="el-GR" dirty="0" err="1"/>
+              <a:t>that</a:t>
+            </a:r>
+            <a:r>
+              <a:rPr lang="el-GR" dirty="0"/>
+              <a:t> </a:t>
+            </a:r>
+            <a:r>
+              <a:rPr lang="el-GR" dirty="0" err="1"/>
+              <a:t>disagreement</a:t>
+            </a:r>
+            <a:r>
+              <a:rPr lang="el-GR" dirty="0"/>
+              <a:t> </a:t>
+            </a:r>
+            <a:r>
+              <a:rPr lang="el-GR" dirty="0" err="1"/>
+              <a:t>really</a:t>
+            </a:r>
+            <a:r>
+              <a:rPr lang="el-GR" dirty="0"/>
+              <a:t> </a:t>
+            </a:r>
+            <a:r>
+              <a:rPr lang="el-GR" dirty="0" err="1"/>
+              <a:t>runs</a:t>
+            </a:r>
+            <a:r>
+              <a:rPr lang="el-GR" dirty="0"/>
+              <a:t>.</a:t>
+            </a:r>
+            <a:endParaRPr lang="en-US" dirty="0"/>
+          </a:p>
+        </p:txBody>
+      </p:sp>
+      <p:sp>
+        <p:nvSpPr>
+          <p:cNvPr id="4" name="Slide Number Placeholder 3">
+            <a:extLst>
+              <a:ext uri="{FF2B5EF4-FFF2-40B4-BE49-F238E27FC236}">
+                <a16:creationId xmlns:a16="http://schemas.microsoft.com/office/drawing/2014/main" id="{66619CBA-8E36-D5C0-8FC2-B8427D8ABADD}"/>
+              </a:ext>
+            </a:extLst>
+          </p:cNvPr>
+          <p:cNvSpPr>
+            <a:spLocks noGrp="1"/>
+          </p:cNvSpPr>
+          <p:nvPr>
+            <p:ph type="sldNum" sz="quarter" idx="10"/>
+          </p:nvPr>
+        </p:nvSpPr>
+        <p:spPr/>
+        <p:txBody>
+          <a:bodyPr/>
+          <a:lstStyle/>
+          <a:p>
+            <a:fld id="{F7021451-1387-4CA6-816F-3879F97B5CBC}" type="slidenum">
+              <a:rPr lang="en-US"/>
+              <a:t>14</a:t>
+            </a:fld>
+            <a:endParaRPr lang="en-US"/>
+          </a:p>
+        </p:txBody>
+      </p:sp>
+    </p:spTree>
+    <p:extLst>
+      <p:ext uri="{BB962C8B-B14F-4D97-AF65-F5344CB8AC3E}">
+        <p14:creationId xmlns:p14="http://schemas.microsoft.com/office/powerpoint/2010/main" val="3917884940"/>
       </p:ext>
     </p:extLst>
   </p:cSld>
@@ -1809,7 +3547,594 @@
           <a:bodyPr/>
           <a:lstStyle/>
           <a:p>
-            <a:endParaRPr lang="en-US" dirty="0"/>
+            <a:pPr rtl="0"/>
+            <a:r>
+              <a:rPr lang="en-US" dirty="0"/>
+              <a:t>-Polarization</a:t>
+            </a:r>
+          </a:p>
+          <a:p>
+            <a:pPr rtl="0"/>
+            <a:r>
+              <a:rPr lang="el-GR" dirty="0" err="1"/>
+              <a:t>That's</a:t>
+            </a:r>
+            <a:r>
+              <a:rPr lang="el-GR" dirty="0"/>
+              <a:t> a </a:t>
+            </a:r>
+            <a:r>
+              <a:rPr lang="el-GR" dirty="0" err="1"/>
+              <a:t>problem</a:t>
+            </a:r>
+            <a:r>
+              <a:rPr lang="el-GR" dirty="0"/>
+              <a:t> </a:t>
+            </a:r>
+            <a:r>
+              <a:rPr lang="el-GR" dirty="0" err="1"/>
+              <a:t>because</a:t>
+            </a:r>
+            <a:r>
+              <a:rPr lang="el-GR" dirty="0"/>
+              <a:t> a </a:t>
+            </a:r>
+            <a:r>
+              <a:rPr lang="el-GR" dirty="0" err="1"/>
+              <a:t>single</a:t>
+            </a:r>
+            <a:r>
+              <a:rPr lang="el-GR" dirty="0"/>
+              <a:t> </a:t>
+            </a:r>
+            <a:r>
+              <a:rPr lang="el-GR" dirty="0" err="1"/>
+              <a:t>label</a:t>
+            </a:r>
+            <a:r>
+              <a:rPr lang="el-GR" dirty="0"/>
+              <a:t> </a:t>
+            </a:r>
+            <a:r>
+              <a:rPr lang="el-GR" dirty="0" err="1"/>
+              <a:t>can't</a:t>
+            </a:r>
+            <a:r>
+              <a:rPr lang="el-GR" dirty="0"/>
+              <a:t> </a:t>
+            </a:r>
+            <a:r>
+              <a:rPr lang="el-GR" dirty="0" err="1"/>
+              <a:t>represent</a:t>
+            </a:r>
+            <a:r>
+              <a:rPr lang="el-GR" dirty="0"/>
+              <a:t> </a:t>
+            </a:r>
+            <a:r>
+              <a:rPr lang="el-GR" dirty="0" err="1"/>
+              <a:t>what</a:t>
+            </a:r>
+            <a:r>
+              <a:rPr lang="el-GR" dirty="0"/>
+              <a:t> </a:t>
+            </a:r>
+            <a:r>
+              <a:rPr lang="el-GR" dirty="0" err="1"/>
+              <a:t>actually</a:t>
+            </a:r>
+            <a:r>
+              <a:rPr lang="el-GR" dirty="0"/>
+              <a:t> </a:t>
+            </a:r>
+            <a:r>
+              <a:rPr lang="el-GR" dirty="0" err="1"/>
+              <a:t>happened</a:t>
+            </a:r>
+            <a:r>
+              <a:rPr lang="el-GR" dirty="0"/>
+              <a:t>, </a:t>
+            </a:r>
+            <a:r>
+              <a:rPr lang="el-GR" dirty="0" err="1"/>
+              <a:t>whatever</a:t>
+            </a:r>
+            <a:r>
+              <a:rPr lang="el-GR" dirty="0"/>
+              <a:t> </a:t>
+            </a:r>
+            <a:r>
+              <a:rPr lang="el-GR" dirty="0" err="1"/>
+              <a:t>we</a:t>
+            </a:r>
+            <a:r>
+              <a:rPr lang="el-GR" dirty="0"/>
+              <a:t> </a:t>
+            </a:r>
+            <a:r>
+              <a:rPr lang="el-GR" dirty="0" err="1"/>
+              <a:t>pick</a:t>
+            </a:r>
+            <a:r>
+              <a:rPr lang="el-GR" dirty="0"/>
+              <a:t>, </a:t>
+            </a:r>
+            <a:r>
+              <a:rPr lang="el-GR" dirty="0" err="1"/>
+              <a:t>we're</a:t>
+            </a:r>
+            <a:r>
+              <a:rPr lang="el-GR" dirty="0"/>
+              <a:t> </a:t>
+            </a:r>
+            <a:r>
+              <a:rPr lang="el-GR" dirty="0" err="1"/>
+              <a:t>overwriting</a:t>
+            </a:r>
+            <a:r>
+              <a:rPr lang="el-GR" dirty="0"/>
+              <a:t> </a:t>
+            </a:r>
+            <a:r>
+              <a:rPr lang="el-GR" dirty="0" err="1"/>
+              <a:t>real</a:t>
+            </a:r>
+            <a:r>
+              <a:rPr lang="el-GR" dirty="0"/>
+              <a:t>, </a:t>
+            </a:r>
+            <a:r>
+              <a:rPr lang="el-GR" dirty="0" err="1"/>
+              <a:t>opposing</a:t>
+            </a:r>
+            <a:r>
+              <a:rPr lang="el-GR" dirty="0"/>
+              <a:t> </a:t>
+            </a:r>
+            <a:r>
+              <a:rPr lang="el-GR" dirty="0" err="1"/>
+              <a:t>judgments</a:t>
+            </a:r>
+            <a:r>
+              <a:rPr lang="el-GR" dirty="0"/>
+              <a:t>.</a:t>
+            </a:r>
+            <a:r>
+              <a:rPr lang="en-US" dirty="0"/>
+              <a:t> </a:t>
+            </a:r>
+            <a:r>
+              <a:rPr lang="el-GR" dirty="0" err="1"/>
+              <a:t>So</a:t>
+            </a:r>
+            <a:r>
+              <a:rPr lang="el-GR" dirty="0"/>
+              <a:t> </a:t>
+            </a:r>
+            <a:r>
+              <a:rPr lang="el-GR" dirty="0" err="1"/>
+              <a:t>that's</a:t>
+            </a:r>
+            <a:r>
+              <a:rPr lang="el-GR" dirty="0"/>
+              <a:t> </a:t>
+            </a:r>
+            <a:r>
+              <a:rPr lang="el-GR" dirty="0" err="1"/>
+              <a:t>why</a:t>
+            </a:r>
+            <a:r>
+              <a:rPr lang="el-GR" dirty="0"/>
+              <a:t> </a:t>
+            </a:r>
+            <a:r>
+              <a:rPr lang="el-GR" dirty="0" err="1"/>
+              <a:t>majority</a:t>
+            </a:r>
+            <a:r>
+              <a:rPr lang="el-GR" dirty="0"/>
+              <a:t> </a:t>
+            </a:r>
+            <a:r>
+              <a:rPr lang="el-GR" dirty="0" err="1"/>
+              <a:t>voting</a:t>
+            </a:r>
+            <a:r>
+              <a:rPr lang="el-GR" dirty="0"/>
+              <a:t> </a:t>
+            </a:r>
+            <a:r>
+              <a:rPr lang="el-GR" dirty="0" err="1"/>
+              <a:t>isn't</a:t>
+            </a:r>
+            <a:r>
+              <a:rPr lang="el-GR" dirty="0"/>
+              <a:t> </a:t>
+            </a:r>
+            <a:r>
+              <a:rPr lang="el-GR" dirty="0" err="1"/>
+              <a:t>enough</a:t>
+            </a:r>
+            <a:r>
+              <a:rPr lang="el-GR" dirty="0"/>
+              <a:t>, </a:t>
+            </a:r>
+            <a:r>
+              <a:rPr lang="en-US" dirty="0"/>
+              <a:t>because</a:t>
+            </a:r>
+            <a:r>
+              <a:rPr lang="el-GR" dirty="0"/>
+              <a:t> </a:t>
+            </a:r>
+            <a:r>
+              <a:rPr lang="el-GR" dirty="0" err="1"/>
+              <a:t>collapsing</a:t>
+            </a:r>
+            <a:r>
+              <a:rPr lang="el-GR" dirty="0"/>
+              <a:t> </a:t>
+            </a:r>
+            <a:r>
+              <a:rPr lang="el-GR" dirty="0" err="1"/>
+              <a:t>everything</a:t>
+            </a:r>
+            <a:r>
+              <a:rPr lang="el-GR" dirty="0"/>
+              <a:t> </a:t>
+            </a:r>
+            <a:r>
+              <a:rPr lang="el-GR" dirty="0" err="1"/>
+              <a:t>into</a:t>
+            </a:r>
+            <a:r>
+              <a:rPr lang="el-GR" dirty="0"/>
+              <a:t> </a:t>
+            </a:r>
+            <a:r>
+              <a:rPr lang="el-GR" dirty="0" err="1"/>
+              <a:t>one</a:t>
+            </a:r>
+            <a:r>
+              <a:rPr lang="el-GR" dirty="0"/>
+              <a:t> </a:t>
+            </a:r>
+            <a:r>
+              <a:rPr lang="el-GR" dirty="0" err="1"/>
+              <a:t>label</a:t>
+            </a:r>
+            <a:r>
+              <a:rPr lang="el-GR" dirty="0"/>
+              <a:t> </a:t>
+            </a:r>
+            <a:r>
+              <a:rPr lang="el-GR" dirty="0" err="1"/>
+              <a:t>throws</a:t>
+            </a:r>
+            <a:r>
+              <a:rPr lang="el-GR" dirty="0"/>
+              <a:t> </a:t>
+            </a:r>
+            <a:r>
+              <a:rPr lang="el-GR" dirty="0" err="1"/>
+              <a:t>away</a:t>
+            </a:r>
+            <a:r>
+              <a:rPr lang="el-GR" dirty="0"/>
+              <a:t> </a:t>
+            </a:r>
+            <a:r>
+              <a:rPr lang="en-US" dirty="0"/>
+              <a:t>too much info</a:t>
+            </a:r>
+            <a:r>
+              <a:rPr lang="el-GR" dirty="0"/>
+              <a:t>.</a:t>
+            </a:r>
+            <a:r>
+              <a:rPr lang="en-US" dirty="0"/>
+              <a:t> </a:t>
+            </a:r>
+            <a:r>
+              <a:rPr lang="el-GR" dirty="0"/>
+              <a:t>A </a:t>
+            </a:r>
+            <a:r>
+              <a:rPr lang="el-GR" dirty="0" err="1"/>
+              <a:t>better</a:t>
+            </a:r>
+            <a:r>
+              <a:rPr lang="el-GR" dirty="0"/>
+              <a:t> </a:t>
+            </a:r>
+            <a:r>
+              <a:rPr lang="el-GR" dirty="0" err="1"/>
+              <a:t>approach</a:t>
+            </a:r>
+            <a:r>
+              <a:rPr lang="el-GR" dirty="0"/>
+              <a:t> </a:t>
+            </a:r>
+            <a:r>
+              <a:rPr lang="el-GR" dirty="0" err="1"/>
+              <a:t>is</a:t>
+            </a:r>
+            <a:r>
+              <a:rPr lang="el-GR" dirty="0"/>
+              <a:t> </a:t>
+            </a:r>
+            <a:r>
+              <a:rPr lang="el-GR" dirty="0" err="1"/>
+              <a:t>explaining</a:t>
+            </a:r>
+            <a:r>
+              <a:rPr lang="el-GR" dirty="0"/>
+              <a:t> </a:t>
+            </a:r>
+            <a:r>
+              <a:rPr lang="el-GR" dirty="0" err="1"/>
+              <a:t>polarization</a:t>
+            </a:r>
+            <a:r>
+              <a:rPr lang="el-GR" dirty="0"/>
+              <a:t> </a:t>
+            </a:r>
+            <a:r>
+              <a:rPr lang="el-GR" dirty="0" err="1"/>
+              <a:t>using</a:t>
+            </a:r>
+            <a:r>
+              <a:rPr lang="el-GR" dirty="0"/>
+              <a:t> </a:t>
+            </a:r>
+            <a:r>
+              <a:rPr lang="el-GR" dirty="0" err="1"/>
+              <a:t>annotator</a:t>
+            </a:r>
+            <a:r>
+              <a:rPr lang="el-GR" dirty="0"/>
+              <a:t> </a:t>
+            </a:r>
+            <a:r>
+              <a:rPr lang="el-GR" dirty="0" err="1"/>
+              <a:t>metadata</a:t>
+            </a:r>
+            <a:r>
+              <a:rPr lang="el-GR" dirty="0"/>
+              <a:t>. </a:t>
+            </a:r>
+            <a:r>
+              <a:rPr lang="el-GR" dirty="0" err="1"/>
+              <a:t>But</a:t>
+            </a:r>
+            <a:r>
+              <a:rPr lang="el-GR" dirty="0"/>
+              <a:t> </a:t>
+            </a:r>
+            <a:r>
+              <a:rPr lang="el-GR" dirty="0" err="1"/>
+              <a:t>most</a:t>
+            </a:r>
+            <a:r>
+              <a:rPr lang="el-GR" dirty="0"/>
+              <a:t> </a:t>
+            </a:r>
+            <a:r>
+              <a:rPr lang="el-GR" dirty="0" err="1"/>
+              <a:t>existing</a:t>
+            </a:r>
+            <a:r>
+              <a:rPr lang="el-GR" dirty="0"/>
+              <a:t> </a:t>
+            </a:r>
+            <a:r>
+              <a:rPr lang="el-GR" dirty="0" err="1"/>
+              <a:t>approaches</a:t>
+            </a:r>
+            <a:r>
+              <a:rPr lang="el-GR" dirty="0"/>
+              <a:t> </a:t>
+            </a:r>
+            <a:r>
+              <a:rPr lang="el-GR" dirty="0" err="1"/>
+              <a:t>test</a:t>
+            </a:r>
+            <a:r>
+              <a:rPr lang="el-GR" dirty="0"/>
+              <a:t> </a:t>
+            </a:r>
+            <a:r>
+              <a:rPr lang="el-GR" dirty="0" err="1"/>
+              <a:t>one</a:t>
+            </a:r>
+            <a:r>
+              <a:rPr lang="el-GR" dirty="0"/>
+              <a:t> </a:t>
+            </a:r>
+            <a:r>
+              <a:rPr lang="el-GR" dirty="0" err="1"/>
+              <a:t>dimension</a:t>
+            </a:r>
+            <a:r>
+              <a:rPr lang="el-GR" dirty="0"/>
+              <a:t> </a:t>
+            </a:r>
+            <a:r>
+              <a:rPr lang="el-GR" dirty="0" err="1"/>
+              <a:t>at</a:t>
+            </a:r>
+            <a:r>
+              <a:rPr lang="el-GR" dirty="0"/>
+              <a:t> a </a:t>
+            </a:r>
+            <a:r>
+              <a:rPr lang="el-GR" dirty="0" err="1"/>
+              <a:t>time</a:t>
+            </a:r>
+            <a:r>
+              <a:rPr lang="el-GR" dirty="0"/>
+              <a:t>. And </a:t>
+            </a:r>
+            <a:r>
+              <a:rPr lang="el-GR" dirty="0" err="1"/>
+              <a:t>that's</a:t>
+            </a:r>
+            <a:r>
+              <a:rPr lang="el-GR" dirty="0"/>
+              <a:t> </a:t>
+            </a:r>
+            <a:r>
+              <a:rPr lang="el-GR" dirty="0" err="1"/>
+              <a:t>not</a:t>
+            </a:r>
+            <a:r>
+              <a:rPr lang="el-GR" dirty="0"/>
+              <a:t> </a:t>
+            </a:r>
+            <a:r>
+              <a:rPr lang="el-GR" dirty="0" err="1"/>
+              <a:t>realistic</a:t>
+            </a:r>
+            <a:r>
+              <a:rPr lang="el-GR" dirty="0"/>
+              <a:t>, </a:t>
+            </a:r>
+            <a:r>
+              <a:rPr lang="el-GR" dirty="0" err="1"/>
+              <a:t>we're</a:t>
+            </a:r>
+            <a:r>
+              <a:rPr lang="el-GR" dirty="0"/>
+              <a:t> </a:t>
+            </a:r>
+            <a:r>
+              <a:rPr lang="el-GR" dirty="0" err="1"/>
+              <a:t>not</a:t>
+            </a:r>
+            <a:r>
+              <a:rPr lang="el-GR" dirty="0"/>
+              <a:t> </a:t>
+            </a:r>
+            <a:r>
+              <a:rPr lang="el-GR" dirty="0" err="1"/>
+              <a:t>described</a:t>
+            </a:r>
+            <a:r>
+              <a:rPr lang="el-GR" dirty="0"/>
+              <a:t> </a:t>
+            </a:r>
+            <a:r>
+              <a:rPr lang="el-GR" dirty="0" err="1"/>
+              <a:t>by</a:t>
+            </a:r>
+            <a:r>
+              <a:rPr lang="el-GR" dirty="0"/>
+              <a:t> </a:t>
+            </a:r>
+            <a:r>
+              <a:rPr lang="el-GR" dirty="0" err="1"/>
+              <a:t>just</a:t>
+            </a:r>
+            <a:r>
+              <a:rPr lang="el-GR" dirty="0"/>
+              <a:t> </a:t>
+            </a:r>
+            <a:r>
+              <a:rPr lang="el-GR" dirty="0" err="1"/>
+              <a:t>our</a:t>
+            </a:r>
+            <a:r>
+              <a:rPr lang="el-GR" dirty="0"/>
+              <a:t> </a:t>
+            </a:r>
+            <a:r>
+              <a:rPr lang="el-GR" dirty="0" err="1"/>
+              <a:t>gender</a:t>
+            </a:r>
+            <a:r>
+              <a:rPr lang="el-GR" dirty="0"/>
+              <a:t>, </a:t>
+            </a:r>
+            <a:r>
+              <a:rPr lang="el-GR" dirty="0" err="1"/>
+              <a:t>or</a:t>
+            </a:r>
+            <a:r>
+              <a:rPr lang="el-GR" dirty="0"/>
+              <a:t> </a:t>
+            </a:r>
+            <a:r>
+              <a:rPr lang="el-GR" dirty="0" err="1"/>
+              <a:t>just</a:t>
+            </a:r>
+            <a:r>
+              <a:rPr lang="el-GR" dirty="0"/>
+              <a:t> </a:t>
+            </a:r>
+            <a:r>
+              <a:rPr lang="el-GR" dirty="0" err="1"/>
+              <a:t>our</a:t>
+            </a:r>
+            <a:r>
+              <a:rPr lang="el-GR" dirty="0"/>
+              <a:t> </a:t>
+            </a:r>
+            <a:r>
+              <a:rPr lang="el-GR" dirty="0" err="1"/>
+              <a:t>age</a:t>
+            </a:r>
+            <a:r>
+              <a:rPr lang="el-GR" dirty="0"/>
+              <a:t>. </a:t>
+            </a:r>
+            <a:r>
+              <a:rPr lang="el-GR" dirty="0" err="1"/>
+              <a:t>We're</a:t>
+            </a:r>
+            <a:r>
+              <a:rPr lang="el-GR" dirty="0"/>
+              <a:t> </a:t>
+            </a:r>
+            <a:r>
+              <a:rPr lang="el-GR" dirty="0" err="1"/>
+              <a:t>all</a:t>
+            </a:r>
+            <a:r>
+              <a:rPr lang="el-GR" dirty="0"/>
+              <a:t> of </a:t>
+            </a:r>
+            <a:r>
+              <a:rPr lang="el-GR" dirty="0" err="1"/>
+              <a:t>those</a:t>
+            </a:r>
+            <a:r>
+              <a:rPr lang="el-GR" dirty="0"/>
+              <a:t> </a:t>
+            </a:r>
+            <a:r>
+              <a:rPr lang="el-GR" dirty="0" err="1"/>
+              <a:t>things</a:t>
+            </a:r>
+            <a:r>
+              <a:rPr lang="el-GR" dirty="0"/>
+              <a:t> </a:t>
+            </a:r>
+            <a:r>
+              <a:rPr lang="el-GR" dirty="0" err="1"/>
+              <a:t>at</a:t>
+            </a:r>
+            <a:r>
+              <a:rPr lang="el-GR" dirty="0"/>
+              <a:t> </a:t>
+            </a:r>
+            <a:r>
+              <a:rPr lang="el-GR" dirty="0" err="1"/>
+              <a:t>once</a:t>
+            </a:r>
+            <a:r>
+              <a:rPr lang="el-GR" dirty="0"/>
+              <a:t>.</a:t>
+            </a:r>
           </a:p>
         </p:txBody>
       </p:sp>
@@ -1893,7 +4218,542 @@
           <a:bodyPr/>
           <a:lstStyle/>
           <a:p>
-            <a:endParaRPr lang="en-US" dirty="0"/>
+            <a:pPr rtl="0"/>
+            <a:r>
+              <a:rPr lang="el-GR" dirty="0" err="1"/>
+              <a:t>Here's</a:t>
+            </a:r>
+            <a:r>
+              <a:rPr lang="el-GR" dirty="0"/>
+              <a:t> the </a:t>
+            </a:r>
+            <a:r>
+              <a:rPr lang="el-GR" dirty="0" err="1"/>
+              <a:t>intuition</a:t>
+            </a:r>
+            <a:r>
+              <a:rPr lang="el-GR" dirty="0"/>
+              <a:t>: </a:t>
+            </a:r>
+            <a:r>
+              <a:rPr lang="el-GR" dirty="0" err="1"/>
+              <a:t>instead</a:t>
+            </a:r>
+            <a:r>
+              <a:rPr lang="el-GR" dirty="0"/>
+              <a:t> of </a:t>
+            </a:r>
+            <a:r>
+              <a:rPr lang="el-GR" dirty="0" err="1"/>
+              <a:t>guessing</a:t>
+            </a:r>
+            <a:r>
+              <a:rPr lang="el-GR" dirty="0"/>
+              <a:t> </a:t>
+            </a:r>
+            <a:r>
+              <a:rPr lang="el-GR" dirty="0" err="1"/>
+              <a:t>which</a:t>
+            </a:r>
+            <a:r>
+              <a:rPr lang="el-GR" dirty="0"/>
+              <a:t> </a:t>
+            </a:r>
+            <a:r>
+              <a:rPr lang="el-GR" dirty="0" err="1"/>
+              <a:t>trait</a:t>
+            </a:r>
+            <a:r>
+              <a:rPr lang="el-GR" dirty="0"/>
+              <a:t> </a:t>
+            </a:r>
+            <a:r>
+              <a:rPr lang="el-GR" dirty="0" err="1"/>
+              <a:t>matters</a:t>
+            </a:r>
+            <a:r>
+              <a:rPr lang="el-GR" dirty="0"/>
+              <a:t> and </a:t>
+            </a:r>
+            <a:r>
+              <a:rPr lang="el-GR" dirty="0" err="1"/>
+              <a:t>testing</a:t>
+            </a:r>
+            <a:r>
+              <a:rPr lang="el-GR" dirty="0"/>
+              <a:t> </a:t>
+            </a:r>
+            <a:r>
+              <a:rPr lang="el-GR" dirty="0" err="1"/>
+              <a:t>it</a:t>
+            </a:r>
+            <a:r>
+              <a:rPr lang="el-GR" dirty="0"/>
+              <a:t> </a:t>
+            </a:r>
+            <a:r>
+              <a:rPr lang="el-GR" dirty="0" err="1"/>
+              <a:t>alone</a:t>
+            </a:r>
+            <a:r>
+              <a:rPr lang="el-GR" dirty="0"/>
+              <a:t>, </a:t>
+            </a:r>
+            <a:r>
+              <a:rPr lang="el-GR" dirty="0" err="1"/>
+              <a:t>we</a:t>
+            </a:r>
+            <a:r>
+              <a:rPr lang="el-GR" dirty="0"/>
+              <a:t> </a:t>
+            </a:r>
+            <a:r>
+              <a:rPr lang="el-GR" dirty="0" err="1"/>
+              <a:t>let</a:t>
+            </a:r>
+            <a:r>
+              <a:rPr lang="el-GR" dirty="0"/>
+              <a:t> the </a:t>
+            </a:r>
+            <a:r>
+              <a:rPr lang="el-GR" dirty="0" err="1"/>
+              <a:t>data</a:t>
+            </a:r>
+            <a:r>
+              <a:rPr lang="el-GR" dirty="0"/>
+              <a:t> </a:t>
+            </a:r>
+            <a:r>
+              <a:rPr lang="el-GR" dirty="0" err="1"/>
+              <a:t>tell</a:t>
+            </a:r>
+            <a:r>
+              <a:rPr lang="el-GR" dirty="0"/>
+              <a:t> </a:t>
+            </a:r>
+            <a:r>
+              <a:rPr lang="el-GR" dirty="0" err="1"/>
+              <a:t>us</a:t>
+            </a:r>
+            <a:r>
+              <a:rPr lang="el-GR" dirty="0"/>
+              <a:t>, </a:t>
+            </a:r>
+            <a:r>
+              <a:rPr lang="el-GR" dirty="0" err="1"/>
+              <a:t>automatically</a:t>
+            </a:r>
+            <a:r>
+              <a:rPr lang="el-GR" dirty="0"/>
+              <a:t>.</a:t>
+            </a:r>
+          </a:p>
+          <a:p>
+            <a:pPr rtl="0"/>
+            <a:r>
+              <a:rPr lang="el-GR" dirty="0" err="1"/>
+              <a:t>Concretely</a:t>
+            </a:r>
+            <a:r>
+              <a:rPr lang="el-GR" dirty="0"/>
+              <a:t>, </a:t>
+            </a:r>
+            <a:r>
+              <a:rPr lang="el-GR" dirty="0" err="1"/>
+              <a:t>that</a:t>
+            </a:r>
+            <a:r>
+              <a:rPr lang="el-GR" dirty="0"/>
+              <a:t> </a:t>
+            </a:r>
+            <a:r>
+              <a:rPr lang="el-GR" dirty="0" err="1"/>
+              <a:t>means</a:t>
+            </a:r>
+            <a:r>
+              <a:rPr lang="el-GR" dirty="0"/>
+              <a:t> </a:t>
+            </a:r>
+            <a:r>
+              <a:rPr lang="el-GR" dirty="0" err="1"/>
+              <a:t>building</a:t>
+            </a:r>
+            <a:r>
+              <a:rPr lang="el-GR" dirty="0"/>
+              <a:t> </a:t>
+            </a:r>
+            <a:r>
+              <a:rPr lang="el-GR" dirty="0" err="1"/>
+              <a:t>one</a:t>
+            </a:r>
+            <a:r>
+              <a:rPr lang="el-GR" dirty="0"/>
+              <a:t> </a:t>
+            </a:r>
+            <a:r>
+              <a:rPr lang="el-GR" dirty="0" err="1"/>
+              <a:t>tree</a:t>
+            </a:r>
+            <a:r>
+              <a:rPr lang="el-GR" dirty="0"/>
+              <a:t> per </a:t>
+            </a:r>
+            <a:r>
+              <a:rPr lang="en-US" dirty="0"/>
+              <a:t>text</a:t>
+            </a:r>
+            <a:r>
+              <a:rPr lang="el-GR" dirty="0"/>
+              <a:t>, </a:t>
+            </a:r>
+            <a:r>
+              <a:rPr lang="el-GR" dirty="0" err="1"/>
+              <a:t>where</a:t>
+            </a:r>
+            <a:r>
+              <a:rPr lang="el-GR" dirty="0"/>
+              <a:t> </a:t>
+            </a:r>
+            <a:r>
+              <a:rPr lang="el-GR" dirty="0" err="1"/>
+              <a:t>each</a:t>
+            </a:r>
+            <a:r>
+              <a:rPr lang="el-GR" dirty="0"/>
+              <a:t> </a:t>
+            </a:r>
+            <a:r>
+              <a:rPr lang="el-GR" dirty="0" err="1"/>
+              <a:t>step</a:t>
+            </a:r>
+            <a:r>
+              <a:rPr lang="el-GR" dirty="0"/>
+              <a:t> </a:t>
+            </a:r>
+            <a:r>
+              <a:rPr lang="el-GR" dirty="0" err="1"/>
+              <a:t>picks</a:t>
+            </a:r>
+            <a:r>
+              <a:rPr lang="el-GR" dirty="0"/>
+              <a:t> </a:t>
+            </a:r>
+            <a:r>
+              <a:rPr lang="el-GR" dirty="0" err="1"/>
+              <a:t>whatever</a:t>
+            </a:r>
+            <a:r>
+              <a:rPr lang="el-GR" dirty="0"/>
+              <a:t> </a:t>
+            </a:r>
+            <a:r>
+              <a:rPr lang="en-US" dirty="0"/>
+              <a:t>dimension</a:t>
+            </a:r>
+            <a:r>
+              <a:rPr lang="el-GR" dirty="0"/>
+              <a:t> </a:t>
+            </a:r>
+            <a:r>
+              <a:rPr lang="el-GR" dirty="0" err="1"/>
+              <a:t>explains</a:t>
+            </a:r>
+            <a:r>
+              <a:rPr lang="el-GR" dirty="0"/>
+              <a:t> the </a:t>
+            </a:r>
+            <a:r>
+              <a:rPr lang="el-GR" dirty="0" err="1"/>
+              <a:t>mo</a:t>
+            </a:r>
+            <a:r>
+              <a:rPr lang="en-US" dirty="0"/>
+              <a:t>st the differences in opinions</a:t>
+            </a:r>
+            <a:r>
+              <a:rPr lang="el-GR" dirty="0"/>
+              <a:t>, </a:t>
+            </a:r>
+            <a:r>
+              <a:rPr lang="el-GR" dirty="0" err="1"/>
+              <a:t>then</a:t>
+            </a:r>
+            <a:r>
+              <a:rPr lang="el-GR" dirty="0"/>
+              <a:t> </a:t>
+            </a:r>
+            <a:r>
+              <a:rPr lang="el-GR" dirty="0" err="1"/>
+              <a:t>keeps</a:t>
+            </a:r>
+            <a:r>
+              <a:rPr lang="el-GR" dirty="0"/>
+              <a:t> </a:t>
+            </a:r>
+            <a:r>
+              <a:rPr lang="el-GR" dirty="0" err="1"/>
+              <a:t>going</a:t>
+            </a:r>
+            <a:r>
+              <a:rPr lang="el-GR" dirty="0"/>
+              <a:t> </a:t>
+            </a:r>
+            <a:r>
+              <a:rPr lang="el-GR" dirty="0" err="1"/>
+              <a:t>inside</a:t>
+            </a:r>
+            <a:r>
+              <a:rPr lang="el-GR" dirty="0"/>
+              <a:t> </a:t>
+            </a:r>
+            <a:r>
+              <a:rPr lang="el-GR" dirty="0" err="1"/>
+              <a:t>that</a:t>
+            </a:r>
+            <a:r>
+              <a:rPr lang="el-GR" dirty="0"/>
+              <a:t> </a:t>
+            </a:r>
+            <a:r>
+              <a:rPr lang="el-GR" dirty="0" err="1"/>
+              <a:t>group</a:t>
+            </a:r>
+            <a:r>
+              <a:rPr lang="el-GR" dirty="0"/>
+              <a:t>. </a:t>
+            </a:r>
+            <a:r>
+              <a:rPr lang="el-GR" dirty="0" err="1"/>
+              <a:t>So</a:t>
+            </a:r>
+            <a:r>
+              <a:rPr lang="el-GR" dirty="0"/>
+              <a:t> </a:t>
+            </a:r>
+            <a:r>
+              <a:rPr lang="el-GR" dirty="0" err="1"/>
+              <a:t>instead</a:t>
+            </a:r>
+            <a:r>
+              <a:rPr lang="el-GR" dirty="0"/>
+              <a:t> of </a:t>
+            </a:r>
+            <a:r>
+              <a:rPr lang="el-GR" dirty="0" err="1"/>
+              <a:t>ending</a:t>
+            </a:r>
+            <a:r>
+              <a:rPr lang="el-GR" dirty="0"/>
+              <a:t> on '</a:t>
+            </a:r>
+            <a:r>
+              <a:rPr lang="el-GR" dirty="0" err="1"/>
+              <a:t>gender</a:t>
+            </a:r>
+            <a:r>
+              <a:rPr lang="el-GR" dirty="0"/>
+              <a:t>', </a:t>
+            </a:r>
+            <a:r>
+              <a:rPr lang="el-GR" dirty="0" err="1"/>
+              <a:t>you</a:t>
+            </a:r>
+            <a:r>
+              <a:rPr lang="el-GR" dirty="0"/>
+              <a:t> </a:t>
+            </a:r>
+            <a:r>
+              <a:rPr lang="el-GR" dirty="0" err="1"/>
+              <a:t>end</a:t>
+            </a:r>
+            <a:r>
+              <a:rPr lang="el-GR" dirty="0"/>
+              <a:t> on </a:t>
+            </a:r>
+            <a:r>
+              <a:rPr lang="el-GR" dirty="0" err="1"/>
+              <a:t>something</a:t>
+            </a:r>
+            <a:r>
+              <a:rPr lang="el-GR" dirty="0"/>
+              <a:t> </a:t>
+            </a:r>
+            <a:r>
+              <a:rPr lang="el-GR" dirty="0" err="1"/>
+              <a:t>like</a:t>
+            </a:r>
+            <a:r>
+              <a:rPr lang="el-GR" dirty="0"/>
+              <a:t> '</a:t>
+            </a:r>
+            <a:r>
+              <a:rPr lang="el-GR" dirty="0" err="1"/>
+              <a:t>Asian</a:t>
+            </a:r>
+            <a:r>
+              <a:rPr lang="el-GR" dirty="0"/>
+              <a:t>, </a:t>
+            </a:r>
+            <a:r>
+              <a:rPr lang="el-GR" dirty="0" err="1"/>
+              <a:t>Millennial</a:t>
+            </a:r>
+            <a:r>
+              <a:rPr lang="el-GR" dirty="0"/>
+              <a:t>, </a:t>
+            </a:r>
+            <a:r>
+              <a:rPr lang="el-GR" dirty="0" err="1"/>
+              <a:t>man</a:t>
+            </a:r>
+            <a:r>
+              <a:rPr lang="el-GR" dirty="0"/>
+              <a:t>', a </a:t>
+            </a:r>
+            <a:r>
+              <a:rPr lang="el-GR" dirty="0" err="1"/>
+              <a:t>full</a:t>
+            </a:r>
+            <a:r>
+              <a:rPr lang="el-GR" dirty="0"/>
+              <a:t> </a:t>
+            </a:r>
+            <a:r>
+              <a:rPr lang="el-GR" dirty="0" err="1"/>
+              <a:t>identity</a:t>
+            </a:r>
+            <a:r>
+              <a:rPr lang="el-GR" dirty="0"/>
+              <a:t>, </a:t>
+            </a:r>
+            <a:r>
+              <a:rPr lang="el-GR" dirty="0" err="1"/>
+              <a:t>built</a:t>
+            </a:r>
+            <a:r>
+              <a:rPr lang="el-GR" dirty="0"/>
+              <a:t> </a:t>
+            </a:r>
+            <a:r>
+              <a:rPr lang="el-GR" dirty="0" err="1"/>
+              <a:t>step</a:t>
+            </a:r>
+            <a:r>
+              <a:rPr lang="el-GR" dirty="0"/>
+              <a:t> </a:t>
+            </a:r>
+            <a:r>
+              <a:rPr lang="el-GR" dirty="0" err="1"/>
+              <a:t>by</a:t>
+            </a:r>
+            <a:r>
+              <a:rPr lang="el-GR" dirty="0"/>
+              <a:t> </a:t>
+            </a:r>
+            <a:r>
+              <a:rPr lang="el-GR" dirty="0" err="1"/>
+              <a:t>step</a:t>
+            </a:r>
+            <a:r>
+              <a:rPr lang="el-GR" dirty="0"/>
+              <a:t>, </a:t>
+            </a:r>
+            <a:r>
+              <a:rPr lang="el-GR" dirty="0" err="1"/>
+              <a:t>not</a:t>
+            </a:r>
+            <a:r>
+              <a:rPr lang="el-GR" dirty="0"/>
+              <a:t> </a:t>
+            </a:r>
+            <a:r>
+              <a:rPr lang="el-GR" dirty="0" err="1"/>
+              <a:t>assumed</a:t>
+            </a:r>
+            <a:r>
+              <a:rPr lang="el-GR" dirty="0"/>
+              <a:t> </a:t>
+            </a:r>
+            <a:r>
+              <a:rPr lang="el-GR" dirty="0" err="1"/>
+              <a:t>upfront</a:t>
+            </a:r>
+            <a:r>
+              <a:rPr lang="el-GR" dirty="0"/>
+              <a:t>. </a:t>
+            </a:r>
+            <a:r>
+              <a:rPr lang="el-GR" dirty="0" err="1"/>
+              <a:t>Each</a:t>
+            </a:r>
+            <a:r>
+              <a:rPr lang="el-GR" dirty="0"/>
+              <a:t> </a:t>
+            </a:r>
+            <a:r>
+              <a:rPr lang="el-GR" dirty="0" err="1"/>
+              <a:t>final</a:t>
+            </a:r>
+            <a:r>
+              <a:rPr lang="el-GR" dirty="0"/>
+              <a:t> </a:t>
+            </a:r>
+            <a:r>
+              <a:rPr lang="el-GR" dirty="0" err="1"/>
+              <a:t>group</a:t>
+            </a:r>
+            <a:r>
+              <a:rPr lang="el-GR" dirty="0"/>
+              <a:t> </a:t>
+            </a:r>
+            <a:r>
+              <a:rPr lang="el-GR" dirty="0" err="1"/>
+              <a:t>then</a:t>
+            </a:r>
+            <a:r>
+              <a:rPr lang="el-GR" dirty="0"/>
+              <a:t> </a:t>
+            </a:r>
+            <a:r>
+              <a:rPr lang="el-GR" dirty="0" err="1"/>
+              <a:t>gets</a:t>
+            </a:r>
+            <a:r>
+              <a:rPr lang="el-GR" dirty="0"/>
+              <a:t> </a:t>
+            </a:r>
+            <a:r>
+              <a:rPr lang="el-GR" dirty="0" err="1"/>
+              <a:t>labeled</a:t>
+            </a:r>
+            <a:r>
+              <a:rPr lang="el-GR" dirty="0"/>
+              <a:t> </a:t>
+            </a:r>
+            <a:r>
+              <a:rPr lang="el-GR" dirty="0" err="1"/>
+              <a:t>by</a:t>
+            </a:r>
+            <a:r>
+              <a:rPr lang="el-GR" dirty="0"/>
+              <a:t> </a:t>
+            </a:r>
+            <a:r>
+              <a:rPr lang="el-GR" dirty="0" err="1"/>
+              <a:t>majority</a:t>
+            </a:r>
+            <a:r>
+              <a:rPr lang="el-GR" dirty="0"/>
+              <a:t> </a:t>
+            </a:r>
+            <a:r>
+              <a:rPr lang="el-GR" dirty="0" err="1"/>
+              <a:t>voting</a:t>
+            </a:r>
+            <a:r>
+              <a:rPr lang="el-GR" dirty="0"/>
+              <a:t>.</a:t>
+            </a:r>
           </a:p>
         </p:txBody>
       </p:sp>
@@ -1977,6 +4837,87 @@
           <a:bodyPr/>
           <a:lstStyle/>
           <a:p>
+            <a:r>
+              <a:rPr lang="en-US" sz="1200" kern="1200" dirty="0">
+                <a:solidFill>
+                  <a:schemeClr val="tx1"/>
+                </a:solidFill>
+                <a:latin typeface="+mn-lt"/>
+                <a:ea typeface="+mn-ea"/>
+                <a:cs typeface="+mn-cs"/>
+              </a:rPr>
+              <a:t>Let's walk through an example so the mechanism is understood.</a:t>
+            </a:r>
+            <a:endParaRPr lang="el-GR" sz="1200" kern="1200" dirty="0">
+              <a:solidFill>
+                <a:schemeClr val="tx1"/>
+              </a:solidFill>
+              <a:latin typeface="+mn-lt"/>
+              <a:ea typeface="+mn-ea"/>
+              <a:cs typeface="+mn-cs"/>
+            </a:endParaRPr>
+          </a:p>
+          <a:p>
+            <a:r>
+              <a:rPr lang="en-US" sz="1200" kern="1200" dirty="0">
+                <a:solidFill>
+                  <a:schemeClr val="tx1"/>
+                </a:solidFill>
+                <a:latin typeface="+mn-lt"/>
+                <a:ea typeface="+mn-ea"/>
+                <a:cs typeface="+mn-cs"/>
+              </a:rPr>
+              <a:t>Take this sentence for example. We start with all annotators together. The dimension that best </a:t>
+            </a:r>
+            <a:r>
+              <a:rPr lang="en-US" sz="1200" kern="1200" dirty="0" err="1">
+                <a:solidFill>
+                  <a:schemeClr val="tx1"/>
+                </a:solidFill>
+                <a:latin typeface="+mn-lt"/>
+                <a:ea typeface="+mn-ea"/>
+                <a:cs typeface="+mn-cs"/>
+              </a:rPr>
+              <a:t>seperates</a:t>
+            </a:r>
+            <a:r>
+              <a:rPr lang="en-US" sz="1200" kern="1200" dirty="0">
+                <a:solidFill>
+                  <a:schemeClr val="tx1"/>
+                </a:solidFill>
+                <a:latin typeface="+mn-lt"/>
+                <a:ea typeface="+mn-ea"/>
+                <a:cs typeface="+mn-cs"/>
+              </a:rPr>
+              <a:t> the opinions is gender.</a:t>
+            </a:r>
+          </a:p>
+          <a:p>
+            <a:r>
+              <a:rPr lang="en-US" sz="1200" kern="1200" dirty="0">
+                <a:solidFill>
+                  <a:schemeClr val="tx1"/>
+                </a:solidFill>
+                <a:latin typeface="+mn-lt"/>
+                <a:ea typeface="+mn-ea"/>
+                <a:cs typeface="+mn-cs"/>
+              </a:rPr>
+              <a:t>Here we see that Women agree with each other, on the toxic pole , so that branch stops there. Men are still polarized.</a:t>
+            </a:r>
+            <a:endParaRPr lang="en-US" dirty="0"/>
+          </a:p>
+          <a:p>
+            <a:r>
+              <a:rPr lang="en-US" sz="1200" kern="1200" dirty="0">
+                <a:solidFill>
+                  <a:schemeClr val="tx1"/>
+                </a:solidFill>
+                <a:latin typeface="+mn-lt"/>
+                <a:ea typeface="+mn-ea"/>
+                <a:cs typeface="+mn-cs"/>
+              </a:rPr>
+              <a:t>We see that no single dimension explained this, it took three, combined, one after another, and we couldn't have known that in advance. That's the whole idea, we don't pick a dimension upfront, we let the tree keep going until nothing's left to explain.</a:t>
+            </a:r>
             <a:endParaRPr lang="en-US" dirty="0"/>
           </a:p>
         </p:txBody>
@@ -2061,6 +5002,64 @@
           <a:bodyPr/>
           <a:lstStyle/>
           <a:p>
+            <a:r>
+              <a:rPr lang="en-US" sz="1200" kern="1200" dirty="0">
+                <a:solidFill>
+                  <a:schemeClr val="tx1"/>
+                </a:solidFill>
+                <a:latin typeface="+mn-lt"/>
+                <a:ea typeface="+mn-ea"/>
+                <a:cs typeface="+mn-cs"/>
+              </a:rPr>
+              <a:t>Where we differ from previous methods. Previous methods, as already said before, test one dimension at a time, using predefined hypothesis</a:t>
+            </a:r>
+          </a:p>
+          <a:p>
+            <a:endParaRPr lang="el-GR" sz="1200" kern="1200" dirty="0">
+              <a:solidFill>
+                <a:schemeClr val="tx1"/>
+              </a:solidFill>
+              <a:latin typeface="+mn-lt"/>
+              <a:ea typeface="+mn-ea"/>
+              <a:cs typeface="+mn-cs"/>
+            </a:endParaRPr>
+          </a:p>
+          <a:p>
+            <a:r>
+              <a:rPr lang="en-US" sz="1200" kern="1200" dirty="0">
+                <a:solidFill>
+                  <a:schemeClr val="tx1"/>
+                </a:solidFill>
+                <a:latin typeface="+mn-lt"/>
+                <a:ea typeface="+mn-ea"/>
+                <a:cs typeface="+mn-cs"/>
+              </a:rPr>
+              <a:t>We correct that by automatically searching and quantifying every dimensions at every step, following whichever explains the most of the </a:t>
+            </a:r>
+            <a:r>
+              <a:rPr lang="en-US" sz="1200" kern="1200" dirty="0" err="1">
+                <a:solidFill>
+                  <a:schemeClr val="tx1"/>
+                </a:solidFill>
+                <a:latin typeface="+mn-lt"/>
+                <a:ea typeface="+mn-ea"/>
+                <a:cs typeface="+mn-cs"/>
+              </a:rPr>
+              <a:t>seperation</a:t>
+            </a:r>
+            <a:r>
+              <a:rPr lang="en-US" sz="1200" kern="1200" dirty="0">
+                <a:solidFill>
+                  <a:schemeClr val="tx1"/>
+                </a:solidFill>
+                <a:latin typeface="+mn-lt"/>
+                <a:ea typeface="+mn-ea"/>
+                <a:cs typeface="+mn-cs"/>
+              </a:rPr>
+              <a:t>. At the end we produce a full explainable structure</a:t>
+            </a:r>
+          </a:p>
+          <a:p>
             <a:endParaRPr lang="en-US" dirty="0"/>
           </a:p>
         </p:txBody>
@@ -2145,6 +5144,36 @@
           <a:bodyPr/>
           <a:lstStyle/>
           <a:p>
+            <a:pPr marL="0" marR="0" lvl="0" indent="0" algn="l" defTabSz="914400" rtl="0" eaLnBrk="1" fontAlgn="auto" latinLnBrk="0" hangingPunct="1">
+              <a:lnSpc>
+                <a:spcPct val="100000"/>
+              </a:lnSpc>
+              <a:spcBef>
+                <a:spcPts val="0"/>
+              </a:spcBef>
+              <a:spcAft>
+                <a:spcPts val="0"/>
+              </a:spcAft>
+              <a:buClrTx/>
+              <a:buSzTx/>
+              <a:buFontTx/>
+              <a:buNone/>
+              <a:tabLst/>
+              <a:defRPr/>
+            </a:pPr>
+            <a:r>
+              <a:rPr lang="en-US" sz="1200" kern="1200" dirty="0">
+                <a:solidFill>
+                  <a:schemeClr val="tx1"/>
+                </a:solidFill>
+                <a:latin typeface="+mn-lt"/>
+                <a:ea typeface="+mn-ea"/>
+                <a:cs typeface="+mn-cs"/>
+              </a:rPr>
+              <a:t>Our method can be broken down in 4 steps. Firstly, we find texts that are actually polarized enough to bother with. Secondly, pick the hyperparameters of the method, then we start building one tree per text. Thirdly, as already said we split and recurse, following whichever dimension explains the most of the divergence between the opinions. Then we remove this dimension, and repeat this inside each path that is left to study, until stopping criteria are met. Lastly, label each leaf with one pole and aggregate the results all trees.</a:t>
+            </a:r>
+          </a:p>
+          <a:p>
             <a:endParaRPr lang="en-US" dirty="0"/>
           </a:p>
         </p:txBody>
@@ -2229,6 +5258,108 @@
           <a:bodyPr/>
           <a:lstStyle/>
           <a:p>
+            <a:r>
+              <a:rPr lang="en-US" sz="1200" kern="1200" dirty="0">
+                <a:solidFill>
+                  <a:schemeClr val="tx1"/>
+                </a:solidFill>
+                <a:latin typeface="+mn-lt"/>
+                <a:ea typeface="+mn-ea"/>
+                <a:cs typeface="+mn-cs"/>
+              </a:rPr>
+              <a:t>But how do we decide the split at each node? With PEG. PEG plays the same role Gini plays in a decision tree, Gini asks 'how pure are the resulting classes', PEG asks 'how separated are the resulting opinions.</a:t>
+            </a:r>
+          </a:p>
+          <a:p>
+            <a:endParaRPr lang="el-GR" sz="1200" kern="1200" dirty="0">
+              <a:solidFill>
+                <a:schemeClr val="tx1"/>
+              </a:solidFill>
+              <a:latin typeface="+mn-lt"/>
+              <a:ea typeface="+mn-ea"/>
+              <a:cs typeface="+mn-cs"/>
+            </a:endParaRPr>
+          </a:p>
+          <a:p>
+            <a:r>
+              <a:rPr lang="en-US" sz="1200" kern="1200" dirty="0">
+                <a:solidFill>
+                  <a:schemeClr val="tx1"/>
+                </a:solidFill>
+                <a:latin typeface="+mn-lt"/>
+                <a:ea typeface="+mn-ea"/>
+                <a:cs typeface="+mn-cs"/>
+              </a:rPr>
+              <a:t>We provide three versions. </a:t>
+            </a:r>
+            <a:r>
+              <a:rPr lang="en-US" sz="1200" kern="1200" dirty="0" err="1">
+                <a:solidFill>
+                  <a:schemeClr val="tx1"/>
+                </a:solidFill>
+                <a:latin typeface="+mn-lt"/>
+                <a:ea typeface="+mn-ea"/>
+                <a:cs typeface="+mn-cs"/>
+              </a:rPr>
+              <a:t>PEGmax</a:t>
+            </a:r>
+            <a:r>
+              <a:rPr lang="en-US" sz="1200" kern="1200" dirty="0">
+                <a:solidFill>
+                  <a:schemeClr val="tx1"/>
+                </a:solidFill>
+                <a:latin typeface="+mn-lt"/>
+                <a:ea typeface="+mn-ea"/>
+                <a:cs typeface="+mn-cs"/>
+              </a:rPr>
+              <a:t> which is a greedy approach, </a:t>
+            </a:r>
+            <a:r>
+              <a:rPr lang="en-US" sz="1200" kern="1200" dirty="0" err="1">
+                <a:solidFill>
+                  <a:schemeClr val="tx1"/>
+                </a:solidFill>
+                <a:latin typeface="+mn-lt"/>
+                <a:ea typeface="+mn-ea"/>
+                <a:cs typeface="+mn-cs"/>
+              </a:rPr>
+              <a:t>PEGvar</a:t>
+            </a:r>
+            <a:r>
+              <a:rPr lang="en-US" sz="1200" kern="1200" dirty="0">
+                <a:solidFill>
+                  <a:schemeClr val="tx1"/>
+                </a:solidFill>
+                <a:latin typeface="+mn-lt"/>
+                <a:ea typeface="+mn-ea"/>
+                <a:cs typeface="+mn-cs"/>
+              </a:rPr>
+              <a:t> is more balanced and checks overall </a:t>
+            </a:r>
+            <a:r>
+              <a:rPr lang="en-US" sz="1200" kern="1200" dirty="0" err="1">
+                <a:solidFill>
+                  <a:schemeClr val="tx1"/>
+                </a:solidFill>
+                <a:latin typeface="+mn-lt"/>
+                <a:ea typeface="+mn-ea"/>
+                <a:cs typeface="+mn-cs"/>
+              </a:rPr>
+              <a:t>behaviour</a:t>
+            </a:r>
+            <a:r>
+              <a:rPr lang="en-US" sz="1200" kern="1200" dirty="0">
+                <a:solidFill>
+                  <a:schemeClr val="tx1"/>
+                </a:solidFill>
+                <a:latin typeface="+mn-lt"/>
+                <a:ea typeface="+mn-ea"/>
+                <a:cs typeface="+mn-cs"/>
+              </a:rPr>
+              <a:t>. PEGβ is the harmonic mean between those two. Also we introduce the normalized version of the PEG which actually produces the best recovery and the best results</a:t>
+            </a:r>
+          </a:p>
+          <a:p>
             <a:endParaRPr lang="en-US" dirty="0"/>
           </a:p>
         </p:txBody>
@@ -2313,6 +5444,17 @@
           <a:bodyPr/>
           <a:lstStyle/>
           <a:p>
+            <a:r>
+              <a:rPr lang="en-US" sz="1200" kern="1200" dirty="0">
+                <a:solidFill>
+                  <a:schemeClr val="tx1"/>
+                </a:solidFill>
+                <a:latin typeface="+mn-lt"/>
+                <a:ea typeface="+mn-ea"/>
+                <a:cs typeface="+mn-cs"/>
+              </a:rPr>
+              <a:t>But we phase a big problem here. There's no dataset with known ground-truth polarization, so we can't check if we're recovering the right structure. What we do is build a synthetic one where we do know the ground truth, and used it to test recovery and pick the best-performing hyperparameters, so the results at inference are more trustworthy. Total hyperparameter combinations are 3240. We narrow it down to 800 using random grid search and we test it against 3 distribution, so we have a total of 2400 runs.</a:t>
+            </a:r>
             <a:endParaRPr lang="en-US" dirty="0"/>
           </a:p>
         </p:txBody>
@@ -2396,6 +5538,40 @@
         <p:txBody>
           <a:bodyPr/>
           <a:lstStyle/>
+          <a:p>
+            <a:r>
+              <a:rPr lang="en-US" sz="1200" kern="1200" dirty="0">
+                <a:solidFill>
+                  <a:schemeClr val="tx1"/>
+                </a:solidFill>
+                <a:latin typeface="+mn-lt"/>
+                <a:ea typeface="+mn-ea"/>
+                <a:cs typeface="+mn-cs"/>
+              </a:rPr>
+              <a:t>We see now best-performing configuration from that search. We picked it using mean Jaccard, since we're comparing sets of dimensions, not single predictions</a:t>
+            </a:r>
+            <a:endParaRPr lang="el-GR" sz="1200" kern="1200" dirty="0">
+              <a:solidFill>
+                <a:schemeClr val="tx1"/>
+              </a:solidFill>
+              <a:latin typeface="+mn-lt"/>
+              <a:ea typeface="+mn-ea"/>
+              <a:cs typeface="+mn-cs"/>
+            </a:endParaRPr>
+          </a:p>
+          <a:p>
+            <a:r>
+              <a:rPr lang="en-US" sz="1200" kern="1200" dirty="0">
+                <a:solidFill>
+                  <a:schemeClr val="tx1"/>
+                </a:solidFill>
+                <a:latin typeface="+mn-lt"/>
+                <a:ea typeface="+mn-ea"/>
+                <a:cs typeface="+mn-cs"/>
+              </a:rPr>
+              <a:t>As you can see, this configuration holds up consistently, 0.892 mean Jaccard across the three synthetic distributions. From here on, every experiment uses this exact combination, because it’s the most trustworthy.</a:t>
+            </a:r>
+          </a:p>
           <a:p>
             <a:endParaRPr lang="en-US" dirty="0"/>
           </a:p>
@@ -3138,7 +6314,7 @@
               <a:buNone/>
             </a:pPr>
             <a:r>
-              <a:rPr lang="en-US" sz="3000" b="1" dirty="0">
+              <a:rPr lang="en-US" sz="3600" b="1" dirty="0">
                 <a:solidFill>
                   <a:srgbClr val="1B1F3B"/>
                 </a:solidFill>
@@ -3148,7 +6324,7 @@
               </a:rPr>
               <a:t>Why DICES</a:t>
             </a:r>
-            <a:endParaRPr lang="en-US" sz="3000" dirty="0"/>
+            <a:endParaRPr lang="en-US" sz="3600" dirty="0"/>
           </a:p>
         </p:txBody>
       </p:sp>
@@ -3844,7 +7020,7 @@
                 <a:ea typeface="Calibri" pitchFamily="34" charset="-122"/>
                 <a:cs typeface="Calibri" pitchFamily="34" charset="-120"/>
               </a:rPr>
-              <a:t>09</a:t>
+              <a:t>10</a:t>
             </a:r>
             <a:endParaRPr lang="en-US" sz="1000" dirty="0"/>
           </a:p>
@@ -3990,7 +7166,7 @@
         </p:nvSpPr>
         <p:spPr>
           <a:xfrm>
-            <a:off x="457200" y="713232"/>
+            <a:off x="457200" y="838043"/>
             <a:ext cx="11247120" cy="777240"/>
           </a:xfrm>
           <a:prstGeom prst="rect">
@@ -4007,7 +7183,7 @@
               <a:buNone/>
             </a:pPr>
             <a:r>
-              <a:rPr lang="en-US" sz="3000" b="1" dirty="0">
+              <a:rPr lang="en-US" sz="3600" b="1" dirty="0">
                 <a:solidFill>
                   <a:srgbClr val="1B1F3B"/>
                 </a:solidFill>
@@ -4017,7 +7193,7 @@
               </a:rPr>
               <a:t>Race opens the tree, gender and age take over deeper down</a:t>
             </a:r>
-            <a:endParaRPr lang="en-US" sz="3000" dirty="0"/>
+            <a:endParaRPr lang="en-US" sz="3600" dirty="0"/>
           </a:p>
         </p:txBody>
       </p:sp>
@@ -4576,7 +7752,7 @@
                 <a:ea typeface="Calibri" pitchFamily="34" charset="-122"/>
                 <a:cs typeface="Calibri" pitchFamily="34" charset="-120"/>
               </a:rPr>
-              <a:t>10</a:t>
+              <a:t>11</a:t>
             </a:r>
             <a:endParaRPr lang="en-US" sz="1000" dirty="0"/>
           </a:p>
@@ -4592,7 +7768,7 @@
 
 <file path=ppt/slides/slide12.xml><?xml version="1.0" encoding="utf-8"?>
 <p:sld xmlns:a="http://schemas.openxmlformats.org/drawingml/2006/main" xmlns:r="http://schemas.openxmlformats.org/officeDocument/2006/relationships" xmlns:p="http://schemas.openxmlformats.org/presentationml/2006/main">
-  <p:cSld name="Slide 11">
+  <p:cSld name="Slide 3">
     <p:bg>
       <p:bgPr>
         <a:solidFill>
@@ -4683,8 +7859,8 @@
         </p:nvSpPr>
         <p:spPr>
           <a:xfrm>
-            <a:off x="777240" y="384048"/>
-            <a:ext cx="7315200" cy="320040"/>
+            <a:off x="777240" y="365760"/>
+            <a:ext cx="8229600" cy="320040"/>
           </a:xfrm>
           <a:prstGeom prst="rect">
             <a:avLst/>
@@ -4700,7 +7876,7 @@
               <a:buNone/>
             </a:pPr>
             <a:r>
-              <a:rPr lang="en-US" sz="1100" b="1" kern="0" spc="200" dirty="0">
+              <a:rPr lang="en-US" sz="1200" b="1" kern="0" spc="200" dirty="0">
                 <a:solidFill>
                   <a:srgbClr val="6B7280"/>
                 </a:solidFill>
@@ -4710,7 +7886,7 @@
               </a:rPr>
               <a:t>QUALITATIVE READING</a:t>
             </a:r>
-            <a:endParaRPr lang="en-US" sz="1100" dirty="0"/>
+            <a:endParaRPr lang="en-US" sz="1200" dirty="0"/>
           </a:p>
         </p:txBody>
       </p:sp>
@@ -4722,8 +7898,8 @@
         </p:nvSpPr>
         <p:spPr>
           <a:xfrm>
-            <a:off x="457200" y="713232"/>
-            <a:ext cx="11247120" cy="777240"/>
+            <a:off x="457200" y="685800"/>
+            <a:ext cx="11247120" cy="868680"/>
           </a:xfrm>
           <a:prstGeom prst="rect">
             <a:avLst/>
@@ -4739,7 +7915,7 @@
               <a:buNone/>
             </a:pPr>
             <a:r>
-              <a:rPr lang="en-US" sz="3000" b="1" dirty="0">
+              <a:rPr lang="en-US" sz="3600" b="1" dirty="0">
                 <a:solidFill>
                   <a:srgbClr val="1B1F3B"/>
                 </a:solidFill>
@@ -4747,9 +7923,9 @@
                 <a:ea typeface="Cambria" pitchFamily="34" charset="-122"/>
                 <a:cs typeface="Cambria" pitchFamily="34" charset="-120"/>
               </a:rPr>
-              <a:t>Same broad group, opposite verdicts</a:t>
-            </a:r>
-            <a:endParaRPr lang="en-US" sz="3000" dirty="0"/>
+              <a:t>Same story, three times over</a:t>
+            </a:r>
+            <a:endParaRPr lang="en-US" sz="3600" dirty="0"/>
           </a:p>
         </p:txBody>
       </p:sp>
@@ -4761,8 +7937,8 @@
         </p:nvSpPr>
         <p:spPr>
           <a:xfrm>
-            <a:off x="457200" y="1828800"/>
-            <a:ext cx="3611880" cy="4160520"/>
+            <a:off x="457200" y="1783080"/>
+            <a:ext cx="3611880" cy="4251960"/>
           </a:xfrm>
           <a:prstGeom prst="roundRect">
             <a:avLst>
@@ -4790,8 +7966,8 @@
         </p:nvSpPr>
         <p:spPr>
           <a:xfrm>
-            <a:off x="731520" y="2011680"/>
-            <a:ext cx="3017520" cy="365760"/>
+            <a:off x="731520" y="1965960"/>
+            <a:ext cx="3017520" cy="411480"/>
           </a:xfrm>
           <a:prstGeom prst="rect">
             <a:avLst/>
@@ -4807,7 +7983,7 @@
               <a:buNone/>
             </a:pPr>
             <a:r>
-              <a:rPr lang="en-US" sz="1500" b="1" dirty="0">
+              <a:rPr lang="en-US" sz="1900" b="1" dirty="0">
                 <a:solidFill>
                   <a:srgbClr val="1B1F3B"/>
                 </a:solidFill>
@@ -4815,9 +7991,9 @@
                 <a:ea typeface="Cambria" pitchFamily="34" charset="-122"/>
                 <a:cs typeface="Cambria" pitchFamily="34" charset="-120"/>
               </a:rPr>
-              <a:t>Item 59</a:t>
-            </a:r>
-            <a:endParaRPr lang="en-US" sz="1500" dirty="0"/>
+              <a:t>Item 942</a:t>
+            </a:r>
+            <a:endParaRPr lang="en-US" sz="1900" dirty="0"/>
           </a:p>
         </p:txBody>
       </p:sp>
@@ -4829,7 +8005,7 @@
         </p:nvSpPr>
         <p:spPr>
           <a:xfrm>
-            <a:off x="731520" y="2423160"/>
+            <a:off x="731520" y="2395728"/>
             <a:ext cx="3063240" cy="594360"/>
           </a:xfrm>
           <a:prstGeom prst="rect">
@@ -4846,7 +8022,7 @@
               <a:buNone/>
             </a:pPr>
             <a:r>
-              <a:rPr lang="en-US" sz="1100" i="1" dirty="0">
+              <a:rPr lang="en-US" sz="1300" i="1" dirty="0">
                 <a:solidFill>
                   <a:srgbClr val="6B7280"/>
                 </a:solidFill>
@@ -4854,9 +8030,9 @@
                 <a:ea typeface="Calibri" pitchFamily="34" charset="-122"/>
                 <a:cs typeface="Calibri" pitchFamily="34" charset="-120"/>
               </a:rPr>
-              <a:t>Racially-coded slur about a coworker</a:t>
-            </a:r>
-            <a:endParaRPr lang="en-US" sz="1100" dirty="0"/>
+              <a:t>Hostile reply, no group targeted</a:t>
+            </a:r>
+            <a:endParaRPr lang="en-US" sz="1300" dirty="0"/>
           </a:p>
         </p:txBody>
       </p:sp>
@@ -4868,7 +8044,7 @@
         </p:nvSpPr>
         <p:spPr>
           <a:xfrm>
-            <a:off x="731520" y="3108960"/>
+            <a:off x="731520" y="3063240"/>
             <a:ext cx="3063240" cy="777240"/>
           </a:xfrm>
           <a:prstGeom prst="roundRect">
@@ -4877,7 +8053,7 @@
             </a:avLst>
           </a:prstGeom>
           <a:solidFill>
-            <a:schemeClr val="accent1"/>
+            <a:schemeClr val="accent2"/>
           </a:solidFill>
           <a:ln/>
         </p:spPr>
@@ -4897,7 +8073,7 @@
         </p:nvSpPr>
         <p:spPr>
           <a:xfrm>
-            <a:off x="868680" y="3108960"/>
+            <a:off x="868680" y="3063240"/>
             <a:ext cx="2788920" cy="777240"/>
           </a:xfrm>
           <a:prstGeom prst="rect">
@@ -4914,7 +8090,7 @@
               <a:buNone/>
             </a:pPr>
             <a:r>
-              <a:rPr lang="en-US" sz="1050" dirty="0">
+              <a:rPr lang="en-US" sz="1300" b="1" dirty="0">
                 <a:solidFill>
                   <a:srgbClr val="FFFFFF"/>
                 </a:solidFill>
@@ -4922,9 +8098,9 @@
                 <a:ea typeface="Calibri" pitchFamily="34" charset="-122"/>
                 <a:cs typeface="Calibri" pitchFamily="34" charset="-120"/>
               </a:rPr>
-              <a:t>Asian, Gen X+, Man → not biased</a:t>
-            </a:r>
-            <a:endParaRPr lang="en-US" sz="1050" dirty="0"/>
+              <a:t>Asian, Millennial, Man → biased</a:t>
+            </a:r>
+            <a:endParaRPr lang="en-US" sz="1300" dirty="0"/>
           </a:p>
         </p:txBody>
       </p:sp>
@@ -4936,7 +8112,7 @@
         </p:nvSpPr>
         <p:spPr>
           <a:xfrm>
-            <a:off x="731520" y="3977640"/>
+            <a:off x="731520" y="3931920"/>
             <a:ext cx="3063240" cy="777240"/>
           </a:xfrm>
           <a:prstGeom prst="roundRect">
@@ -4945,7 +8121,7 @@
             </a:avLst>
           </a:prstGeom>
           <a:solidFill>
-            <a:schemeClr val="accent2"/>
+            <a:schemeClr val="accent1"/>
           </a:solidFill>
           <a:ln/>
         </p:spPr>
@@ -4965,7 +8141,7 @@
         </p:nvSpPr>
         <p:spPr>
           <a:xfrm>
-            <a:off x="868680" y="3977640"/>
+            <a:off x="868680" y="3931920"/>
             <a:ext cx="2788920" cy="777240"/>
           </a:xfrm>
           <a:prstGeom prst="rect">
@@ -4982,7 +8158,7 @@
               <a:buNone/>
             </a:pPr>
             <a:r>
-              <a:rPr lang="en-US" sz="1050" dirty="0">
+              <a:rPr lang="en-US" sz="1300" b="1" dirty="0">
                 <a:solidFill>
                   <a:srgbClr val="FFFFFF"/>
                 </a:solidFill>
@@ -4990,9 +8166,9 @@
                 <a:ea typeface="Calibri" pitchFamily="34" charset="-122"/>
                 <a:cs typeface="Calibri" pitchFamily="34" charset="-120"/>
               </a:rPr>
-              <a:t>Asian, Millennial, HS-or-below → biased</a:t>
-            </a:r>
-            <a:endParaRPr lang="en-US" sz="1050" dirty="0"/>
+              <a:t>Asian, Millennial, Woman → not biased</a:t>
+            </a:r>
+            <a:endParaRPr lang="en-US" sz="1300" dirty="0"/>
           </a:p>
         </p:txBody>
       </p:sp>
@@ -5004,8 +8180,8 @@
         </p:nvSpPr>
         <p:spPr>
           <a:xfrm>
-            <a:off x="731520" y="4892040"/>
-            <a:ext cx="3063240" cy="1005840"/>
+            <a:off x="731520" y="4846320"/>
+            <a:ext cx="3063240" cy="1097280"/>
           </a:xfrm>
           <a:prstGeom prst="rect">
             <a:avLst/>
@@ -5019,22 +8195,22 @@
           <a:p>
             <a:pPr marL="0" indent="0">
               <a:lnSpc>
-                <a:spcPct val="115000"/>
+                <a:spcPct val="120000"/>
               </a:lnSpc>
               <a:buNone/>
             </a:pPr>
             <a:r>
-              <a:rPr lang="en-US" sz="1050" dirty="0">
-                <a:solidFill>
-                  <a:srgbClr val="6B7280"/>
+              <a:rPr lang="en-US" sz="1450" b="1" dirty="0">
+                <a:solidFill>
+                  <a:srgbClr val="1B1F3B"/>
                 </a:solidFill>
                 <a:latin typeface="Calibri" pitchFamily="34" charset="0"/>
                 <a:ea typeface="Calibri" pitchFamily="34" charset="-122"/>
                 <a:cs typeface="Calibri" pitchFamily="34" charset="-120"/>
               </a:rPr>
-              <a:t>Split hides inside “Asian” until age + gender/education separate it.</a:t>
-            </a:r>
-            <a:endParaRPr lang="en-US" sz="1050" dirty="0"/>
+              <a:t>Two traits pinned down, gender alone flips the verdict.</a:t>
+            </a:r>
+            <a:endParaRPr lang="en-US" sz="1450" dirty="0"/>
           </a:p>
         </p:txBody>
       </p:sp>
@@ -5046,8 +8222,8 @@
         </p:nvSpPr>
         <p:spPr>
           <a:xfrm>
-            <a:off x="4297680" y="1828800"/>
-            <a:ext cx="3611880" cy="4160520"/>
+            <a:off x="4297680" y="1783080"/>
+            <a:ext cx="3611880" cy="4251960"/>
           </a:xfrm>
           <a:prstGeom prst="roundRect">
             <a:avLst>
@@ -5075,8 +8251,8 @@
         </p:nvSpPr>
         <p:spPr>
           <a:xfrm>
-            <a:off x="4572000" y="2011680"/>
-            <a:ext cx="3017520" cy="365760"/>
+            <a:off x="4572000" y="1965960"/>
+            <a:ext cx="3017520" cy="411480"/>
           </a:xfrm>
           <a:prstGeom prst="rect">
             <a:avLst/>
@@ -5092,7 +8268,7 @@
               <a:buNone/>
             </a:pPr>
             <a:r>
-              <a:rPr lang="en-US" sz="1500" b="1" dirty="0">
+              <a:rPr lang="en-US" sz="1900" b="1" dirty="0">
                 <a:solidFill>
                   <a:srgbClr val="1B1F3B"/>
                 </a:solidFill>
@@ -5100,9 +8276,9 @@
                 <a:ea typeface="Cambria" pitchFamily="34" charset="-122"/>
                 <a:cs typeface="Cambria" pitchFamily="34" charset="-120"/>
               </a:rPr>
-              <a:t>Item 264</a:t>
-            </a:r>
-            <a:endParaRPr lang="en-US" sz="1500" dirty="0"/>
+              <a:t>Item 59</a:t>
+            </a:r>
+            <a:endParaRPr lang="en-US" sz="1900" dirty="0"/>
           </a:p>
         </p:txBody>
       </p:sp>
@@ -5114,7 +8290,7 @@
         </p:nvSpPr>
         <p:spPr>
           <a:xfrm>
-            <a:off x="4572000" y="2423160"/>
+            <a:off x="4572000" y="2395728"/>
             <a:ext cx="3063240" cy="594360"/>
           </a:xfrm>
           <a:prstGeom prst="rect">
@@ -5131,7 +8307,7 @@
               <a:buNone/>
             </a:pPr>
             <a:r>
-              <a:rPr lang="en-US" sz="1100" i="1" dirty="0">
+              <a:rPr lang="en-US" sz="1300" i="1" dirty="0">
                 <a:solidFill>
                   <a:srgbClr val="6B7280"/>
                 </a:solidFill>
@@ -5139,9 +8315,9 @@
                 <a:ea typeface="Calibri" pitchFamily="34" charset="-122"/>
                 <a:cs typeface="Calibri" pitchFamily="34" charset="-120"/>
               </a:rPr>
-              <a:t>“Superior race” remark to a child</a:t>
-            </a:r>
-            <a:endParaRPr lang="en-US" sz="1100" dirty="0"/>
+              <a:t>Racially-coded slur about a coworker</a:t>
+            </a:r>
+            <a:endParaRPr lang="en-US" sz="1300" dirty="0"/>
           </a:p>
         </p:txBody>
       </p:sp>
@@ -5153,7 +8329,7 @@
         </p:nvSpPr>
         <p:spPr>
           <a:xfrm>
-            <a:off x="4572000" y="3108960"/>
+            <a:off x="4572000" y="3063240"/>
             <a:ext cx="3063240" cy="777240"/>
           </a:xfrm>
           <a:prstGeom prst="roundRect">
@@ -5162,7 +8338,7 @@
             </a:avLst>
           </a:prstGeom>
           <a:solidFill>
-            <a:schemeClr val="accent2"/>
+            <a:schemeClr val="accent1"/>
           </a:solidFill>
           <a:ln/>
         </p:spPr>
@@ -5182,7 +8358,7 @@
         </p:nvSpPr>
         <p:spPr>
           <a:xfrm>
-            <a:off x="4709160" y="3108960"/>
+            <a:off x="4709160" y="3063240"/>
             <a:ext cx="2788920" cy="777240"/>
           </a:xfrm>
           <a:prstGeom prst="rect">
@@ -5199,7 +8375,7 @@
               <a:buNone/>
             </a:pPr>
             <a:r>
-              <a:rPr lang="en-US" sz="1050" dirty="0">
+              <a:rPr lang="en-US" sz="1300" b="1" dirty="0">
                 <a:solidFill>
                   <a:srgbClr val="FFFFFF"/>
                 </a:solidFill>
@@ -5207,9 +8383,9 @@
                 <a:ea typeface="Calibri" pitchFamily="34" charset="-122"/>
                 <a:cs typeface="Calibri" pitchFamily="34" charset="-120"/>
               </a:rPr>
-              <a:t>Hispanic/Latino, Gen Z, Man → biased</a:t>
-            </a:r>
-            <a:endParaRPr lang="en-US" sz="1050" dirty="0"/>
+              <a:t>Asian, Gen X+, Man → not biased</a:t>
+            </a:r>
+            <a:endParaRPr lang="en-US" sz="1300" dirty="0"/>
           </a:p>
         </p:txBody>
       </p:sp>
@@ -5221,7 +8397,7 @@
         </p:nvSpPr>
         <p:spPr>
           <a:xfrm>
-            <a:off x="4572000" y="3977640"/>
+            <a:off x="4572000" y="3931920"/>
             <a:ext cx="3063240" cy="777240"/>
           </a:xfrm>
           <a:prstGeom prst="roundRect">
@@ -5230,7 +8406,7 @@
             </a:avLst>
           </a:prstGeom>
           <a:solidFill>
-            <a:schemeClr val="accent1"/>
+            <a:schemeClr val="accent2"/>
           </a:solidFill>
           <a:ln/>
         </p:spPr>
@@ -5250,7 +8426,7 @@
         </p:nvSpPr>
         <p:spPr>
           <a:xfrm>
-            <a:off x="4709160" y="3977640"/>
+            <a:off x="4709160" y="3931920"/>
             <a:ext cx="2788920" cy="777240"/>
           </a:xfrm>
           <a:prstGeom prst="rect">
@@ -5267,7 +8443,7 @@
               <a:buNone/>
             </a:pPr>
             <a:r>
-              <a:rPr lang="en-US" sz="1050" dirty="0">
+              <a:rPr lang="en-US" sz="1300" b="1" dirty="0">
                 <a:solidFill>
                   <a:srgbClr val="FFFFFF"/>
                 </a:solidFill>
@@ -5275,9 +8451,9 @@
                 <a:ea typeface="Calibri" pitchFamily="34" charset="-122"/>
                 <a:cs typeface="Calibri" pitchFamily="34" charset="-120"/>
               </a:rPr>
-              <a:t>Hispanic/Latino, Millennial, Woman → not biased</a:t>
-            </a:r>
-            <a:endParaRPr lang="en-US" sz="1050" dirty="0"/>
+              <a:t>Asian, Millennial, HS-or-below → biased</a:t>
+            </a:r>
+            <a:endParaRPr lang="en-US" sz="1300" dirty="0"/>
           </a:p>
         </p:txBody>
       </p:sp>
@@ -5289,8 +8465,8 @@
         </p:nvSpPr>
         <p:spPr>
           <a:xfrm>
-            <a:off x="4572000" y="4892040"/>
-            <a:ext cx="3063240" cy="1005840"/>
+            <a:off x="4572000" y="4846320"/>
+            <a:ext cx="3063240" cy="1097280"/>
           </a:xfrm>
           <a:prstGeom prst="rect">
             <a:avLst/>
@@ -5304,22 +8480,22 @@
           <a:p>
             <a:pPr marL="0" indent="0">
               <a:lnSpc>
-                <a:spcPct val="115000"/>
+                <a:spcPct val="120000"/>
               </a:lnSpc>
               <a:buNone/>
             </a:pPr>
             <a:r>
-              <a:rPr lang="en-US" sz="1050" dirty="0">
-                <a:solidFill>
-                  <a:srgbClr val="6B7280"/>
+              <a:rPr lang="en-US" sz="1450" b="1" dirty="0">
+                <a:solidFill>
+                  <a:srgbClr val="1B1F3B"/>
                 </a:solidFill>
                 <a:latin typeface="Calibri" pitchFamily="34" charset="0"/>
                 <a:ea typeface="Calibri" pitchFamily="34" charset="-122"/>
                 <a:cs typeface="Calibri" pitchFamily="34" charset="-120"/>
               </a:rPr>
-              <a:t>Same racial group, opposite verdicts once age + gender are added.</a:t>
-            </a:r>
-            <a:endParaRPr lang="en-US" sz="1050" dirty="0"/>
+              <a:t>Not the slur, the mockery. Groups disagree on where mockery becomes bias.</a:t>
+            </a:r>
+            <a:endParaRPr lang="en-US" sz="1450" dirty="0"/>
           </a:p>
         </p:txBody>
       </p:sp>
@@ -5331,8 +8507,8 @@
         </p:nvSpPr>
         <p:spPr>
           <a:xfrm>
-            <a:off x="8138160" y="1828800"/>
-            <a:ext cx="3611880" cy="4160520"/>
+            <a:off x="8138160" y="1783080"/>
+            <a:ext cx="3611880" cy="4251960"/>
           </a:xfrm>
           <a:prstGeom prst="roundRect">
             <a:avLst>
@@ -5360,8 +8536,8 @@
         </p:nvSpPr>
         <p:spPr>
           <a:xfrm>
-            <a:off x="8412480" y="2011680"/>
-            <a:ext cx="3017520" cy="365760"/>
+            <a:off x="8412480" y="1965960"/>
+            <a:ext cx="3017520" cy="411480"/>
           </a:xfrm>
           <a:prstGeom prst="rect">
             <a:avLst/>
@@ -5377,7 +8553,7 @@
               <a:buNone/>
             </a:pPr>
             <a:r>
-              <a:rPr lang="en-US" sz="1500" b="1" dirty="0">
+              <a:rPr lang="en-US" sz="1900" b="1" dirty="0">
                 <a:solidFill>
                   <a:srgbClr val="1B1F3B"/>
                 </a:solidFill>
@@ -5387,7 +8563,7 @@
               </a:rPr>
               <a:t>Item 901</a:t>
             </a:r>
-            <a:endParaRPr lang="en-US" sz="1500" dirty="0"/>
+            <a:endParaRPr lang="en-US" sz="1900" dirty="0"/>
           </a:p>
         </p:txBody>
       </p:sp>
@@ -5399,7 +8575,7 @@
         </p:nvSpPr>
         <p:spPr>
           <a:xfrm>
-            <a:off x="8412480" y="2423160"/>
+            <a:off x="8412480" y="2395728"/>
             <a:ext cx="3063240" cy="594360"/>
           </a:xfrm>
           <a:prstGeom prst="rect">
@@ -5416,7 +8592,7 @@
               <a:buNone/>
             </a:pPr>
             <a:r>
-              <a:rPr lang="en-US" sz="1100" i="1" dirty="0">
+              <a:rPr lang="en-US" sz="1300" i="1" dirty="0">
                 <a:solidFill>
                   <a:srgbClr val="6B7280"/>
                 </a:solidFill>
@@ -5426,7 +8602,7 @@
               </a:rPr>
               <a:t>Comment on crime and wealth gaps</a:t>
             </a:r>
-            <a:endParaRPr lang="en-US" sz="1100" dirty="0"/>
+            <a:endParaRPr lang="en-US" sz="1300" dirty="0"/>
           </a:p>
         </p:txBody>
       </p:sp>
@@ -5438,7 +8614,7 @@
         </p:nvSpPr>
         <p:spPr>
           <a:xfrm>
-            <a:off x="8412480" y="3108960"/>
+            <a:off x="8412480" y="3063240"/>
             <a:ext cx="3063240" cy="777240"/>
           </a:xfrm>
           <a:prstGeom prst="roundRect">
@@ -5467,7 +8643,7 @@
         </p:nvSpPr>
         <p:spPr>
           <a:xfrm>
-            <a:off x="8549640" y="3108960"/>
+            <a:off x="8549640" y="3063240"/>
             <a:ext cx="2788920" cy="777240"/>
           </a:xfrm>
           <a:prstGeom prst="rect">
@@ -5484,7 +8660,7 @@
               <a:buNone/>
             </a:pPr>
             <a:r>
-              <a:rPr lang="en-US" sz="1050" dirty="0">
+              <a:rPr lang="en-US" sz="1300" b="1" dirty="0">
                 <a:solidFill>
                   <a:srgbClr val="FFFFFF"/>
                 </a:solidFill>
@@ -5494,7 +8670,7 @@
               </a:rPr>
               <a:t>Gen X+, Woman → biased</a:t>
             </a:r>
-            <a:endParaRPr lang="en-US" sz="1050" dirty="0"/>
+            <a:endParaRPr lang="en-US" sz="1300" dirty="0"/>
           </a:p>
         </p:txBody>
       </p:sp>
@@ -5506,7 +8682,7 @@
         </p:nvSpPr>
         <p:spPr>
           <a:xfrm>
-            <a:off x="8412480" y="3977640"/>
+            <a:off x="8412480" y="3931920"/>
             <a:ext cx="3063240" cy="777240"/>
           </a:xfrm>
           <a:prstGeom prst="roundRect">
@@ -5535,7 +8711,7 @@
         </p:nvSpPr>
         <p:spPr>
           <a:xfrm>
-            <a:off x="8549640" y="3977640"/>
+            <a:off x="8549640" y="3931920"/>
             <a:ext cx="2788920" cy="777240"/>
           </a:xfrm>
           <a:prstGeom prst="rect">
@@ -5552,7 +8728,7 @@
               <a:buNone/>
             </a:pPr>
             <a:r>
-              <a:rPr lang="en-US" sz="1050" dirty="0">
+              <a:rPr lang="en-US" sz="1300" b="1" dirty="0">
                 <a:solidFill>
                   <a:srgbClr val="FFFFFF"/>
                 </a:solidFill>
@@ -5562,7 +8738,7 @@
               </a:rPr>
               <a:t>Hispanic/Latino, Millennial, Degree+ → not biased</a:t>
             </a:r>
-            <a:endParaRPr lang="en-US" sz="1050" dirty="0"/>
+            <a:endParaRPr lang="en-US" sz="1300" dirty="0"/>
           </a:p>
         </p:txBody>
       </p:sp>
@@ -5574,8 +8750,8 @@
         </p:nvSpPr>
         <p:spPr>
           <a:xfrm>
-            <a:off x="8412480" y="4892040"/>
-            <a:ext cx="3063240" cy="1005840"/>
+            <a:off x="8412480" y="4846320"/>
+            <a:ext cx="3063240" cy="1097280"/>
           </a:xfrm>
           <a:prstGeom prst="rect">
             <a:avLst/>
@@ -5589,22 +8765,22 @@
           <a:p>
             <a:pPr marL="0" indent="0">
               <a:lnSpc>
-                <a:spcPct val="115000"/>
+                <a:spcPct val="120000"/>
               </a:lnSpc>
               <a:buNone/>
             </a:pPr>
             <a:r>
-              <a:rPr lang="en-US" sz="1050" dirty="0">
-                <a:solidFill>
-                  <a:srgbClr val="6B7280"/>
+              <a:rPr lang="en-US" sz="1450" b="1" dirty="0">
+                <a:solidFill>
+                  <a:srgbClr val="1B1F3B"/>
                 </a:solidFill>
                 <a:latin typeface="Calibri" pitchFamily="34" charset="0"/>
                 <a:ea typeface="Calibri" pitchFamily="34" charset="-122"/>
                 <a:cs typeface="Calibri" pitchFamily="34" charset="-120"/>
               </a:rPr>
-              <a:t>Here the two poles come from entirely different dimension combinations.</a:t>
-            </a:r>
-            <a:endParaRPr lang="en-US" sz="1050" dirty="0"/>
+              <a:t>Same explanation, two readings, repeating bias, or refuting it.</a:t>
+            </a:r>
+            <a:endParaRPr lang="en-US" sz="1450" dirty="0"/>
           </a:p>
         </p:txBody>
       </p:sp>
@@ -5633,7 +8809,7 @@
               <a:buNone/>
             </a:pPr>
             <a:r>
-              <a:rPr lang="en-US" sz="1000" dirty="0">
+              <a:rPr lang="en-US" sz="1100" dirty="0">
                 <a:solidFill>
                   <a:srgbClr val="B7BCD0"/>
                 </a:solidFill>
@@ -5641,9 +8817,9 @@
                 <a:ea typeface="Calibri" pitchFamily="34" charset="-122"/>
                 <a:cs typeface="Calibri" pitchFamily="34" charset="-120"/>
               </a:rPr>
-              <a:t>11</a:t>
-            </a:r>
-            <a:endParaRPr lang="en-US" sz="1000" dirty="0"/>
+              <a:t>12</a:t>
+            </a:r>
+            <a:endParaRPr lang="en-US" sz="1100" dirty="0"/>
           </a:p>
         </p:txBody>
       </p:sp>
@@ -5804,7 +8980,7 @@
               <a:buNone/>
             </a:pPr>
             <a:r>
-              <a:rPr lang="en-US" sz="3000" b="1" dirty="0">
+              <a:rPr lang="en-US" sz="3600" b="1" dirty="0">
                 <a:solidFill>
                   <a:srgbClr val="FFFFFF"/>
                 </a:solidFill>
@@ -5814,7 +8990,7 @@
               </a:rPr>
               <a:t>What we bring to the community</a:t>
             </a:r>
-            <a:endParaRPr lang="en-US" sz="3000" dirty="0"/>
+            <a:endParaRPr lang="en-US" sz="3600" dirty="0"/>
           </a:p>
         </p:txBody>
       </p:sp>
@@ -5897,7 +9073,7 @@
                 <a:ea typeface="Calibri" pitchFamily="34" charset="-122"/>
                 <a:cs typeface="Calibri" pitchFamily="34" charset="-120"/>
               </a:rPr>
-              <a:t>First method to automatically discover multidimensional SCD polarization structure — no predefined hypotheses</a:t>
+              <a:t>Method to automatically discover multidimensional  polarization structure — no predefined hypotheses</a:t>
             </a:r>
             <a:endParaRPr lang="en-US" sz="1300" dirty="0"/>
           </a:p>
@@ -6165,13 +9341,428 @@
                 <a:ea typeface="Calibri" pitchFamily="34" charset="-122"/>
                 <a:cs typeface="Calibri" pitchFamily="34" charset="-120"/>
               </a:rPr>
-              <a:t>12</a:t>
+              <a:t>13</a:t>
             </a:r>
             <a:endParaRPr lang="en-US" sz="1000" dirty="0"/>
           </a:p>
         </p:txBody>
       </p:sp>
     </p:spTree>
+  </p:cSld>
+  <p:clrMapOvr>
+    <a:masterClrMapping/>
+  </p:clrMapOvr>
+</p:sld>
+</file>
+
+<file path=ppt/slides/slide14.xml><?xml version="1.0" encoding="utf-8"?>
+<p:sld xmlns:a="http://schemas.openxmlformats.org/drawingml/2006/main" xmlns:r="http://schemas.openxmlformats.org/officeDocument/2006/relationships" xmlns:p="http://schemas.openxmlformats.org/presentationml/2006/main">
+  <p:cSld>
+    <p:bg>
+      <p:bgPr>
+        <a:solidFill>
+          <a:srgbClr val="1B1F3B"/>
+        </a:solidFill>
+        <a:effectLst/>
+      </p:bgPr>
+    </p:bg>
+    <p:spTree>
+      <p:nvGrpSpPr>
+        <p:cNvPr id="1" name="">
+          <a:extLst>
+            <a:ext uri="{FF2B5EF4-FFF2-40B4-BE49-F238E27FC236}">
+              <a16:creationId xmlns:a16="http://schemas.microsoft.com/office/drawing/2014/main" id="{7E3353A7-865F-1817-05FC-822E872A6C98}"/>
+            </a:ext>
+          </a:extLst>
+        </p:cNvPr>
+        <p:cNvGrpSpPr/>
+        <p:nvPr/>
+      </p:nvGrpSpPr>
+      <p:grpSpPr>
+        <a:xfrm>
+          <a:off x="0" y="0"/>
+          <a:ext cx="0" cy="0"/>
+          <a:chOff x="0" y="0"/>
+          <a:chExt cx="0" cy="0"/>
+        </a:xfrm>
+      </p:grpSpPr>
+      <p:sp>
+        <p:nvSpPr>
+          <p:cNvPr id="2" name="Shape 0">
+            <a:extLst>
+              <a:ext uri="{FF2B5EF4-FFF2-40B4-BE49-F238E27FC236}">
+                <a16:creationId xmlns:a16="http://schemas.microsoft.com/office/drawing/2014/main" id="{76C3745C-2DF6-A5E6-D108-5BFA5B45B7EA}"/>
+              </a:ext>
+            </a:extLst>
+          </p:cNvPr>
+          <p:cNvSpPr/>
+          <p:nvPr/>
+        </p:nvSpPr>
+        <p:spPr>
+          <a:xfrm>
+            <a:off x="457200" y="457200"/>
+            <a:ext cx="201168" cy="201168"/>
+          </a:xfrm>
+          <a:prstGeom prst="pie">
+            <a:avLst>
+              <a:gd name="adj1" fmla="val 16200000"/>
+              <a:gd name="adj2" fmla="val 5400000"/>
+            </a:avLst>
+          </a:prstGeom>
+          <a:solidFill>
+            <a:srgbClr val="E4572E"/>
+          </a:solidFill>
+          <a:ln/>
+        </p:spPr>
+        <p:txBody>
+          <a:bodyPr/>
+          <a:lstStyle/>
+          <a:p>
+            <a:endParaRPr lang="el-GR"/>
+          </a:p>
+        </p:txBody>
+      </p:sp>
+      <p:sp>
+        <p:nvSpPr>
+          <p:cNvPr id="3" name="Shape 1">
+            <a:extLst>
+              <a:ext uri="{FF2B5EF4-FFF2-40B4-BE49-F238E27FC236}">
+                <a16:creationId xmlns:a16="http://schemas.microsoft.com/office/drawing/2014/main" id="{9A7D94F5-3792-EF2A-5591-58B9C8CCFBA3}"/>
+              </a:ext>
+            </a:extLst>
+          </p:cNvPr>
+          <p:cNvSpPr/>
+          <p:nvPr/>
+        </p:nvSpPr>
+        <p:spPr>
+          <a:xfrm>
+            <a:off x="457200" y="457200"/>
+            <a:ext cx="201168" cy="201168"/>
+          </a:xfrm>
+          <a:prstGeom prst="pie">
+            <a:avLst>
+              <a:gd name="adj1" fmla="val 5400000"/>
+              <a:gd name="adj2" fmla="val 16200000"/>
+            </a:avLst>
+          </a:prstGeom>
+          <a:solidFill>
+            <a:srgbClr val="2F6FED"/>
+          </a:solidFill>
+          <a:ln/>
+        </p:spPr>
+        <p:txBody>
+          <a:bodyPr/>
+          <a:lstStyle/>
+          <a:p>
+            <a:endParaRPr lang="el-GR"/>
+          </a:p>
+        </p:txBody>
+      </p:sp>
+      <p:sp>
+        <p:nvSpPr>
+          <p:cNvPr id="4" name="Text 2">
+            <a:extLst>
+              <a:ext uri="{FF2B5EF4-FFF2-40B4-BE49-F238E27FC236}">
+                <a16:creationId xmlns:a16="http://schemas.microsoft.com/office/drawing/2014/main" id="{4FBF1DF9-CF39-131F-C2DD-D6177304AEF2}"/>
+              </a:ext>
+            </a:extLst>
+          </p:cNvPr>
+          <p:cNvSpPr txBox="1"/>
+          <p:nvPr/>
+        </p:nvSpPr>
+        <p:spPr>
+          <a:xfrm>
+            <a:off x="777240" y="384048"/>
+            <a:ext cx="7315200" cy="320040"/>
+          </a:xfrm>
+          <a:prstGeom prst="rect">
+            <a:avLst/>
+          </a:prstGeom>
+          <a:noFill/>
+          <a:ln/>
+        </p:spPr>
+        <p:txBody>
+          <a:bodyPr wrap="square" lIns="0" tIns="0" rIns="0" bIns="0" rtlCol="0" anchor="ctr"/>
+          <a:lstStyle/>
+          <a:p>
+            <a:pPr marL="0" indent="0">
+              <a:buNone/>
+            </a:pPr>
+            <a:r>
+              <a:rPr lang="en-US" sz="1100" b="1" kern="0" spc="200" dirty="0">
+                <a:solidFill>
+                  <a:srgbClr val="9AA3C7"/>
+                </a:solidFill>
+                <a:latin typeface="Calibri" pitchFamily="34" charset="0"/>
+                <a:ea typeface="Calibri" pitchFamily="34" charset="-122"/>
+                <a:cs typeface="Calibri" pitchFamily="34" charset="-120"/>
+              </a:rPr>
+              <a:t>TAKEAWAYS</a:t>
+            </a:r>
+            <a:endParaRPr lang="en-US" sz="1100" dirty="0"/>
+          </a:p>
+        </p:txBody>
+      </p:sp>
+      <p:sp>
+        <p:nvSpPr>
+          <p:cNvPr id="5" name="Text 3">
+            <a:extLst>
+              <a:ext uri="{FF2B5EF4-FFF2-40B4-BE49-F238E27FC236}">
+                <a16:creationId xmlns:a16="http://schemas.microsoft.com/office/drawing/2014/main" id="{FA694F63-A757-F2A1-3BB2-EAEA0E1F1C66}"/>
+              </a:ext>
+            </a:extLst>
+          </p:cNvPr>
+          <p:cNvSpPr txBox="1"/>
+          <p:nvPr/>
+        </p:nvSpPr>
+        <p:spPr>
+          <a:xfrm>
+            <a:off x="457200" y="713232"/>
+            <a:ext cx="11247120" cy="777240"/>
+          </a:xfrm>
+          <a:prstGeom prst="rect">
+            <a:avLst/>
+          </a:prstGeom>
+          <a:noFill/>
+          <a:ln/>
+        </p:spPr>
+        <p:txBody>
+          <a:bodyPr wrap="square" lIns="0" tIns="0" rIns="0" bIns="0" rtlCol="0" anchor="ctr"/>
+          <a:lstStyle/>
+          <a:p>
+            <a:pPr marL="0" indent="0" algn="ctr">
+              <a:buNone/>
+            </a:pPr>
+            <a:r>
+              <a:rPr lang="en-US" sz="3600" b="1" dirty="0">
+                <a:solidFill>
+                  <a:srgbClr val="FFFFFF"/>
+                </a:solidFill>
+                <a:latin typeface="Cambria" pitchFamily="34" charset="0"/>
+                <a:ea typeface="Cambria" pitchFamily="34" charset="-122"/>
+                <a:cs typeface="Cambria" pitchFamily="34" charset="-120"/>
+              </a:rPr>
+              <a:t>Thanks For Your Time</a:t>
+            </a:r>
+            <a:endParaRPr lang="en-US" sz="3600" dirty="0"/>
+          </a:p>
+        </p:txBody>
+      </p:sp>
+      <p:sp>
+        <p:nvSpPr>
+          <p:cNvPr id="10" name="Text 8">
+            <a:extLst>
+              <a:ext uri="{FF2B5EF4-FFF2-40B4-BE49-F238E27FC236}">
+                <a16:creationId xmlns:a16="http://schemas.microsoft.com/office/drawing/2014/main" id="{3FAED841-E4F6-AD0B-3792-619E69724F8B}"/>
+              </a:ext>
+            </a:extLst>
+          </p:cNvPr>
+          <p:cNvSpPr txBox="1"/>
+          <p:nvPr/>
+        </p:nvSpPr>
+        <p:spPr>
+          <a:xfrm>
+            <a:off x="11521440" y="6473952"/>
+            <a:ext cx="548640" cy="274320"/>
+          </a:xfrm>
+          <a:prstGeom prst="rect">
+            <a:avLst/>
+          </a:prstGeom>
+          <a:noFill/>
+          <a:ln/>
+        </p:spPr>
+        <p:txBody>
+          <a:bodyPr wrap="square" lIns="0" tIns="0" rIns="0" bIns="0" rtlCol="0" anchor="ctr"/>
+          <a:lstStyle/>
+          <a:p>
+            <a:pPr marL="0" indent="0" algn="r">
+              <a:buNone/>
+            </a:pPr>
+            <a:r>
+              <a:rPr lang="en-US" sz="1000" dirty="0">
+                <a:solidFill>
+                  <a:srgbClr val="6B7299"/>
+                </a:solidFill>
+                <a:latin typeface="Calibri" pitchFamily="34" charset="0"/>
+                <a:ea typeface="Calibri" pitchFamily="34" charset="-122"/>
+                <a:cs typeface="Calibri" pitchFamily="34" charset="-120"/>
+              </a:rPr>
+              <a:t>13</a:t>
+            </a:r>
+            <a:endParaRPr lang="en-US" sz="1000" dirty="0"/>
+          </a:p>
+        </p:txBody>
+      </p:sp>
+      <p:pic>
+        <p:nvPicPr>
+          <p:cNvPr id="13" name="Picture 12">
+            <a:extLst>
+              <a:ext uri="{FF2B5EF4-FFF2-40B4-BE49-F238E27FC236}">
+                <a16:creationId xmlns:a16="http://schemas.microsoft.com/office/drawing/2014/main" id="{5438932D-F789-59E9-86B8-6534D772882F}"/>
+              </a:ext>
+            </a:extLst>
+          </p:cNvPr>
+          <p:cNvPicPr>
+            <a:picLocks noChangeAspect="1"/>
+          </p:cNvPicPr>
+          <p:nvPr/>
+        </p:nvPicPr>
+        <p:blipFill>
+          <a:blip r:embed="rId3"/>
+          <a:stretch>
+            <a:fillRect/>
+          </a:stretch>
+        </p:blipFill>
+        <p:spPr>
+          <a:xfrm>
+            <a:off x="1291429" y="2329885"/>
+            <a:ext cx="3277057" cy="3448531"/>
+          </a:xfrm>
+          <a:prstGeom prst="rect">
+            <a:avLst/>
+          </a:prstGeom>
+        </p:spPr>
+      </p:pic>
+      <p:sp>
+        <p:nvSpPr>
+          <p:cNvPr id="15" name="TextBox 14">
+            <a:extLst>
+              <a:ext uri="{FF2B5EF4-FFF2-40B4-BE49-F238E27FC236}">
+                <a16:creationId xmlns:a16="http://schemas.microsoft.com/office/drawing/2014/main" id="{7852D628-175D-0330-C095-602EFC7AA686}"/>
+              </a:ext>
+            </a:extLst>
+          </p:cNvPr>
+          <p:cNvSpPr txBox="1"/>
+          <p:nvPr/>
+        </p:nvSpPr>
+        <p:spPr>
+          <a:xfrm>
+            <a:off x="1805618" y="1580156"/>
+            <a:ext cx="2248678" cy="553998"/>
+          </a:xfrm>
+          <a:prstGeom prst="rect">
+            <a:avLst/>
+          </a:prstGeom>
+          <a:noFill/>
+        </p:spPr>
+        <p:txBody>
+          <a:bodyPr wrap="square" rtlCol="0">
+            <a:spAutoFit/>
+          </a:bodyPr>
+          <a:lstStyle/>
+          <a:p>
+            <a:r>
+              <a:rPr lang="en-US" sz="3000" dirty="0" err="1">
+                <a:solidFill>
+                  <a:schemeClr val="bg2"/>
+                </a:solidFill>
+              </a:rPr>
+              <a:t>Pypi</a:t>
+            </a:r>
+            <a:r>
+              <a:rPr lang="en-US" sz="3000" dirty="0">
+                <a:solidFill>
+                  <a:schemeClr val="bg2"/>
+                </a:solidFill>
+              </a:rPr>
+              <a:t> Package</a:t>
+            </a:r>
+            <a:endParaRPr lang="el-GR" sz="3000" dirty="0">
+              <a:solidFill>
+                <a:schemeClr val="bg2"/>
+              </a:solidFill>
+            </a:endParaRPr>
+          </a:p>
+        </p:txBody>
+      </p:sp>
+      <p:sp>
+        <p:nvSpPr>
+          <p:cNvPr id="17" name="TextBox 16">
+            <a:extLst>
+              <a:ext uri="{FF2B5EF4-FFF2-40B4-BE49-F238E27FC236}">
+                <a16:creationId xmlns:a16="http://schemas.microsoft.com/office/drawing/2014/main" id="{F9F9A7B0-7F5F-F2C3-50C2-C3D849B13450}"/>
+              </a:ext>
+            </a:extLst>
+          </p:cNvPr>
+          <p:cNvSpPr txBox="1"/>
+          <p:nvPr/>
+        </p:nvSpPr>
+        <p:spPr>
+          <a:xfrm>
+            <a:off x="6578082" y="1580156"/>
+            <a:ext cx="3573858" cy="553998"/>
+          </a:xfrm>
+          <a:prstGeom prst="rect">
+            <a:avLst/>
+          </a:prstGeom>
+          <a:noFill/>
+        </p:spPr>
+        <p:txBody>
+          <a:bodyPr wrap="square" rtlCol="0">
+            <a:spAutoFit/>
+          </a:bodyPr>
+          <a:lstStyle/>
+          <a:p>
+            <a:r>
+              <a:rPr lang="en-US" sz="3000" dirty="0" err="1">
+                <a:solidFill>
+                  <a:schemeClr val="bg2"/>
+                </a:solidFill>
+              </a:rPr>
+              <a:t>Github</a:t>
+            </a:r>
+            <a:r>
+              <a:rPr lang="en-US" sz="3000" dirty="0">
+                <a:solidFill>
+                  <a:schemeClr val="bg2"/>
+                </a:solidFill>
+              </a:rPr>
+              <a:t> Repository</a:t>
+            </a:r>
+            <a:endParaRPr lang="el-GR" sz="3000" dirty="0">
+              <a:solidFill>
+                <a:schemeClr val="bg2"/>
+              </a:solidFill>
+            </a:endParaRPr>
+          </a:p>
+        </p:txBody>
+      </p:sp>
+      <p:pic>
+        <p:nvPicPr>
+          <p:cNvPr id="19" name="Picture 18">
+            <a:extLst>
+              <a:ext uri="{FF2B5EF4-FFF2-40B4-BE49-F238E27FC236}">
+                <a16:creationId xmlns:a16="http://schemas.microsoft.com/office/drawing/2014/main" id="{0808FDEA-DBF6-A2F7-F46A-F42D0DD6C492}"/>
+              </a:ext>
+            </a:extLst>
+          </p:cNvPr>
+          <p:cNvPicPr>
+            <a:picLocks noChangeAspect="1"/>
+          </p:cNvPicPr>
+          <p:nvPr/>
+        </p:nvPicPr>
+        <p:blipFill>
+          <a:blip r:embed="rId4"/>
+          <a:stretch>
+            <a:fillRect/>
+          </a:stretch>
+        </p:blipFill>
+        <p:spPr>
+          <a:xfrm>
+            <a:off x="6578082" y="2325856"/>
+            <a:ext cx="3452560" cy="3452560"/>
+          </a:xfrm>
+          <a:prstGeom prst="rect">
+            <a:avLst/>
+          </a:prstGeom>
+        </p:spPr>
+      </p:pic>
+    </p:spTree>
+    <p:extLst>
+      <p:ext uri="{BB962C8B-B14F-4D97-AF65-F5344CB8AC3E}">
+        <p14:creationId xmlns:p14="http://schemas.microsoft.com/office/powerpoint/2010/main" val="3544987491"/>
+      </p:ext>
+    </p:extLst>
   </p:cSld>
   <p:clrMapOvr>
     <a:masterClrMapping/>
@@ -6272,8 +9863,8 @@
         </p:nvSpPr>
         <p:spPr>
           <a:xfrm>
-            <a:off x="777240" y="384048"/>
-            <a:ext cx="7315200" cy="320040"/>
+            <a:off x="777240" y="365760"/>
+            <a:ext cx="8229600" cy="320040"/>
           </a:xfrm>
           <a:prstGeom prst="rect">
             <a:avLst/>
@@ -6289,7 +9880,7 @@
               <a:buNone/>
             </a:pPr>
             <a:r>
-              <a:rPr lang="en-US" sz="1100" b="1" kern="0" spc="200" dirty="0">
+              <a:rPr lang="en-US" sz="1200" b="1" kern="0" spc="200" dirty="0">
                 <a:solidFill>
                   <a:srgbClr val="6B7280"/>
                 </a:solidFill>
@@ -6299,7 +9890,7 @@
               </a:rPr>
               <a:t>MOTIVATION</a:t>
             </a:r>
-            <a:endParaRPr lang="en-US" sz="1100" dirty="0"/>
+            <a:endParaRPr lang="en-US" sz="1200" dirty="0"/>
           </a:p>
         </p:txBody>
       </p:sp>
@@ -6311,8 +9902,8 @@
         </p:nvSpPr>
         <p:spPr>
           <a:xfrm>
-            <a:off x="457200" y="713232"/>
-            <a:ext cx="11247120" cy="777240"/>
+            <a:off x="457200" y="685800"/>
+            <a:ext cx="11247120" cy="868680"/>
           </a:xfrm>
           <a:prstGeom prst="rect">
             <a:avLst/>
@@ -6328,7 +9919,7 @@
               <a:buNone/>
             </a:pPr>
             <a:r>
-              <a:rPr lang="en-US" sz="3000" b="1" dirty="0">
+              <a:rPr lang="en-US" sz="3600" b="1" dirty="0">
                 <a:solidFill>
                   <a:srgbClr val="1B1F3B"/>
                 </a:solidFill>
@@ -6336,54 +9927,27 @@
                 <a:ea typeface="Cambria" pitchFamily="34" charset="-122"/>
                 <a:cs typeface="Cambria" pitchFamily="34" charset="-120"/>
               </a:rPr>
-              <a:t>Disagreement isn't noise — it's polyphony</a:t>
-            </a:r>
-            <a:endParaRPr lang="en-US" sz="3000" dirty="0"/>
-          </a:p>
-        </p:txBody>
-      </p:sp>
-      <p:sp>
-        <p:nvSpPr>
-          <p:cNvPr id="6" name="Shape 4"/>
+              <a:t>Same exchange. Opposite verdicts.</a:t>
+            </a:r>
+            <a:endParaRPr lang="en-US" sz="3600" dirty="0"/>
+          </a:p>
+        </p:txBody>
+      </p:sp>
+      <p:sp>
+        <p:nvSpPr>
+          <p:cNvPr id="7" name="Shape 5"/>
           <p:cNvSpPr/>
           <p:nvPr/>
         </p:nvSpPr>
         <p:spPr>
           <a:xfrm>
-            <a:off x="457200" y="1874520"/>
-            <a:ext cx="5349240" cy="3703320"/>
+            <a:off x="457200" y="1965961"/>
+            <a:ext cx="5349240" cy="1371600"/>
           </a:xfrm>
           <a:prstGeom prst="roundRect">
             <a:avLst>
-              <a:gd name="adj" fmla="val 1975"/>
+              <a:gd name="adj" fmla="val 6667"/>
             </a:avLst>
-          </a:prstGeom>
-          <a:solidFill>
-            <a:srgbClr val="F1F3FA"/>
-          </a:solidFill>
-          <a:ln/>
-        </p:spPr>
-        <p:txBody>
-          <a:bodyPr/>
-          <a:lstStyle/>
-          <a:p>
-            <a:endParaRPr lang="el-GR"/>
-          </a:p>
-        </p:txBody>
-      </p:sp>
-      <p:sp>
-        <p:nvSpPr>
-          <p:cNvPr id="7" name="Shape 5"/>
-          <p:cNvSpPr/>
-          <p:nvPr/>
-        </p:nvSpPr>
-        <p:spPr>
-          <a:xfrm>
-            <a:off x="457200" y="1874520"/>
-            <a:ext cx="5349240" cy="73152"/>
-          </a:xfrm>
-          <a:prstGeom prst="rect">
-            <a:avLst/>
           </a:prstGeom>
           <a:solidFill>
             <a:srgbClr val="E4572E"/>
@@ -6406,8 +9970,8 @@
         </p:nvSpPr>
         <p:spPr>
           <a:xfrm>
-            <a:off x="777240" y="2148840"/>
-            <a:ext cx="4754880" cy="457200"/>
+            <a:off x="457200" y="2148841"/>
+            <a:ext cx="5349240" cy="365760"/>
           </a:xfrm>
           <a:prstGeom prst="rect">
             <a:avLst/>
@@ -6419,34 +9983,102 @@
           <a:bodyPr wrap="square" lIns="0" tIns="0" rIns="0" bIns="0" rtlCol="0" anchor="ctr"/>
           <a:lstStyle/>
           <a:p>
-            <a:pPr marL="0" indent="0">
+            <a:pPr marL="0" indent="0" algn="ctr">
               <a:buNone/>
             </a:pPr>
             <a:r>
-              <a:rPr lang="en-US" sz="1700" b="1" dirty="0">
-                <a:solidFill>
-                  <a:srgbClr val="1B1F3B"/>
+              <a:rPr lang="en-US" sz="1500" b="1" kern="0" spc="150" dirty="0">
+                <a:solidFill>
+                  <a:srgbClr val="FBD9CF"/>
+                </a:solidFill>
+                <a:latin typeface="Calibri" pitchFamily="34" charset="0"/>
+                <a:ea typeface="Calibri" pitchFamily="34" charset="-122"/>
+                <a:cs typeface="Calibri" pitchFamily="34" charset="-120"/>
+              </a:rPr>
+              <a:t>SOME ANNOTATORS SAY</a:t>
+            </a:r>
+            <a:endParaRPr lang="en-US" sz="1500" dirty="0"/>
+          </a:p>
+        </p:txBody>
+      </p:sp>
+      <p:sp>
+        <p:nvSpPr>
+          <p:cNvPr id="9" name="Text 7"/>
+          <p:cNvSpPr txBox="1"/>
+          <p:nvPr/>
+        </p:nvSpPr>
+        <p:spPr>
+          <a:xfrm>
+            <a:off x="457200" y="2468881"/>
+            <a:ext cx="5349240" cy="777240"/>
+          </a:xfrm>
+          <a:prstGeom prst="rect">
+            <a:avLst/>
+          </a:prstGeom>
+          <a:noFill/>
+          <a:ln/>
+        </p:spPr>
+        <p:txBody>
+          <a:bodyPr wrap="square" lIns="0" tIns="0" rIns="0" bIns="0" rtlCol="0" anchor="ctr"/>
+          <a:lstStyle/>
+          <a:p>
+            <a:pPr marL="0" indent="0" algn="ctr">
+              <a:buNone/>
+            </a:pPr>
+            <a:r>
+              <a:rPr lang="en-US" sz="4000" b="1" dirty="0">
+                <a:solidFill>
+                  <a:srgbClr val="FFFFFF"/>
                 </a:solidFill>
                 <a:latin typeface="Cambria" pitchFamily="34" charset="0"/>
                 <a:ea typeface="Cambria" pitchFamily="34" charset="-122"/>
                 <a:cs typeface="Cambria" pitchFamily="34" charset="-120"/>
               </a:rPr>
-              <a:t>The problem</a:t>
-            </a:r>
-            <a:endParaRPr lang="en-US" sz="1700" dirty="0"/>
-          </a:p>
-        </p:txBody>
-      </p:sp>
-      <p:sp>
-        <p:nvSpPr>
-          <p:cNvPr id="9" name="Text 7"/>
+              <a:t>BIASED</a:t>
+            </a:r>
+            <a:endParaRPr lang="en-US" sz="4000" dirty="0"/>
+          </a:p>
+        </p:txBody>
+      </p:sp>
+      <p:sp>
+        <p:nvSpPr>
+          <p:cNvPr id="10" name="Shape 8"/>
+          <p:cNvSpPr/>
+          <p:nvPr/>
+        </p:nvSpPr>
+        <p:spPr>
+          <a:xfrm>
+            <a:off x="6355080" y="1965961"/>
+            <a:ext cx="5394960" cy="1371600"/>
+          </a:xfrm>
+          <a:prstGeom prst="roundRect">
+            <a:avLst>
+              <a:gd name="adj" fmla="val 6667"/>
+            </a:avLst>
+          </a:prstGeom>
+          <a:solidFill>
+            <a:srgbClr val="2F6FED"/>
+          </a:solidFill>
+          <a:ln/>
+        </p:spPr>
+        <p:txBody>
+          <a:bodyPr/>
+          <a:lstStyle/>
+          <a:p>
+            <a:endParaRPr lang="el-GR"/>
+          </a:p>
+        </p:txBody>
+      </p:sp>
+      <p:sp>
+        <p:nvSpPr>
+          <p:cNvPr id="11" name="Text 9"/>
           <p:cNvSpPr txBox="1"/>
           <p:nvPr/>
         </p:nvSpPr>
         <p:spPr>
           <a:xfrm>
-            <a:off x="777240" y="2743200"/>
-            <a:ext cx="4754880" cy="2651760"/>
+            <a:off x="6355080" y="2148841"/>
+            <a:ext cx="5394960" cy="365760"/>
           </a:xfrm>
           <a:prstGeom prst="rect">
             <a:avLst/>
@@ -6458,80 +10090,21 @@
           <a:bodyPr wrap="square" lIns="0" tIns="0" rIns="0" bIns="0" rtlCol="0" anchor="ctr"/>
           <a:lstStyle/>
           <a:p>
-            <a:pPr marL="0" indent="0">
-              <a:lnSpc>
-                <a:spcPct val="125000"/>
-              </a:lnSpc>
+            <a:pPr marL="0" indent="0" algn="ctr">
               <a:buNone/>
             </a:pPr>
             <a:r>
-              <a:rPr lang="en-US" sz="1400" dirty="0">
-                <a:solidFill>
-                  <a:srgbClr val="1B1F3B"/>
+              <a:rPr lang="en-US" sz="1500" b="1" kern="0" spc="150" dirty="0">
+                <a:solidFill>
+                  <a:srgbClr val="CFE0FB"/>
                 </a:solidFill>
                 <a:latin typeface="Calibri" pitchFamily="34" charset="0"/>
                 <a:ea typeface="Calibri" pitchFamily="34" charset="-122"/>
                 <a:cs typeface="Calibri" pitchFamily="34" charset="-120"/>
               </a:rPr>
-              <a:t>Annotators labeling subjective content (toxicity, bias…) often don't just disagree at random — they split into consistent, opposing camps. Standard pipelines collapse this into a single label by majority vote, discarding exactly the signal we want: who disagrees, and why.</a:t>
-            </a:r>
-            <a:endParaRPr lang="en-US" sz="1400" dirty="0"/>
-          </a:p>
-        </p:txBody>
-      </p:sp>
-      <p:sp>
-        <p:nvSpPr>
-          <p:cNvPr id="10" name="Shape 8"/>
-          <p:cNvSpPr/>
-          <p:nvPr/>
-        </p:nvSpPr>
-        <p:spPr>
-          <a:xfrm>
-            <a:off x="6355080" y="1874520"/>
-            <a:ext cx="5394960" cy="3703320"/>
-          </a:xfrm>
-          <a:prstGeom prst="roundRect">
-            <a:avLst>
-              <a:gd name="adj" fmla="val 1975"/>
-            </a:avLst>
-          </a:prstGeom>
-          <a:solidFill>
-            <a:srgbClr val="F1F3FA"/>
-          </a:solidFill>
-          <a:ln/>
-        </p:spPr>
-        <p:txBody>
-          <a:bodyPr/>
-          <a:lstStyle/>
-          <a:p>
-            <a:endParaRPr lang="el-GR"/>
-          </a:p>
-        </p:txBody>
-      </p:sp>
-      <p:sp>
-        <p:nvSpPr>
-          <p:cNvPr id="11" name="Shape 9"/>
-          <p:cNvSpPr/>
-          <p:nvPr/>
-        </p:nvSpPr>
-        <p:spPr>
-          <a:xfrm>
-            <a:off x="6355080" y="1874520"/>
-            <a:ext cx="5394960" cy="73152"/>
-          </a:xfrm>
-          <a:prstGeom prst="rect">
-            <a:avLst/>
-          </a:prstGeom>
-          <a:solidFill>
-            <a:srgbClr val="2F6FED"/>
-          </a:solidFill>
-          <a:ln/>
-        </p:spPr>
-        <p:txBody>
-          <a:bodyPr/>
-          <a:lstStyle/>
-          <a:p>
-            <a:endParaRPr lang="el-GR"/>
+              <a:t>OTHER ANNOTATORS SAY</a:t>
+            </a:r>
+            <a:endParaRPr lang="en-US" sz="1500" dirty="0"/>
           </a:p>
         </p:txBody>
       </p:sp>
@@ -6543,8 +10116,8 @@
         </p:nvSpPr>
         <p:spPr>
           <a:xfrm>
-            <a:off x="6675120" y="2148840"/>
-            <a:ext cx="4846320" cy="457200"/>
+            <a:off x="6355080" y="2468881"/>
+            <a:ext cx="5394960" cy="777240"/>
           </a:xfrm>
           <a:prstGeom prst="rect">
             <a:avLst/>
@@ -6556,21 +10129,21 @@
           <a:bodyPr wrap="square" lIns="0" tIns="0" rIns="0" bIns="0" rtlCol="0" anchor="ctr"/>
           <a:lstStyle/>
           <a:p>
-            <a:pPr marL="0" indent="0">
+            <a:pPr marL="0" indent="0" algn="ctr">
               <a:buNone/>
             </a:pPr>
             <a:r>
-              <a:rPr lang="en-US" sz="1700" b="1" dirty="0">
-                <a:solidFill>
-                  <a:srgbClr val="1B1F3B"/>
+              <a:rPr lang="en-US" sz="4000" b="1" dirty="0">
+                <a:solidFill>
+                  <a:srgbClr val="FFFFFF"/>
                 </a:solidFill>
                 <a:latin typeface="Cambria" pitchFamily="34" charset="0"/>
                 <a:ea typeface="Cambria" pitchFamily="34" charset="-122"/>
                 <a:cs typeface="Cambria" pitchFamily="34" charset="-120"/>
               </a:rPr>
-              <a:t>The motivation</a:t>
-            </a:r>
-            <a:endParaRPr lang="en-US" sz="1700" dirty="0"/>
+              <a:t>NOT BIASED</a:t>
+            </a:r>
+            <a:endParaRPr lang="en-US" sz="4000" dirty="0"/>
           </a:p>
         </p:txBody>
       </p:sp>
@@ -6582,8 +10155,8 @@
         </p:nvSpPr>
         <p:spPr>
           <a:xfrm>
-            <a:off x="6675120" y="2743200"/>
-            <a:ext cx="4846320" cy="2651760"/>
+            <a:off x="457200" y="4114800"/>
+            <a:ext cx="11247120" cy="548640"/>
           </a:xfrm>
           <a:prstGeom prst="rect">
             <a:avLst/>
@@ -6596,24 +10169,21 @@
           <a:lstStyle/>
           <a:p>
             <a:pPr marL="0" indent="0">
-              <a:lnSpc>
-                <a:spcPct val="125000"/>
-              </a:lnSpc>
               <a:buNone/>
             </a:pPr>
             <a:r>
-              <a:rPr lang="en-US" sz="1400" dirty="0">
-                <a:solidFill>
-                  <a:srgbClr val="1B1F3B"/>
+              <a:rPr lang="en-US" sz="2300" b="1" dirty="0">
+                <a:solidFill>
+                  <a:srgbClr val="E4572E"/>
                 </a:solidFill>
                 <a:latin typeface="Calibri" pitchFamily="34" charset="0"/>
                 <a:ea typeface="Calibri" pitchFamily="34" charset="-122"/>
                 <a:cs typeface="Calibri" pitchFamily="34" charset="-120"/>
               </a:rPr>
-              <a:t>Prior work shows annotator traits — gender, politics, race, age — can systematically shape judgments. If opposing camps line up with who the annotators are, that's signal worth surfacing, not noise to average away — but we rarely know which trait, or combination of traits, explains a given split</a:t>
-            </a:r>
-            <a:r>
-              <a:rPr lang="el-GR" sz="1400" dirty="0">
+              <a:t>✗  </a:t>
+            </a:r>
+            <a:r>
+              <a:rPr lang="en-US" sz="2300" dirty="0">
                 <a:solidFill>
                   <a:srgbClr val="1B1F3B"/>
                 </a:solidFill>
@@ -6621,21 +10191,49 @@
                 <a:ea typeface="Calibri" pitchFamily="34" charset="-122"/>
                 <a:cs typeface="Calibri" pitchFamily="34" charset="-120"/>
               </a:rPr>
-              <a:t> </a:t>
-            </a:r>
-            <a:r>
-              <a:rPr lang="en-US" sz="1400" dirty="0">
-                <a:solidFill>
-                  <a:srgbClr val="1B1F3B"/>
+              <a:t>Majority vote buries the split into one label.</a:t>
+            </a:r>
+            <a:endParaRPr lang="en-US" sz="2300" dirty="0"/>
+          </a:p>
+        </p:txBody>
+      </p:sp>
+      <p:sp>
+        <p:nvSpPr>
+          <p:cNvPr id="14" name="Text 12"/>
+          <p:cNvSpPr txBox="1"/>
+          <p:nvPr/>
+        </p:nvSpPr>
+        <p:spPr>
+          <a:xfrm>
+            <a:off x="457200" y="4709160"/>
+            <a:ext cx="11247120" cy="548640"/>
+          </a:xfrm>
+          <a:prstGeom prst="rect">
+            <a:avLst/>
+          </a:prstGeom>
+          <a:noFill/>
+          <a:ln/>
+        </p:spPr>
+        <p:txBody>
+          <a:bodyPr wrap="square" lIns="0" tIns="0" rIns="0" bIns="0" rtlCol="0" anchor="ctr"/>
+          <a:lstStyle/>
+          <a:p>
+            <a:pPr marL="0" indent="0">
+              <a:buNone/>
+            </a:pPr>
+            <a:r>
+              <a:rPr lang="en-US" sz="2300" b="1" dirty="0">
+                <a:solidFill>
+                  <a:srgbClr val="E4572E"/>
                 </a:solidFill>
                 <a:latin typeface="Calibri" pitchFamily="34" charset="0"/>
                 <a:ea typeface="Calibri" pitchFamily="34" charset="-122"/>
                 <a:cs typeface="Calibri" pitchFamily="34" charset="-120"/>
               </a:rPr>
-              <a:t>and by </a:t>
-            </a:r>
-            <a:r>
-              <a:rPr lang="en-US" sz="1400">
+              <a:t>✗  </a:t>
+            </a:r>
+            <a:r>
+              <a:rPr lang="en-US" sz="2300" dirty="0">
                 <a:solidFill>
                   <a:srgbClr val="1B1F3B"/>
                 </a:solidFill>
@@ -6643,32 +10241,33 @@
                 <a:ea typeface="Calibri" pitchFamily="34" charset="-122"/>
                 <a:cs typeface="Calibri" pitchFamily="34" charset="-120"/>
               </a:rPr>
-              <a:t>how much.</a:t>
-            </a:r>
-            <a:endParaRPr lang="en-US" sz="1400" dirty="0"/>
-          </a:p>
-        </p:txBody>
-      </p:sp>
-      <p:sp>
-        <p:nvSpPr>
-          <p:cNvPr id="14" name="Shape 12"/>
+              <a:t>Testing one trait at a time dilutes it away.</a:t>
+            </a:r>
+            <a:endParaRPr lang="en-US" sz="2300" dirty="0"/>
+          </a:p>
+        </p:txBody>
+      </p:sp>
+      <p:sp>
+        <p:nvSpPr>
+          <p:cNvPr id="15" name="Shape 13"/>
           <p:cNvSpPr/>
           <p:nvPr/>
         </p:nvSpPr>
         <p:spPr>
           <a:xfrm>
-            <a:off x="457200" y="5760720"/>
-            <a:ext cx="11292840" cy="685800"/>
-          </a:xfrm>
-          <a:prstGeom prst="roundRect">
-            <a:avLst>
-              <a:gd name="adj" fmla="val 8000"/>
-            </a:avLst>
-          </a:prstGeom>
-          <a:solidFill>
-            <a:srgbClr val="1B1F3B"/>
-          </a:solidFill>
-          <a:ln/>
+            <a:off x="457200" y="5486400"/>
+            <a:ext cx="11247120" cy="0"/>
+          </a:xfrm>
+          <a:prstGeom prst="line">
+            <a:avLst/>
+          </a:prstGeom>
+          <a:noFill/>
+          <a:ln w="12700">
+            <a:solidFill>
+              <a:srgbClr val="DDE1EE"/>
+            </a:solidFill>
+            <a:prstDash val="solid"/>
+          </a:ln>
         </p:spPr>
         <p:txBody>
           <a:bodyPr/>
@@ -6680,14 +10279,14 @@
       </p:sp>
       <p:sp>
         <p:nvSpPr>
-          <p:cNvPr id="15" name="Text 13"/>
+          <p:cNvPr id="16" name="Text 14"/>
           <p:cNvSpPr txBox="1"/>
           <p:nvPr/>
         </p:nvSpPr>
         <p:spPr>
           <a:xfrm>
-            <a:off x="777240" y="5760720"/>
-            <a:ext cx="10652760" cy="685800"/>
+            <a:off x="457200" y="5669280"/>
+            <a:ext cx="11247120" cy="685800"/>
           </a:xfrm>
           <a:prstGeom prst="rect">
             <a:avLst/>
@@ -6699,71 +10298,60 @@
           <a:bodyPr wrap="square" lIns="0" tIns="0" rIns="0" bIns="0" rtlCol="0" anchor="ctr"/>
           <a:lstStyle/>
           <a:p>
-            <a:pPr marL="0" indent="0">
+            <a:pPr marL="0" indent="0" algn="ctr">
               <a:buNone/>
             </a:pPr>
             <a:r>
-              <a:rPr lang="en-US" sz="1350" b="1" dirty="0">
-                <a:solidFill>
-                  <a:srgbClr val="F2B705"/>
+              <a:rPr lang="en-US" sz="3400" b="1" dirty="0">
+                <a:solidFill>
+                  <a:srgbClr val="1B1F3B"/>
+                </a:solidFill>
+                <a:latin typeface="Cambria" pitchFamily="34" charset="0"/>
+                <a:ea typeface="Cambria" pitchFamily="34" charset="-122"/>
+                <a:cs typeface="Cambria" pitchFamily="34" charset="-120"/>
+              </a:rPr>
+              <a:t>So what actually explains it?</a:t>
+            </a:r>
+            <a:endParaRPr lang="en-US" sz="3400" dirty="0"/>
+          </a:p>
+        </p:txBody>
+      </p:sp>
+      <p:sp>
+        <p:nvSpPr>
+          <p:cNvPr id="17" name="Text 15"/>
+          <p:cNvSpPr txBox="1"/>
+          <p:nvPr/>
+        </p:nvSpPr>
+        <p:spPr>
+          <a:xfrm>
+            <a:off x="11521440" y="6473952"/>
+            <a:ext cx="548640" cy="274320"/>
+          </a:xfrm>
+          <a:prstGeom prst="rect">
+            <a:avLst/>
+          </a:prstGeom>
+          <a:noFill/>
+          <a:ln/>
+        </p:spPr>
+        <p:txBody>
+          <a:bodyPr wrap="square" lIns="0" tIns="0" rIns="0" bIns="0" rtlCol="0" anchor="ctr"/>
+          <a:lstStyle/>
+          <a:p>
+            <a:pPr marL="0" indent="0" algn="r">
+              <a:buNone/>
+            </a:pPr>
+            <a:r>
+              <a:rPr lang="en-US" sz="1100" dirty="0">
+                <a:solidFill>
+                  <a:srgbClr val="B7BCD0"/>
                 </a:solidFill>
                 <a:latin typeface="Calibri" pitchFamily="34" charset="0"/>
                 <a:ea typeface="Calibri" pitchFamily="34" charset="-122"/>
                 <a:cs typeface="Calibri" pitchFamily="34" charset="-120"/>
               </a:rPr>
-              <a:t>The open question:  </a:t>
-            </a:r>
-            <a:r>
-              <a:rPr lang="en-US" sz="1350" dirty="0">
-                <a:solidFill>
-                  <a:srgbClr val="FFFFFF"/>
-                </a:solidFill>
-                <a:latin typeface="Calibri" pitchFamily="34" charset="0"/>
-                <a:ea typeface="Calibri" pitchFamily="34" charset="-122"/>
-                <a:cs typeface="Calibri" pitchFamily="34" charset="-120"/>
-              </a:rPr>
-              <a:t>which traits — alone or combined — explain where opinions diverge, and by how much, without guessing in advance?</a:t>
-            </a:r>
-            <a:endParaRPr lang="en-US" sz="1350" dirty="0"/>
-          </a:p>
-        </p:txBody>
-      </p:sp>
-      <p:sp>
-        <p:nvSpPr>
-          <p:cNvPr id="16" name="Text 14"/>
-          <p:cNvSpPr txBox="1"/>
-          <p:nvPr/>
-        </p:nvSpPr>
-        <p:spPr>
-          <a:xfrm>
-            <a:off x="11521440" y="6473952"/>
-            <a:ext cx="548640" cy="274320"/>
-          </a:xfrm>
-          <a:prstGeom prst="rect">
-            <a:avLst/>
-          </a:prstGeom>
-          <a:noFill/>
-          <a:ln/>
-        </p:spPr>
-        <p:txBody>
-          <a:bodyPr wrap="square" lIns="0" tIns="0" rIns="0" bIns="0" rtlCol="0" anchor="ctr"/>
-          <a:lstStyle/>
-          <a:p>
-            <a:pPr marL="0" indent="0" algn="r">
-              <a:buNone/>
-            </a:pPr>
-            <a:r>
-              <a:rPr lang="en-US" sz="1000" dirty="0">
-                <a:solidFill>
-                  <a:srgbClr val="B7BCD0"/>
-                </a:solidFill>
-                <a:latin typeface="Calibri" pitchFamily="34" charset="0"/>
-                <a:ea typeface="Calibri" pitchFamily="34" charset="-122"/>
-                <a:cs typeface="Calibri" pitchFamily="34" charset="-120"/>
-              </a:rPr>
               <a:t>02</a:t>
             </a:r>
-            <a:endParaRPr lang="en-US" sz="1000" dirty="0"/>
+            <a:endParaRPr lang="en-US" sz="1100" dirty="0"/>
           </a:p>
         </p:txBody>
       </p:sp>
@@ -6924,7 +10512,7 @@
               <a:buNone/>
             </a:pPr>
             <a:r>
-              <a:rPr lang="en-US" sz="3000" b="1" dirty="0">
+              <a:rPr lang="en-US" sz="3600" b="1" dirty="0">
                 <a:solidFill>
                   <a:srgbClr val="1B1F3B"/>
                 </a:solidFill>
@@ -6934,7 +10522,7 @@
               </a:rPr>
               <a:t>What is Polarized Trees?</a:t>
             </a:r>
-            <a:endParaRPr lang="en-US" sz="3000" dirty="0"/>
+            <a:endParaRPr lang="en-US" sz="3600" dirty="0"/>
           </a:p>
         </p:txBody>
       </p:sp>
@@ -7014,7 +10602,7 @@
                 <a:ea typeface="Calibri" pitchFamily="34" charset="-122"/>
                 <a:cs typeface="Calibri" pitchFamily="34" charset="-120"/>
               </a:rPr>
-              <a:t>a method that hierarchically and automatically figures out which annotator traits (gender, politics, race, age…) and their intersections explain where people diverge into opposing opinion clusters on the same item, and by how much — without us guessing the traits in advance.</a:t>
+              <a:t>a method that hierarchically and automatically figures out which annotator traits (gender, politics, race, age…) and their intersections explain where people diverge into different opinion clusters on the same item, and by how much — without us guessing the traits in advance.</a:t>
             </a:r>
             <a:endParaRPr lang="en-US" sz="1450" dirty="0"/>
           </a:p>
@@ -7529,7 +11117,7 @@
               <a:buNone/>
             </a:pPr>
             <a:r>
-              <a:rPr lang="en-US" sz="3000" b="1" dirty="0">
+              <a:rPr lang="en-US" sz="3600" b="1" dirty="0">
                 <a:solidFill>
                   <a:srgbClr val="1B1F3B"/>
                 </a:solidFill>
@@ -7537,9 +11125,9 @@
                 <a:ea typeface="Cambria" pitchFamily="34" charset="-122"/>
                 <a:cs typeface="Cambria" pitchFamily="34" charset="-120"/>
               </a:rPr>
-              <a:t>Recursively split annotators along the traits that separate them</a:t>
-            </a:r>
-            <a:endParaRPr lang="en-US" sz="3000" dirty="0"/>
+              <a:t>Split along the traits that divide opinion</a:t>
+            </a:r>
+            <a:endParaRPr lang="en-US" sz="3600" dirty="0"/>
           </a:p>
         </p:txBody>
       </p:sp>
@@ -7830,7 +11418,7 @@
                 <a:ea typeface="Calibri" pitchFamily="34" charset="-122"/>
                 <a:cs typeface="Calibri" pitchFamily="34" charset="-120"/>
               </a:rPr>
-              <a:t>(leaf — civil)</a:t>
+              <a:t>(leaf — toxic)</a:t>
             </a:r>
             <a:endParaRPr lang="en-US" sz="1100" dirty="0"/>
           </a:p>
@@ -8196,7 +11784,7 @@
                 <a:ea typeface="Calibri" pitchFamily="34" charset="-122"/>
                 <a:cs typeface="Calibri" pitchFamily="34" charset="-120"/>
               </a:rPr>
-              <a:t>(leaf — civil)</a:t>
+              <a:t>(leaf — toxic)</a:t>
             </a:r>
             <a:endParaRPr lang="en-US" sz="1100" dirty="0"/>
           </a:p>
@@ -8393,7 +11981,21 @@
                 <a:ea typeface="Calibri" pitchFamily="34" charset="-122"/>
                 <a:cs typeface="Calibri" pitchFamily="34" charset="-120"/>
               </a:rPr>
-              <a:t>left</a:t>
+              <a:t>Left</a:t>
+            </a:r>
+          </a:p>
+          <a:p>
+            <a:pPr algn="ctr"/>
+            <a:r>
+              <a:rPr lang="en-US" sz="1100" dirty="0">
+                <a:solidFill>
+                  <a:srgbClr val="FFFFFF"/>
+                </a:solidFill>
+                <a:latin typeface="Calibri" pitchFamily="34" charset="0"/>
+                <a:ea typeface="Calibri" pitchFamily="34" charset="-122"/>
+                <a:cs typeface="Calibri" pitchFamily="34" charset="-120"/>
+              </a:rPr>
+              <a:t>(leaf — civil)</a:t>
             </a:r>
             <a:endParaRPr lang="en-US" sz="1100" dirty="0"/>
           </a:p>
@@ -8461,7 +12063,21 @@
                 <a:ea typeface="Calibri" pitchFamily="34" charset="-122"/>
                 <a:cs typeface="Calibri" pitchFamily="34" charset="-120"/>
               </a:rPr>
-              <a:t>center</a:t>
+              <a:t>Center</a:t>
+            </a:r>
+          </a:p>
+          <a:p>
+            <a:pPr algn="ctr"/>
+            <a:r>
+              <a:rPr lang="en-US" sz="1100" dirty="0">
+                <a:solidFill>
+                  <a:srgbClr val="FFFFFF"/>
+                </a:solidFill>
+                <a:latin typeface="Calibri" pitchFamily="34" charset="0"/>
+                <a:ea typeface="Calibri" pitchFamily="34" charset="-122"/>
+                <a:cs typeface="Calibri" pitchFamily="34" charset="-120"/>
+              </a:rPr>
+              <a:t>(leaf — civil)</a:t>
             </a:r>
             <a:endParaRPr lang="en-US" sz="1100" dirty="0"/>
           </a:p>
@@ -8531,7 +12147,21 @@
                 <a:ea typeface="Calibri" pitchFamily="34" charset="-122"/>
                 <a:cs typeface="Calibri" pitchFamily="34" charset="-120"/>
               </a:rPr>
-              <a:t>right</a:t>
+              <a:t>Right</a:t>
+            </a:r>
+          </a:p>
+          <a:p>
+            <a:pPr algn="ctr"/>
+            <a:r>
+              <a:rPr lang="en-US" sz="1100" dirty="0">
+                <a:solidFill>
+                  <a:srgbClr val="FFFFFF"/>
+                </a:solidFill>
+                <a:latin typeface="Calibri" pitchFamily="34" charset="0"/>
+                <a:ea typeface="Calibri" pitchFamily="34" charset="-122"/>
+                <a:cs typeface="Calibri" pitchFamily="34" charset="-120"/>
+              </a:rPr>
+              <a:t>(leaf — toxic)</a:t>
             </a:r>
             <a:endParaRPr lang="en-US" sz="1100" dirty="0"/>
           </a:p>
@@ -8625,7 +12255,7 @@
 
 <file path=ppt/slides/slide5.xml><?xml version="1.0" encoding="utf-8"?>
 <p:sld xmlns:a="http://schemas.openxmlformats.org/drawingml/2006/main" xmlns:r="http://schemas.openxmlformats.org/officeDocument/2006/relationships" xmlns:p="http://schemas.openxmlformats.org/presentationml/2006/main">
-  <p:cSld name="Slide 3">
+  <p:cSld name="Slide 2">
     <p:bg>
       <p:bgPr>
         <a:solidFill>
@@ -8716,8 +12346,8 @@
         </p:nvSpPr>
         <p:spPr>
           <a:xfrm>
-            <a:off x="777240" y="384048"/>
-            <a:ext cx="7315200" cy="320040"/>
+            <a:off x="777240" y="365760"/>
+            <a:ext cx="8229600" cy="320040"/>
           </a:xfrm>
           <a:prstGeom prst="rect">
             <a:avLst/>
@@ -8733,7 +12363,7 @@
               <a:buNone/>
             </a:pPr>
             <a:r>
-              <a:rPr lang="en-US" sz="1100" b="1" kern="0" spc="200" dirty="0">
+              <a:rPr lang="en-US" sz="1200" b="1" kern="0" spc="200" dirty="0">
                 <a:solidFill>
                   <a:srgbClr val="6B7280"/>
                 </a:solidFill>
@@ -8743,7 +12373,7 @@
               </a:rPr>
               <a:t>RELATED WORK</a:t>
             </a:r>
-            <a:endParaRPr lang="en-US" sz="1100" dirty="0"/>
+            <a:endParaRPr lang="en-US" sz="1200" dirty="0"/>
           </a:p>
         </p:txBody>
       </p:sp>
@@ -8755,8 +12385,8 @@
         </p:nvSpPr>
         <p:spPr>
           <a:xfrm>
-            <a:off x="457200" y="713232"/>
-            <a:ext cx="11247120" cy="777240"/>
+            <a:off x="457200" y="685800"/>
+            <a:ext cx="11247120" cy="868680"/>
           </a:xfrm>
           <a:prstGeom prst="rect">
             <a:avLst/>
@@ -8772,7 +12402,7 @@
               <a:buNone/>
             </a:pPr>
             <a:r>
-              <a:rPr lang="en-US" sz="3000" b="1" dirty="0">
+              <a:rPr lang="en-US" sz="3600" b="1" dirty="0">
                 <a:solidFill>
                   <a:srgbClr val="1B1F3B"/>
                 </a:solidFill>
@@ -8780,9 +12410,9 @@
                 <a:ea typeface="Cambria" pitchFamily="34" charset="-122"/>
                 <a:cs typeface="Cambria" pitchFamily="34" charset="-120"/>
               </a:rPr>
-              <a:t>Prior methods need a hypothesis first</a:t>
-            </a:r>
-            <a:endParaRPr lang="en-US" sz="3000" dirty="0"/>
+              <a:t>Exactly why previous methods falls short</a:t>
+            </a:r>
+            <a:endParaRPr lang="en-US" sz="3600" dirty="0"/>
           </a:p>
         </p:txBody>
       </p:sp>
@@ -8794,12 +12424,12 @@
         </p:nvSpPr>
         <p:spPr>
           <a:xfrm>
-            <a:off x="457200" y="1874520"/>
-            <a:ext cx="5349240" cy="4023360"/>
+            <a:off x="457200" y="1783080"/>
+            <a:ext cx="5349240" cy="3291840"/>
           </a:xfrm>
           <a:prstGeom prst="roundRect">
             <a:avLst>
-              <a:gd name="adj" fmla="val 1818"/>
+              <a:gd name="adj" fmla="val 2222"/>
             </a:avLst>
           </a:prstGeom>
           <a:solidFill>
@@ -8823,8 +12453,8 @@
         </p:nvSpPr>
         <p:spPr>
           <a:xfrm>
-            <a:off x="777240" y="2103120"/>
-            <a:ext cx="4754880" cy="457200"/>
+            <a:off x="777240" y="2011680"/>
+            <a:ext cx="4754880" cy="502920"/>
           </a:xfrm>
           <a:prstGeom prst="rect">
             <a:avLst/>
@@ -8836,11 +12466,11 @@
           <a:bodyPr wrap="square" lIns="0" tIns="0" rIns="0" bIns="0" rtlCol="0" anchor="ctr"/>
           <a:lstStyle/>
           <a:p>
-            <a:pPr marL="0" indent="0" algn="ctr">
+            <a:pPr marL="0" indent="0">
               <a:buNone/>
             </a:pPr>
             <a:r>
-              <a:rPr lang="en-US" sz="1600" b="1" dirty="0">
+              <a:rPr lang="en-US" sz="2100" b="1" dirty="0">
                 <a:solidFill>
                   <a:srgbClr val="1B1F3B"/>
                 </a:solidFill>
@@ -8848,9 +12478,9 @@
                 <a:ea typeface="Cambria" pitchFamily="34" charset="-122"/>
                 <a:cs typeface="Cambria" pitchFamily="34" charset="-120"/>
               </a:rPr>
-              <a:t>Prior Methods</a:t>
-            </a:r>
-            <a:endParaRPr lang="en-US" sz="1600" dirty="0"/>
+              <a:t>Prior methods</a:t>
+            </a:r>
+            <a:endParaRPr lang="en-US" sz="2100" dirty="0"/>
           </a:p>
         </p:txBody>
       </p:sp>
@@ -8862,8 +12492,8 @@
         </p:nvSpPr>
         <p:spPr>
           <a:xfrm>
-            <a:off x="777240" y="2697480"/>
-            <a:ext cx="4754880" cy="3017520"/>
+            <a:off x="777240" y="2651760"/>
+            <a:ext cx="4846320" cy="2286000"/>
           </a:xfrm>
           <a:prstGeom prst="rect">
             <a:avLst/>
@@ -8877,13 +12507,13 @@
           <a:p>
             <a:pPr marL="342900" indent="-342900">
               <a:spcAft>
-                <a:spcPts val="1000"/>
+                <a:spcPts val="1800"/>
               </a:spcAft>
               <a:buSzPct val="100000"/>
               <a:buChar char="✗"/>
             </a:pPr>
             <a:r>
-              <a:rPr lang="en-US" sz="1350" dirty="0">
+              <a:rPr lang="en-US" sz="2100" dirty="0">
                 <a:solidFill>
                   <a:srgbClr val="1B1F3B"/>
                 </a:solidFill>
@@ -8891,20 +12521,20 @@
                 <a:ea typeface="Calibri" pitchFamily="34" charset="-122"/>
                 <a:cs typeface="Calibri" pitchFamily="34" charset="-120"/>
               </a:rPr>
-              <a:t>Partitions annotators along specified Socio-Demographic dimensions </a:t>
-            </a:r>
-            <a:endParaRPr lang="en-US" sz="1350" dirty="0"/>
+              <a:t>Combinations are not interpreted</a:t>
+            </a:r>
+            <a:endParaRPr lang="en-US" sz="2100" dirty="0"/>
           </a:p>
           <a:p>
             <a:pPr marL="342900" indent="-342900">
               <a:spcAft>
-                <a:spcPts val="1000"/>
+                <a:spcPts val="1800"/>
               </a:spcAft>
               <a:buSzPct val="100000"/>
               <a:buChar char="✗"/>
             </a:pPr>
             <a:r>
-              <a:rPr lang="en-US" sz="1350" dirty="0">
+              <a:rPr lang="en-US" sz="2100" dirty="0">
                 <a:solidFill>
                   <a:srgbClr val="1B1F3B"/>
                 </a:solidFill>
@@ -8912,20 +12542,20 @@
                 <a:ea typeface="Calibri" pitchFamily="34" charset="-122"/>
                 <a:cs typeface="Calibri" pitchFamily="34" charset="-120"/>
               </a:rPr>
-              <a:t>Compares subgroup polarization vs. the global distribution</a:t>
-            </a:r>
-            <a:endParaRPr lang="en-US" sz="1350" dirty="0"/>
+              <a:t>Not quantified, binary decision</a:t>
+            </a:r>
+            <a:endParaRPr lang="en-US" sz="2100" dirty="0"/>
           </a:p>
           <a:p>
             <a:pPr marL="342900" indent="-342900">
               <a:spcAft>
-                <a:spcPts val="1000"/>
+                <a:spcPts val="1800"/>
               </a:spcAft>
               <a:buSzPct val="100000"/>
               <a:buChar char="✗"/>
             </a:pPr>
             <a:r>
-              <a:rPr lang="en-US" sz="1350" dirty="0">
+              <a:rPr lang="en-US" sz="2100" dirty="0">
                 <a:solidFill>
                   <a:srgbClr val="1B1F3B"/>
                 </a:solidFill>
@@ -8933,131 +12563,131 @@
                 <a:ea typeface="Calibri" pitchFamily="34" charset="-122"/>
                 <a:cs typeface="Calibri" pitchFamily="34" charset="-120"/>
               </a:rPr>
-              <a:t>Gives a binary verdict: does this dimension explain the polarization?</a:t>
-            </a:r>
-            <a:endParaRPr lang="en-US" sz="1350" dirty="0"/>
-          </a:p>
+              <a:t>Need for predefined hypothesis</a:t>
+            </a:r>
+            <a:endParaRPr lang="en-US" sz="2100" dirty="0"/>
+          </a:p>
+        </p:txBody>
+      </p:sp>
+      <p:sp>
+        <p:nvSpPr>
+          <p:cNvPr id="9" name="Shape 7"/>
+          <p:cNvSpPr/>
+          <p:nvPr/>
+        </p:nvSpPr>
+        <p:spPr>
+          <a:xfrm>
+            <a:off x="6355080" y="1783080"/>
+            <a:ext cx="5394960" cy="3291840"/>
+          </a:xfrm>
+          <a:prstGeom prst="roundRect">
+            <a:avLst>
+              <a:gd name="adj" fmla="val 2222"/>
+            </a:avLst>
+          </a:prstGeom>
+          <a:solidFill>
+            <a:srgbClr val="1B1F3B"/>
+          </a:solidFill>
+          <a:ln/>
+        </p:spPr>
+        <p:txBody>
+          <a:bodyPr/>
+          <a:lstStyle/>
+          <a:p>
+            <a:endParaRPr lang="el-GR"/>
+          </a:p>
+        </p:txBody>
+      </p:sp>
+      <p:sp>
+        <p:nvSpPr>
+          <p:cNvPr id="10" name="Text 8"/>
+          <p:cNvSpPr txBox="1"/>
+          <p:nvPr/>
+        </p:nvSpPr>
+        <p:spPr>
+          <a:xfrm>
+            <a:off x="6675120" y="2011680"/>
+            <a:ext cx="4846320" cy="502920"/>
+          </a:xfrm>
+          <a:prstGeom prst="rect">
+            <a:avLst/>
+          </a:prstGeom>
+          <a:noFill/>
+          <a:ln/>
+        </p:spPr>
+        <p:txBody>
+          <a:bodyPr wrap="square" lIns="0" tIns="0" rIns="0" bIns="0" rtlCol="0" anchor="ctr"/>
+          <a:lstStyle/>
+          <a:p>
+            <a:pPr marL="0" indent="0">
+              <a:buNone/>
+            </a:pPr>
+            <a:r>
+              <a:rPr lang="en-US" sz="2100" b="1" dirty="0">
+                <a:solidFill>
+                  <a:srgbClr val="FFFFFF"/>
+                </a:solidFill>
+                <a:latin typeface="Cambria" pitchFamily="34" charset="0"/>
+                <a:ea typeface="Cambria" pitchFamily="34" charset="-122"/>
+                <a:cs typeface="Cambria" pitchFamily="34" charset="-120"/>
+              </a:rPr>
+              <a:t>Polarized Trees</a:t>
+            </a:r>
+            <a:endParaRPr lang="en-US" sz="2100" dirty="0"/>
+          </a:p>
+        </p:txBody>
+      </p:sp>
+      <p:sp>
+        <p:nvSpPr>
+          <p:cNvPr id="11" name="Text 9"/>
+          <p:cNvSpPr txBox="1"/>
+          <p:nvPr/>
+        </p:nvSpPr>
+        <p:spPr>
+          <a:xfrm>
+            <a:off x="6675120" y="2651760"/>
+            <a:ext cx="4937760" cy="2286000"/>
+          </a:xfrm>
+          <a:prstGeom prst="rect">
+            <a:avLst/>
+          </a:prstGeom>
+          <a:noFill/>
+          <a:ln/>
+        </p:spPr>
+        <p:txBody>
+          <a:bodyPr wrap="square" lIns="0" tIns="0" rIns="0" bIns="0" rtlCol="0" anchor="ctr"/>
+          <a:lstStyle/>
           <a:p>
             <a:pPr marL="342900" indent="-342900">
               <a:spcAft>
-                <a:spcPts val="1000"/>
+                <a:spcPts val="1800"/>
               </a:spcAft>
               <a:buSzPct val="100000"/>
-              <a:buChar char="✗"/>
-            </a:pPr>
-            <a:r>
-              <a:rPr lang="en-US" sz="1350" dirty="0">
-                <a:solidFill>
-                  <a:srgbClr val="1B1F3B"/>
+              <a:buChar char="✓"/>
+            </a:pPr>
+            <a:r>
+              <a:rPr lang="en-US" sz="2100" dirty="0">
+                <a:solidFill>
+                  <a:srgbClr val="FFFFFF"/>
                 </a:solidFill>
                 <a:latin typeface="Calibri" pitchFamily="34" charset="0"/>
                 <a:ea typeface="Calibri" pitchFamily="34" charset="-122"/>
                 <a:cs typeface="Calibri" pitchFamily="34" charset="-120"/>
               </a:rPr>
-              <a:t>Cannot rank dimensions, or reveal how several combine</a:t>
-            </a:r>
-            <a:endParaRPr lang="en-US" sz="1350" dirty="0"/>
-          </a:p>
-        </p:txBody>
-      </p:sp>
-      <p:sp>
-        <p:nvSpPr>
-          <p:cNvPr id="9" name="Shape 7"/>
-          <p:cNvSpPr/>
-          <p:nvPr/>
-        </p:nvSpPr>
-        <p:spPr>
-          <a:xfrm>
-            <a:off x="6355080" y="1874520"/>
-            <a:ext cx="5394960" cy="4023360"/>
-          </a:xfrm>
-          <a:prstGeom prst="roundRect">
-            <a:avLst>
-              <a:gd name="adj" fmla="val 1818"/>
-            </a:avLst>
-          </a:prstGeom>
-          <a:solidFill>
-            <a:srgbClr val="1B1F3B"/>
-          </a:solidFill>
-          <a:ln/>
-        </p:spPr>
-        <p:txBody>
-          <a:bodyPr/>
-          <a:lstStyle/>
-          <a:p>
-            <a:endParaRPr lang="el-GR"/>
-          </a:p>
-        </p:txBody>
-      </p:sp>
-      <p:sp>
-        <p:nvSpPr>
-          <p:cNvPr id="10" name="Text 8"/>
-          <p:cNvSpPr txBox="1"/>
-          <p:nvPr/>
-        </p:nvSpPr>
-        <p:spPr>
-          <a:xfrm>
-            <a:off x="6675120" y="2103120"/>
-            <a:ext cx="4754880" cy="457200"/>
-          </a:xfrm>
-          <a:prstGeom prst="rect">
-            <a:avLst/>
-          </a:prstGeom>
-          <a:noFill/>
-          <a:ln/>
-        </p:spPr>
-        <p:txBody>
-          <a:bodyPr wrap="square" lIns="0" tIns="0" rIns="0" bIns="0" rtlCol="0" anchor="ctr"/>
-          <a:lstStyle/>
-          <a:p>
-            <a:pPr marL="0" indent="0" algn="ctr">
-              <a:buNone/>
-            </a:pPr>
-            <a:r>
-              <a:rPr lang="en-US" sz="1600" b="1" dirty="0">
-                <a:solidFill>
-                  <a:srgbClr val="FFFFFF"/>
-                </a:solidFill>
-                <a:latin typeface="Cambria" pitchFamily="34" charset="0"/>
-                <a:ea typeface="Cambria" pitchFamily="34" charset="-122"/>
-                <a:cs typeface="Cambria" pitchFamily="34" charset="-120"/>
-              </a:rPr>
-              <a:t>Polarized Trees (our work)</a:t>
-            </a:r>
-            <a:endParaRPr lang="en-US" sz="1600" dirty="0"/>
-          </a:p>
-        </p:txBody>
-      </p:sp>
-      <p:sp>
-        <p:nvSpPr>
-          <p:cNvPr id="11" name="Text 9"/>
-          <p:cNvSpPr txBox="1"/>
-          <p:nvPr/>
-        </p:nvSpPr>
-        <p:spPr>
-          <a:xfrm>
-            <a:off x="6675120" y="2697480"/>
-            <a:ext cx="4846320" cy="3017520"/>
-          </a:xfrm>
-          <a:prstGeom prst="rect">
-            <a:avLst/>
-          </a:prstGeom>
-          <a:noFill/>
-          <a:ln/>
-        </p:spPr>
-        <p:txBody>
-          <a:bodyPr wrap="square" lIns="0" tIns="0" rIns="0" bIns="0" rtlCol="0" anchor="ctr"/>
-          <a:lstStyle/>
+              <a:t>Searches every available trait at every step</a:t>
+            </a:r>
+            <a:endParaRPr lang="en-US" sz="2100" dirty="0"/>
+          </a:p>
           <a:p>
             <a:pPr marL="342900" indent="-342900">
               <a:spcAft>
-                <a:spcPts val="1000"/>
+                <a:spcPts val="1800"/>
               </a:spcAft>
               <a:buSzPct val="100000"/>
               <a:buChar char="✓"/>
             </a:pPr>
             <a:r>
-              <a:rPr lang="en-US" sz="1350" dirty="0">
+              <a:rPr lang="en-US" sz="2100" dirty="0">
                 <a:solidFill>
                   <a:srgbClr val="FFFFFF"/>
                 </a:solidFill>
@@ -9065,20 +12695,42 @@
                 <a:ea typeface="Calibri" pitchFamily="34" charset="-122"/>
                 <a:cs typeface="Calibri" pitchFamily="34" charset="-120"/>
               </a:rPr>
-              <a:t>Searches ALL dimensions at every step — no hypothesis required</a:t>
-            </a:r>
-            <a:endParaRPr lang="en-US" sz="1350" dirty="0"/>
+              <a:t>Follows the trait that explains/</a:t>
+            </a:r>
+            <a:r>
+              <a:rPr lang="en-US" sz="2100" dirty="0" err="1">
+                <a:solidFill>
+                  <a:srgbClr val="FFFFFF"/>
+                </a:solidFill>
+                <a:latin typeface="Calibri" pitchFamily="34" charset="0"/>
+                <a:ea typeface="Calibri" pitchFamily="34" charset="-122"/>
+                <a:cs typeface="Calibri" pitchFamily="34" charset="-120"/>
+              </a:rPr>
+              <a:t>seperates</a:t>
+            </a:r>
+            <a:r>
+              <a:rPr lang="en-US" sz="2100" dirty="0">
+                <a:solidFill>
+                  <a:srgbClr val="FFFFFF"/>
+                </a:solidFill>
+                <a:latin typeface="Calibri" pitchFamily="34" charset="0"/>
+                <a:ea typeface="Calibri" pitchFamily="34" charset="-122"/>
+                <a:cs typeface="Calibri" pitchFamily="34" charset="-120"/>
+              </a:rPr>
+              <a:t> the most</a:t>
+            </a:r>
+            <a:endParaRPr lang="en-US" sz="2100" dirty="0"/>
           </a:p>
           <a:p>
             <a:pPr marL="342900" indent="-342900">
               <a:spcAft>
-                <a:spcPts val="1000"/>
+                <a:spcPts val="1800"/>
               </a:spcAft>
               <a:buSzPct val="100000"/>
               <a:buChar char="✓"/>
             </a:pPr>
             <a:r>
-              <a:rPr lang="en-US" sz="1350" dirty="0">
+              <a:rPr lang="en-US" sz="2100" dirty="0">
                 <a:solidFill>
                   <a:srgbClr val="FFFFFF"/>
                 </a:solidFill>
@@ -9086,89 +12738,116 @@
                 <a:ea typeface="Calibri" pitchFamily="34" charset="-122"/>
                 <a:cs typeface="Calibri" pitchFamily="34" charset="-120"/>
               </a:rPr>
-              <a:t>Recursively conditions on the dimension that best explains remaining polarization</a:t>
-            </a:r>
-            <a:endParaRPr lang="en-US" sz="1350" dirty="0"/>
-          </a:p>
-          <a:p>
-            <a:pPr marL="342900" indent="-342900">
-              <a:spcAft>
-                <a:spcPts val="1000"/>
-              </a:spcAft>
-              <a:buSzPct val="100000"/>
-              <a:buChar char="✓"/>
-            </a:pPr>
-            <a:r>
-              <a:rPr lang="en-US" sz="1350" dirty="0">
-                <a:solidFill>
-                  <a:srgbClr val="FFFFFF"/>
+              <a:t>Reveals and quantifies the combinations</a:t>
+            </a:r>
+            <a:endParaRPr lang="en-US" sz="2100" dirty="0"/>
+          </a:p>
+        </p:txBody>
+      </p:sp>
+      <p:sp>
+        <p:nvSpPr>
+          <p:cNvPr id="12" name="Shape 10"/>
+          <p:cNvSpPr/>
+          <p:nvPr/>
+        </p:nvSpPr>
+        <p:spPr>
+          <a:xfrm>
+            <a:off x="457200" y="5349240"/>
+            <a:ext cx="11292840" cy="914400"/>
+          </a:xfrm>
+          <a:prstGeom prst="roundRect">
+            <a:avLst>
+              <a:gd name="adj" fmla="val 6000"/>
+            </a:avLst>
+          </a:prstGeom>
+          <a:solidFill>
+            <a:srgbClr val="F1F3FA"/>
+          </a:solidFill>
+          <a:ln/>
+        </p:spPr>
+        <p:txBody>
+          <a:bodyPr/>
+          <a:lstStyle/>
+          <a:p>
+            <a:endParaRPr lang="el-GR"/>
+          </a:p>
+        </p:txBody>
+      </p:sp>
+      <p:sp>
+        <p:nvSpPr>
+          <p:cNvPr id="13" name="Text 11"/>
+          <p:cNvSpPr txBox="1"/>
+          <p:nvPr/>
+        </p:nvSpPr>
+        <p:spPr>
+          <a:xfrm>
+            <a:off x="777240" y="5349240"/>
+            <a:ext cx="10698480" cy="914400"/>
+          </a:xfrm>
+          <a:prstGeom prst="rect">
+            <a:avLst/>
+          </a:prstGeom>
+          <a:noFill/>
+          <a:ln/>
+        </p:spPr>
+        <p:txBody>
+          <a:bodyPr wrap="square" lIns="0" tIns="0" rIns="0" bIns="0" rtlCol="0" anchor="ctr"/>
+          <a:lstStyle/>
+          <a:p>
+            <a:pPr marL="0" indent="0">
+              <a:buNone/>
+            </a:pPr>
+            <a:r>
+              <a:rPr lang="en-US" sz="1900" i="1" dirty="0">
+                <a:solidFill>
+                  <a:srgbClr val="1B1F3B"/>
                 </a:solidFill>
                 <a:latin typeface="Calibri" pitchFamily="34" charset="0"/>
                 <a:ea typeface="Calibri" pitchFamily="34" charset="-122"/>
                 <a:cs typeface="Calibri" pitchFamily="34" charset="-120"/>
               </a:rPr>
-              <a:t>Motivates multidimensional intersections (e.g. left-leaning AND male)</a:t>
-            </a:r>
-            <a:endParaRPr lang="en-US" sz="1350" dirty="0"/>
-          </a:p>
-          <a:p>
-            <a:pPr marL="342900" indent="-342900">
-              <a:spcAft>
-                <a:spcPts val="1000"/>
-              </a:spcAft>
-              <a:buSzPct val="100000"/>
-              <a:buChar char="✓"/>
-            </a:pPr>
-            <a:r>
-              <a:rPr lang="en-US" sz="1350" dirty="0">
-                <a:solidFill>
-                  <a:srgbClr val="FFFFFF"/>
+              <a:t>Example: Testing the gender dimension alone on the above exchange would have missed most  of the info.</a:t>
+            </a:r>
+            <a:endParaRPr lang="en-US" sz="1900" dirty="0"/>
+          </a:p>
+        </p:txBody>
+      </p:sp>
+      <p:sp>
+        <p:nvSpPr>
+          <p:cNvPr id="14" name="Text 12"/>
+          <p:cNvSpPr txBox="1"/>
+          <p:nvPr/>
+        </p:nvSpPr>
+        <p:spPr>
+          <a:xfrm>
+            <a:off x="11521440" y="6473952"/>
+            <a:ext cx="548640" cy="274320"/>
+          </a:xfrm>
+          <a:prstGeom prst="rect">
+            <a:avLst/>
+          </a:prstGeom>
+          <a:noFill/>
+          <a:ln/>
+        </p:spPr>
+        <p:txBody>
+          <a:bodyPr wrap="square" lIns="0" tIns="0" rIns="0" bIns="0" rtlCol="0" anchor="ctr"/>
+          <a:lstStyle/>
+          <a:p>
+            <a:pPr marL="0" indent="0" algn="r">
+              <a:buNone/>
+            </a:pPr>
+            <a:r>
+              <a:rPr lang="en-US" sz="1100" dirty="0">
+                <a:solidFill>
+                  <a:srgbClr val="B7BCD0"/>
                 </a:solidFill>
                 <a:latin typeface="Calibri" pitchFamily="34" charset="0"/>
                 <a:ea typeface="Calibri" pitchFamily="34" charset="-122"/>
                 <a:cs typeface="Calibri" pitchFamily="34" charset="-120"/>
               </a:rPr>
-              <a:t>Quantifies each split's contribution and provides interpretable results</a:t>
-            </a:r>
-          </a:p>
-        </p:txBody>
-      </p:sp>
-      <p:sp>
-        <p:nvSpPr>
-          <p:cNvPr id="12" name="Text 10"/>
-          <p:cNvSpPr txBox="1"/>
-          <p:nvPr/>
-        </p:nvSpPr>
-        <p:spPr>
-          <a:xfrm>
-            <a:off x="11521440" y="6473952"/>
-            <a:ext cx="548640" cy="274320"/>
-          </a:xfrm>
-          <a:prstGeom prst="rect">
-            <a:avLst/>
-          </a:prstGeom>
-          <a:noFill/>
-          <a:ln/>
-        </p:spPr>
-        <p:txBody>
-          <a:bodyPr wrap="square" lIns="0" tIns="0" rIns="0" bIns="0" rtlCol="0" anchor="ctr"/>
-          <a:lstStyle/>
-          <a:p>
-            <a:pPr marL="0" indent="0" algn="r">
-              <a:buNone/>
-            </a:pPr>
-            <a:r>
-              <a:rPr lang="en-US" sz="1000" dirty="0">
-                <a:solidFill>
-                  <a:srgbClr val="B7BCD0"/>
-                </a:solidFill>
-                <a:latin typeface="Calibri" pitchFamily="34" charset="0"/>
-                <a:ea typeface="Calibri" pitchFamily="34" charset="-122"/>
-                <a:cs typeface="Calibri" pitchFamily="34" charset="-120"/>
-              </a:rPr>
-              <a:t>03</a:t>
-            </a:r>
-            <a:endParaRPr lang="en-US" sz="1000" dirty="0"/>
+              <a:t>05</a:t>
+            </a:r>
+            <a:endParaRPr lang="en-US" sz="1100" dirty="0"/>
           </a:p>
         </p:txBody>
       </p:sp>
@@ -9329,7 +13008,7 @@
               <a:buNone/>
             </a:pPr>
             <a:r>
-              <a:rPr lang="en-US" sz="3000" b="1" dirty="0">
+              <a:rPr lang="en-US" sz="3600" b="1" dirty="0">
                 <a:solidFill>
                   <a:srgbClr val="1B1F3B"/>
                 </a:solidFill>
@@ -9339,7 +13018,7 @@
               </a:rPr>
               <a:t>Four stages, run per text</a:t>
             </a:r>
-            <a:endParaRPr lang="en-US" sz="3000" dirty="0"/>
+            <a:endParaRPr lang="en-US" sz="3600" dirty="0"/>
           </a:p>
         </p:txBody>
       </p:sp>
@@ -9397,7 +13076,7 @@
               <a:buNone/>
             </a:pPr>
             <a:r>
-              <a:rPr lang="en-US" sz="3000" b="1" dirty="0">
+              <a:rPr lang="en-US" sz="3600" b="1" dirty="0">
                 <a:solidFill>
                   <a:srgbClr val="4A5187"/>
                 </a:solidFill>
@@ -9407,7 +13086,7 @@
               </a:rPr>
               <a:t>01</a:t>
             </a:r>
-            <a:endParaRPr lang="en-US" sz="3000" dirty="0"/>
+            <a:endParaRPr lang="en-US" sz="3600" dirty="0"/>
           </a:p>
         </p:txBody>
       </p:sp>
@@ -9576,7 +13255,7 @@
               <a:buNone/>
             </a:pPr>
             <a:r>
-              <a:rPr lang="en-US" sz="3000" b="1" dirty="0">
+              <a:rPr lang="en-US" sz="3600" b="1" dirty="0">
                 <a:solidFill>
                   <a:srgbClr val="C7CCE0"/>
                 </a:solidFill>
@@ -9586,7 +13265,7 @@
               </a:rPr>
               <a:t>02</a:t>
             </a:r>
-            <a:endParaRPr lang="en-US" sz="3000" dirty="0"/>
+            <a:endParaRPr lang="en-US" sz="3600" dirty="0"/>
           </a:p>
         </p:txBody>
       </p:sp>
@@ -9623,7 +13302,7 @@
                 <a:ea typeface="Cambria" pitchFamily="34" charset="-122"/>
                 <a:cs typeface="Cambria" pitchFamily="34" charset="-120"/>
               </a:rPr>
-              <a:t>Score candidate splits</a:t>
+              <a:t>Build one tree per text</a:t>
             </a:r>
             <a:endParaRPr lang="en-US" sz="1500" dirty="0"/>
           </a:p>
@@ -9665,7 +13344,7 @@
                 <a:ea typeface="Calibri" pitchFamily="34" charset="-122"/>
                 <a:cs typeface="Calibri" pitchFamily="34" charset="-120"/>
               </a:rPr>
-              <a:t>At each node, evaluate every remaining SCD dimension with Polarization Explanation Gain (PEG); pick the highest-scoring one.</a:t>
+              <a:t>Here we select the hyperparameters needed for our method and we proceed to building one tree per instance</a:t>
             </a:r>
             <a:endParaRPr lang="en-US" sz="1150" dirty="0"/>
           </a:p>
@@ -9755,7 +13434,7 @@
               <a:buNone/>
             </a:pPr>
             <a:r>
-              <a:rPr lang="en-US" sz="3000" b="1" dirty="0">
+              <a:rPr lang="en-US" sz="3600" b="1" dirty="0">
                 <a:solidFill>
                   <a:srgbClr val="4A5187"/>
                 </a:solidFill>
@@ -9765,7 +13444,7 @@
               </a:rPr>
               <a:t>03</a:t>
             </a:r>
-            <a:endParaRPr lang="en-US" sz="3000" dirty="0"/>
+            <a:endParaRPr lang="en-US" sz="3600" dirty="0"/>
           </a:p>
         </p:txBody>
       </p:sp>
@@ -9934,7 +13613,7 @@
               <a:buNone/>
             </a:pPr>
             <a:r>
-              <a:rPr lang="en-US" sz="3000" b="1" dirty="0">
+              <a:rPr lang="en-US" sz="3600" b="1" dirty="0">
                 <a:solidFill>
                   <a:srgbClr val="C7CCE0"/>
                 </a:solidFill>
@@ -9944,7 +13623,7 @@
               </a:rPr>
               <a:t>04</a:t>
             </a:r>
-            <a:endParaRPr lang="en-US" sz="3000" dirty="0"/>
+            <a:endParaRPr lang="en-US" sz="3600" dirty="0"/>
           </a:p>
         </p:txBody>
       </p:sp>
@@ -10062,7 +13741,7 @@
                 <a:ea typeface="Calibri" pitchFamily="34" charset="-122"/>
                 <a:cs typeface="Calibri" pitchFamily="34" charset="-120"/>
               </a:rPr>
-              <a:t>05</a:t>
+              <a:t>06</a:t>
             </a:r>
             <a:endParaRPr lang="en-US" sz="1000" dirty="0"/>
           </a:p>
@@ -10225,7 +13904,7 @@
               <a:buNone/>
             </a:pPr>
             <a:r>
-              <a:rPr lang="en-US" sz="3000" b="1" dirty="0">
+              <a:rPr lang="en-US" sz="3600" b="1" dirty="0">
                 <a:solidFill>
                   <a:srgbClr val="1B1F3B"/>
                 </a:solidFill>
@@ -10235,7 +13914,7 @@
               </a:rPr>
               <a:t>Polarization Explanation Gain (PEG)</a:t>
             </a:r>
-            <a:endParaRPr lang="en-US" sz="3000" dirty="0"/>
+            <a:endParaRPr lang="en-US" sz="3600" dirty="0"/>
           </a:p>
         </p:txBody>
       </p:sp>
@@ -10889,7 +14568,7 @@
                 <a:ea typeface="Calibri" pitchFamily="34" charset="-122"/>
                 <a:cs typeface="Calibri" pitchFamily="34" charset="-120"/>
               </a:rPr>
-              <a:t>06</a:t>
+              <a:t>07</a:t>
             </a:r>
             <a:endParaRPr lang="en-US" sz="1000" dirty="0"/>
           </a:p>
@@ -11035,7 +14714,7 @@
         </p:nvSpPr>
         <p:spPr>
           <a:xfrm>
-            <a:off x="457200" y="713232"/>
+            <a:off x="457200" y="874902"/>
             <a:ext cx="11247120" cy="777240"/>
           </a:xfrm>
           <a:prstGeom prst="rect">
@@ -11052,7 +14731,7 @@
               <a:buNone/>
             </a:pPr>
             <a:r>
-              <a:rPr lang="en-US" sz="3000" b="1" dirty="0">
+              <a:rPr lang="en-US" sz="3600" b="1" dirty="0">
                 <a:solidFill>
                   <a:srgbClr val="1B1F3B"/>
                 </a:solidFill>
@@ -11062,7 +14741,7 @@
               </a:rPr>
               <a:t>Picking hyperparameters on synthetic data with known ground truth</a:t>
             </a:r>
-            <a:endParaRPr lang="en-US" sz="3000" dirty="0"/>
+            <a:endParaRPr lang="en-US" sz="3600" dirty="0"/>
           </a:p>
         </p:txBody>
       </p:sp>
@@ -11074,8 +14753,8 @@
         </p:nvSpPr>
         <p:spPr>
           <a:xfrm>
-            <a:off x="457200" y="1828800"/>
-            <a:ext cx="5212080" cy="3931920"/>
+            <a:off x="457200" y="1853405"/>
+            <a:ext cx="7479698" cy="4605276"/>
           </a:xfrm>
           <a:prstGeom prst="rect">
             <a:avLst/>
@@ -11094,7 +14773,7 @@
               <a:buNone/>
             </a:pPr>
             <a:r>
-              <a:rPr lang="en-US" sz="1300" b="1" dirty="0">
+              <a:rPr lang="en-US" sz="2000" b="1" dirty="0">
                 <a:solidFill>
                   <a:srgbClr val="1B1F3B"/>
                 </a:solidFill>
@@ -11104,7 +14783,7 @@
               </a:rPr>
               <a:t>Why synthetic first: </a:t>
             </a:r>
-            <a:endParaRPr lang="en-US" sz="1300" dirty="0"/>
+            <a:endParaRPr lang="en-US" sz="2000" dirty="0"/>
           </a:p>
           <a:p>
             <a:pPr marL="0" indent="0">
@@ -11117,7 +14796,7 @@
               <a:buNone/>
             </a:pPr>
             <a:r>
-              <a:rPr lang="en-US" sz="1300" dirty="0">
+              <a:rPr lang="en-US" sz="2000" dirty="0">
                 <a:solidFill>
                   <a:srgbClr val="6B7280"/>
                 </a:solidFill>
@@ -11127,7 +14806,7 @@
               </a:rPr>
               <a:t>real datasets do not have polarization ground-truth to check recovery against.</a:t>
             </a:r>
-            <a:endParaRPr lang="en-US" sz="1300" dirty="0"/>
+            <a:endParaRPr lang="en-US" sz="2000" dirty="0"/>
           </a:p>
           <a:p>
             <a:pPr marL="0" indent="0">
@@ -11137,7 +14816,7 @@
               <a:buNone/>
             </a:pPr>
             <a:r>
-              <a:rPr lang="en-US" sz="1300" b="1" dirty="0">
+              <a:rPr lang="en-US" sz="2000" b="1" dirty="0">
                 <a:solidFill>
                   <a:srgbClr val="1B1F3B"/>
                 </a:solidFill>
@@ -11147,7 +14826,7 @@
               </a:rPr>
               <a:t>Setup: </a:t>
             </a:r>
-            <a:endParaRPr lang="en-US" sz="1300" dirty="0"/>
+            <a:endParaRPr lang="en-US" sz="2000" dirty="0"/>
           </a:p>
           <a:p>
             <a:pPr marL="0" indent="0">
@@ -11160,7 +14839,7 @@
               <a:buNone/>
             </a:pPr>
             <a:r>
-              <a:rPr lang="en-US" sz="1300" dirty="0">
+              <a:rPr lang="en-US" sz="2000" dirty="0">
                 <a:solidFill>
                   <a:srgbClr val="6B7280"/>
                 </a:solidFill>
@@ -11170,7 +14849,7 @@
               </a:rPr>
               <a:t>5 SCD dimensions × 162 intersectional identities × 10 annotators = 1,620-annotator pool; each text gets 0–4 active dimensions at a controlled strength α.</a:t>
             </a:r>
-            <a:endParaRPr lang="en-US" sz="1300" dirty="0"/>
+            <a:endParaRPr lang="en-US" sz="2000" dirty="0"/>
           </a:p>
           <a:p>
             <a:pPr marL="0" indent="0">
@@ -11180,7 +14859,7 @@
               <a:buNone/>
             </a:pPr>
             <a:r>
-              <a:rPr lang="en-US" sz="1300" b="1" dirty="0">
+              <a:rPr lang="en-US" sz="2000" b="1" dirty="0">
                 <a:solidFill>
                   <a:srgbClr val="1B1F3B"/>
                 </a:solidFill>
@@ -11190,7 +14869,7 @@
               </a:rPr>
               <a:t>Search: </a:t>
             </a:r>
-            <a:endParaRPr lang="en-US" sz="1300" dirty="0"/>
+            <a:endParaRPr lang="en-US" sz="2000" dirty="0"/>
           </a:p>
           <a:p>
             <a:pPr marL="0" indent="0">
@@ -11200,7 +14879,7 @@
               <a:buNone/>
             </a:pPr>
             <a:r>
-              <a:rPr lang="en-US" sz="1300" dirty="0">
+              <a:rPr lang="en-US" sz="2000" dirty="0">
                 <a:solidFill>
                   <a:srgbClr val="6B7280"/>
                 </a:solidFill>
@@ -11210,20 +14889,20 @@
               </a:rPr>
               <a:t>3,240-combination grid (θ, min size, depth, PEG type, h, θstop); 800 configs sampled × 3 corpora = 2,400 runs, ranked by mean Jaccard vs. the known structure.</a:t>
             </a:r>
-            <a:endParaRPr lang="en-US" sz="1300" dirty="0"/>
-          </a:p>
-        </p:txBody>
-      </p:sp>
-      <p:sp>
-        <p:nvSpPr>
-          <p:cNvPr id="7" name="Text 5"/>
+            <a:endParaRPr lang="en-US" sz="2000" dirty="0"/>
+          </a:p>
+        </p:txBody>
+      </p:sp>
+      <p:sp>
+        <p:nvSpPr>
+          <p:cNvPr id="9" name="Text 6"/>
           <p:cNvSpPr txBox="1"/>
           <p:nvPr/>
         </p:nvSpPr>
         <p:spPr>
           <a:xfrm>
-            <a:off x="5943600" y="1828800"/>
-            <a:ext cx="5760720" cy="365760"/>
+            <a:off x="11521440" y="6473952"/>
+            <a:ext cx="548640" cy="274320"/>
           </a:xfrm>
           <a:prstGeom prst="rect">
             <a:avLst/>
@@ -11235,74 +14914,19 @@
           <a:bodyPr wrap="square" lIns="0" tIns="0" rIns="0" bIns="0" rtlCol="0" anchor="ctr"/>
           <a:lstStyle/>
           <a:p>
-            <a:pPr marL="0" indent="0">
+            <a:pPr marL="0" indent="0" algn="r">
               <a:buNone/>
             </a:pPr>
             <a:r>
-              <a:rPr lang="en-US" sz="1250" b="1" dirty="0">
-                <a:solidFill>
-                  <a:srgbClr val="1B1F3B"/>
+              <a:rPr lang="en-US" sz="1000" dirty="0">
+                <a:solidFill>
+                  <a:srgbClr val="B7BCD0"/>
                 </a:solidFill>
                 <a:latin typeface="Calibri" pitchFamily="34" charset="0"/>
                 <a:ea typeface="Calibri" pitchFamily="34" charset="-122"/>
                 <a:cs typeface="Calibri" pitchFamily="34" charset="-120"/>
               </a:rPr>
-              <a:t>Normalizing PEG stabilizes recovery across the gain threshold h</a:t>
-            </a:r>
-            <a:endParaRPr lang="en-US" sz="1250" dirty="0"/>
-          </a:p>
-        </p:txBody>
-      </p:sp>
-      <p:graphicFrame>
-        <p:nvGraphicFramePr>
-          <p:cNvPr id="8" name="Chart 0"/>
-          <p:cNvGraphicFramePr/>
-          <p:nvPr/>
-        </p:nvGraphicFramePr>
-        <p:xfrm>
-          <a:off x="5943600" y="2240280"/>
-          <a:ext cx="5760720" cy="3566160"/>
-        </p:xfrm>
-        <a:graphic>
-          <a:graphicData uri="http://schemas.openxmlformats.org/drawingml/2006/chart">
-            <c:chart xmlns:c="http://schemas.openxmlformats.org/drawingml/2006/chart" xmlns:r="http://schemas.openxmlformats.org/officeDocument/2006/relationships" r:id="rId3"/>
-          </a:graphicData>
-        </a:graphic>
-      </p:graphicFrame>
-      <p:sp>
-        <p:nvSpPr>
-          <p:cNvPr id="9" name="Text 6"/>
-          <p:cNvSpPr txBox="1"/>
-          <p:nvPr/>
-        </p:nvSpPr>
-        <p:spPr>
-          <a:xfrm>
-            <a:off x="11521440" y="6473952"/>
-            <a:ext cx="548640" cy="274320"/>
-          </a:xfrm>
-          <a:prstGeom prst="rect">
-            <a:avLst/>
-          </a:prstGeom>
-          <a:noFill/>
-          <a:ln/>
-        </p:spPr>
-        <p:txBody>
-          <a:bodyPr wrap="square" lIns="0" tIns="0" rIns="0" bIns="0" rtlCol="0" anchor="ctr"/>
-          <a:lstStyle/>
-          <a:p>
-            <a:pPr marL="0" indent="0" algn="r">
-              <a:buNone/>
-            </a:pPr>
-            <a:r>
-              <a:rPr lang="en-US" sz="1000" dirty="0">
-                <a:solidFill>
-                  <a:srgbClr val="B7BCD0"/>
-                </a:solidFill>
-                <a:latin typeface="Calibri" pitchFamily="34" charset="0"/>
-                <a:ea typeface="Calibri" pitchFamily="34" charset="-122"/>
-                <a:cs typeface="Calibri" pitchFamily="34" charset="-120"/>
-              </a:rPr>
-              <a:t>07</a:t>
+              <a:t>08</a:t>
             </a:r>
             <a:endParaRPr lang="en-US" sz="1000" dirty="0"/>
           </a:p>
@@ -11448,7 +15072,7 @@
         </p:nvSpPr>
         <p:spPr>
           <a:xfrm>
-            <a:off x="457200" y="713232"/>
+            <a:off x="472440" y="1046988"/>
             <a:ext cx="11247120" cy="777240"/>
           </a:xfrm>
           <a:prstGeom prst="rect">
@@ -11465,7 +15089,7 @@
               <a:buNone/>
             </a:pPr>
             <a:r>
-              <a:rPr lang="en-US" sz="3000" b="1" dirty="0">
+              <a:rPr lang="en-US" sz="3600" b="1" dirty="0">
                 <a:solidFill>
                   <a:srgbClr val="1B1F3B"/>
                 </a:solidFill>
@@ -11475,7 +15099,7 @@
               </a:rPr>
               <a:t>Selected configuration recovers the true structure well</a:t>
             </a:r>
-            <a:endParaRPr lang="en-US" sz="3000" dirty="0"/>
+            <a:endParaRPr lang="en-US" sz="3600" dirty="0"/>
           </a:p>
         </p:txBody>
       </p:sp>
@@ -11487,7 +15111,7 @@
         </p:nvSpPr>
         <p:spPr>
           <a:xfrm>
-            <a:off x="457200" y="1737360"/>
+            <a:off x="457200" y="1988820"/>
             <a:ext cx="11247120" cy="411480"/>
           </a:xfrm>
           <a:prstGeom prst="rect">
@@ -11528,7 +15152,7 @@
         </p:nvSpPr>
         <p:spPr>
           <a:xfrm>
-            <a:off x="457200" y="2514600"/>
+            <a:off x="457200" y="2766060"/>
             <a:ext cx="2697480" cy="1828800"/>
           </a:xfrm>
           <a:prstGeom prst="roundRect">
@@ -11557,7 +15181,7 @@
         </p:nvSpPr>
         <p:spPr>
           <a:xfrm>
-            <a:off x="457200" y="2651760"/>
+            <a:off x="457200" y="2903220"/>
             <a:ext cx="2697480" cy="868680"/>
           </a:xfrm>
           <a:prstGeom prst="rect">
@@ -11596,7 +15220,7 @@
         </p:nvSpPr>
         <p:spPr>
           <a:xfrm>
-            <a:off x="457200" y="3520440"/>
+            <a:off x="457200" y="3771900"/>
             <a:ext cx="2697480" cy="320040"/>
           </a:xfrm>
           <a:prstGeom prst="rect">
@@ -11635,7 +15259,7 @@
         </p:nvSpPr>
         <p:spPr>
           <a:xfrm>
-            <a:off x="594360" y="3840480"/>
+            <a:off x="594360" y="4091940"/>
             <a:ext cx="2423160" cy="411480"/>
           </a:xfrm>
           <a:prstGeom prst="rect">
@@ -11674,7 +15298,7 @@
         </p:nvSpPr>
         <p:spPr>
           <a:xfrm>
-            <a:off x="3291840" y="2514600"/>
+            <a:off x="3291840" y="2766060"/>
             <a:ext cx="2697480" cy="1828800"/>
           </a:xfrm>
           <a:prstGeom prst="roundRect">
@@ -11703,7 +15327,7 @@
         </p:nvSpPr>
         <p:spPr>
           <a:xfrm>
-            <a:off x="3291840" y="2651760"/>
+            <a:off x="3291840" y="2903220"/>
             <a:ext cx="2697480" cy="868680"/>
           </a:xfrm>
           <a:prstGeom prst="rect">
@@ -11742,7 +15366,7 @@
         </p:nvSpPr>
         <p:spPr>
           <a:xfrm>
-            <a:off x="3291840" y="3520440"/>
+            <a:off x="3291840" y="3771900"/>
             <a:ext cx="2697480" cy="320040"/>
           </a:xfrm>
           <a:prstGeom prst="rect">
@@ -11781,7 +15405,7 @@
         </p:nvSpPr>
         <p:spPr>
           <a:xfrm>
-            <a:off x="3429000" y="3840480"/>
+            <a:off x="3429000" y="4091940"/>
             <a:ext cx="2423160" cy="411480"/>
           </a:xfrm>
           <a:prstGeom prst="rect">
@@ -11820,7 +15444,7 @@
         </p:nvSpPr>
         <p:spPr>
           <a:xfrm>
-            <a:off x="6126480" y="2514600"/>
+            <a:off x="6126480" y="2766060"/>
             <a:ext cx="2697480" cy="1828800"/>
           </a:xfrm>
           <a:prstGeom prst="roundRect">
@@ -11849,7 +15473,7 @@
         </p:nvSpPr>
         <p:spPr>
           <a:xfrm>
-            <a:off x="6126480" y="2651760"/>
+            <a:off x="6126480" y="2903220"/>
             <a:ext cx="2697480" cy="868680"/>
           </a:xfrm>
           <a:prstGeom prst="rect">
@@ -11888,7 +15512,7 @@
         </p:nvSpPr>
         <p:spPr>
           <a:xfrm>
-            <a:off x="6126480" y="3520440"/>
+            <a:off x="6126480" y="3771900"/>
             <a:ext cx="2697480" cy="320040"/>
           </a:xfrm>
           <a:prstGeom prst="rect">
@@ -11927,7 +15551,7 @@
         </p:nvSpPr>
         <p:spPr>
           <a:xfrm>
-            <a:off x="6263640" y="3840480"/>
+            <a:off x="6263640" y="4091940"/>
             <a:ext cx="2423160" cy="411480"/>
           </a:xfrm>
           <a:prstGeom prst="rect">
@@ -11966,7 +15590,7 @@
         </p:nvSpPr>
         <p:spPr>
           <a:xfrm>
-            <a:off x="8961120" y="2514600"/>
+            <a:off x="8961120" y="2766060"/>
             <a:ext cx="2697480" cy="1828800"/>
           </a:xfrm>
           <a:prstGeom prst="roundRect">
@@ -11995,7 +15619,7 @@
         </p:nvSpPr>
         <p:spPr>
           <a:xfrm>
-            <a:off x="8961120" y="2651760"/>
+            <a:off x="8961120" y="2903220"/>
             <a:ext cx="2697480" cy="868680"/>
           </a:xfrm>
           <a:prstGeom prst="rect">
@@ -12034,7 +15658,7 @@
         </p:nvSpPr>
         <p:spPr>
           <a:xfrm>
-            <a:off x="8961120" y="3520440"/>
+            <a:off x="8961120" y="3771900"/>
             <a:ext cx="2697480" cy="320040"/>
           </a:xfrm>
           <a:prstGeom prst="rect">
@@ -12073,7 +15697,7 @@
         </p:nvSpPr>
         <p:spPr>
           <a:xfrm>
-            <a:off x="9098280" y="3840480"/>
+            <a:off x="9098280" y="4091940"/>
             <a:ext cx="2423160" cy="411480"/>
           </a:xfrm>
           <a:prstGeom prst="rect">
@@ -12112,7 +15736,7 @@
         </p:nvSpPr>
         <p:spPr>
           <a:xfrm>
-            <a:off x="457200" y="4709160"/>
+            <a:off x="472440" y="4892040"/>
             <a:ext cx="11247120" cy="548640"/>
           </a:xfrm>
           <a:prstGeom prst="rect">
@@ -12145,14 +15769,14 @@
       </p:sp>
       <p:sp>
         <p:nvSpPr>
-          <p:cNvPr id="24" name="Text 22"/>
+          <p:cNvPr id="25" name="Text 23"/>
           <p:cNvSpPr txBox="1"/>
           <p:nvPr/>
         </p:nvSpPr>
         <p:spPr>
           <a:xfrm>
-            <a:off x="457200" y="5532120"/>
-            <a:ext cx="11247120" cy="457200"/>
+            <a:off x="11521440" y="6473952"/>
+            <a:ext cx="548640" cy="274320"/>
           </a:xfrm>
           <a:prstGeom prst="rect">
             <a:avLst/>
@@ -12164,58 +15788,19 @@
           <a:bodyPr wrap="square" lIns="0" tIns="0" rIns="0" bIns="0" rtlCol="0" anchor="ctr"/>
           <a:lstStyle/>
           <a:p>
-            <a:pPr marL="0" indent="0">
+            <a:pPr marL="0" indent="0" algn="r">
               <a:buNone/>
             </a:pPr>
             <a:r>
-              <a:rPr lang="en-US" sz="1400" b="1" dirty="0">
-                <a:solidFill>
-                  <a:srgbClr val="1B1F3B"/>
+              <a:rPr lang="en-US" sz="1000" dirty="0">
+                <a:solidFill>
+                  <a:srgbClr val="B7BCD0"/>
                 </a:solidFill>
                 <a:latin typeface="Calibri" pitchFamily="34" charset="0"/>
                 <a:ea typeface="Calibri" pitchFamily="34" charset="-122"/>
                 <a:cs typeface="Calibri" pitchFamily="34" charset="-120"/>
               </a:rPr>
-              <a:t>This exact configuration is then frozen and applied, unchanged, to the real-world dataset.</a:t>
-            </a:r>
-            <a:endParaRPr lang="en-US" sz="1400" dirty="0"/>
-          </a:p>
-        </p:txBody>
-      </p:sp>
-      <p:sp>
-        <p:nvSpPr>
-          <p:cNvPr id="25" name="Text 23"/>
-          <p:cNvSpPr txBox="1"/>
-          <p:nvPr/>
-        </p:nvSpPr>
-        <p:spPr>
-          <a:xfrm>
-            <a:off x="11521440" y="6473952"/>
-            <a:ext cx="548640" cy="274320"/>
-          </a:xfrm>
-          <a:prstGeom prst="rect">
-            <a:avLst/>
-          </a:prstGeom>
-          <a:noFill/>
-          <a:ln/>
-        </p:spPr>
-        <p:txBody>
-          <a:bodyPr wrap="square" lIns="0" tIns="0" rIns="0" bIns="0" rtlCol="0" anchor="ctr"/>
-          <a:lstStyle/>
-          <a:p>
-            <a:pPr marL="0" indent="0" algn="r">
-              <a:buNone/>
-            </a:pPr>
-            <a:r>
-              <a:rPr lang="en-US" sz="1000" dirty="0">
-                <a:solidFill>
-                  <a:srgbClr val="B7BCD0"/>
-                </a:solidFill>
-                <a:latin typeface="Calibri" pitchFamily="34" charset="0"/>
-                <a:ea typeface="Calibri" pitchFamily="34" charset="-122"/>
-                <a:cs typeface="Calibri" pitchFamily="34" charset="-120"/>
-              </a:rPr>
-              <a:t>08</a:t>
+              <a:t>09</a:t>
             </a:r>
             <a:endParaRPr lang="en-US" sz="1000" dirty="0"/>
           </a:p>

--- a/polarized_trees/Polarized_Trees_Presentation.pptx
+++ b/polarized_trees/Polarized_Trees_Presentation.pptx
@@ -137,8 +137,8 @@
 <pc:chgInfo xmlns:a="http://schemas.openxmlformats.org/drawingml/2006/main" xmlns:r="http://schemas.openxmlformats.org/officeDocument/2006/relationships" xmlns:ac="http://schemas.microsoft.com/office/drawing/2013/main/command" xmlns:pc="http://schemas.microsoft.com/office/powerpoint/2013/main/command">
   <pc:docChgLst>
     <pc:chgData name="Swkratis Giannoutsos" userId="635c5988b0ac75cb" providerId="LiveId" clId="{2A7595ED-FB9C-4431-944F-C1113FEFC942}"/>
-    <pc:docChg chg="undo custSel addSld delSld modSld sldOrd">
-      <pc:chgData name="Swkratis Giannoutsos" userId="635c5988b0ac75cb" providerId="LiveId" clId="{2A7595ED-FB9C-4431-944F-C1113FEFC942}" dt="2026-09-17T09:40:23.020" v="2470" actId="1076"/>
+    <pc:docChg chg="undo custSel addSld delSld modSld sldOrd modShowInfo">
+      <pc:chgData name="Swkratis Giannoutsos" userId="635c5988b0ac75cb" providerId="LiveId" clId="{2A7595ED-FB9C-4431-944F-C1113FEFC942}" dt="2026-09-24T11:20:44.989" v="2472" actId="2744"/>
       <pc:docMkLst>
         <pc:docMk/>
       </pc:docMkLst>
@@ -422,22 +422,6 @@
             <ac:spMk id="6" creationId="{00000000-0000-0000-0000-000000000000}"/>
           </ac:spMkLst>
         </pc:spChg>
-        <pc:spChg chg="del">
-          <ac:chgData name="Swkratis Giannoutsos" userId="635c5988b0ac75cb" providerId="LiveId" clId="{2A7595ED-FB9C-4431-944F-C1113FEFC942}" dt="2026-09-16T13:24:00.822" v="1876" actId="478"/>
-          <ac:spMkLst>
-            <pc:docMk/>
-            <pc:sldMk cId="0" sldId="262"/>
-            <ac:spMk id="7" creationId="{00000000-0000-0000-0000-000000000000}"/>
-          </ac:spMkLst>
-        </pc:spChg>
-        <pc:graphicFrameChg chg="del">
-          <ac:chgData name="Swkratis Giannoutsos" userId="635c5988b0ac75cb" providerId="LiveId" clId="{2A7595ED-FB9C-4431-944F-C1113FEFC942}" dt="2026-09-16T13:23:57.128" v="1875" actId="478"/>
-          <ac:graphicFrameMkLst>
-            <pc:docMk/>
-            <pc:sldMk cId="0" sldId="262"/>
-            <ac:graphicFrameMk id="8" creationId="{00000000-0000-0000-0000-000000000000}"/>
-          </ac:graphicFrameMkLst>
-        </pc:graphicFrameChg>
       </pc:sldChg>
       <pc:sldChg chg="delSp modSp mod modNotesTx">
         <pc:chgData name="Swkratis Giannoutsos" userId="635c5988b0ac75cb" providerId="LiveId" clId="{2A7595ED-FB9C-4431-944F-C1113FEFC942}" dt="2026-09-17T07:26:54.523" v="2283" actId="20577"/>
@@ -539,14 +523,6 @@
             <pc:docMk/>
             <pc:sldMk cId="0" sldId="263"/>
             <ac:spMk id="23" creationId="{00000000-0000-0000-0000-000000000000}"/>
-          </ac:spMkLst>
-        </pc:spChg>
-        <pc:spChg chg="del mod">
-          <ac:chgData name="Swkratis Giannoutsos" userId="635c5988b0ac75cb" providerId="LiveId" clId="{2A7595ED-FB9C-4431-944F-C1113FEFC942}" dt="2026-09-16T11:00:35.380" v="1613" actId="478"/>
-          <ac:spMkLst>
-            <pc:docMk/>
-            <pc:sldMk cId="0" sldId="263"/>
-            <ac:spMk id="24" creationId="{00000000-0000-0000-0000-000000000000}"/>
           </ac:spMkLst>
         </pc:spChg>
       </pc:sldChg>
@@ -680,14 +656,6 @@
           <pc:docMk/>
           <pc:sldMk cId="0" sldId="268"/>
         </pc:sldMkLst>
-        <pc:spChg chg="del">
-          <ac:chgData name="Swkratis Giannoutsos" userId="635c5988b0ac75cb" providerId="LiveId" clId="{2A7595ED-FB9C-4431-944F-C1113FEFC942}" dt="2026-09-16T10:50:18.284" v="1329" actId="478"/>
-          <ac:spMkLst>
-            <pc:docMk/>
-            <pc:sldMk cId="0" sldId="268"/>
-            <ac:spMk id="6" creationId="{00000000-0000-0000-0000-000000000000}"/>
-          </ac:spMkLst>
-        </pc:spChg>
         <pc:spChg chg="mod">
           <ac:chgData name="Swkratis Giannoutsos" userId="635c5988b0ac75cb" providerId="LiveId" clId="{2A7595ED-FB9C-4431-944F-C1113FEFC942}" dt="2026-09-16T10:50:42.929" v="1334" actId="1076"/>
           <ac:spMkLst>
@@ -753,13 +721,6 @@
           </ac:spMkLst>
         </pc:spChg>
       </pc:sldChg>
-      <pc:sldChg chg="new del">
-        <pc:chgData name="Swkratis Giannoutsos" userId="635c5988b0ac75cb" providerId="LiveId" clId="{2A7595ED-FB9C-4431-944F-C1113FEFC942}" dt="2026-09-17T09:38:04.458" v="2360" actId="47"/>
-        <pc:sldMkLst>
-          <pc:docMk/>
-          <pc:sldMk cId="2373207329" sldId="269"/>
-        </pc:sldMkLst>
-      </pc:sldChg>
       <pc:sldChg chg="addSp delSp modSp add mod">
         <pc:chgData name="Swkratis Giannoutsos" userId="635c5988b0ac75cb" providerId="LiveId" clId="{2A7595ED-FB9C-4431-944F-C1113FEFC942}" dt="2026-09-17T09:40:23.020" v="2470" actId="1076"/>
         <pc:sldMkLst>
@@ -772,54 +733,6 @@
             <pc:docMk/>
             <pc:sldMk cId="3544987491" sldId="270"/>
             <ac:spMk id="5" creationId="{FA694F63-A757-F2A1-3BB2-EAEA0E1F1C66}"/>
-          </ac:spMkLst>
-        </pc:spChg>
-        <pc:spChg chg="del">
-          <ac:chgData name="Swkratis Giannoutsos" userId="635c5988b0ac75cb" providerId="LiveId" clId="{2A7595ED-FB9C-4431-944F-C1113FEFC942}" dt="2026-09-17T09:38:11.879" v="2364" actId="478"/>
-          <ac:spMkLst>
-            <pc:docMk/>
-            <pc:sldMk cId="3544987491" sldId="270"/>
-            <ac:spMk id="6" creationId="{C89CCF77-96D0-BA23-0828-B2B430680A46}"/>
-          </ac:spMkLst>
-        </pc:spChg>
-        <pc:spChg chg="del">
-          <ac:chgData name="Swkratis Giannoutsos" userId="635c5988b0ac75cb" providerId="LiveId" clId="{2A7595ED-FB9C-4431-944F-C1113FEFC942}" dt="2026-09-17T09:38:11.879" v="2364" actId="478"/>
-          <ac:spMkLst>
-            <pc:docMk/>
-            <pc:sldMk cId="3544987491" sldId="270"/>
-            <ac:spMk id="7" creationId="{4FF33371-37B0-AE4C-6A23-4E7CE80A9A5A}"/>
-          </ac:spMkLst>
-        </pc:spChg>
-        <pc:spChg chg="del">
-          <ac:chgData name="Swkratis Giannoutsos" userId="635c5988b0ac75cb" providerId="LiveId" clId="{2A7595ED-FB9C-4431-944F-C1113FEFC942}" dt="2026-09-17T09:38:11.879" v="2364" actId="478"/>
-          <ac:spMkLst>
-            <pc:docMk/>
-            <pc:sldMk cId="3544987491" sldId="270"/>
-            <ac:spMk id="8" creationId="{3C8D85CE-6025-2BAA-3D63-87E865C107FF}"/>
-          </ac:spMkLst>
-        </pc:spChg>
-        <pc:spChg chg="del">
-          <ac:chgData name="Swkratis Giannoutsos" userId="635c5988b0ac75cb" providerId="LiveId" clId="{2A7595ED-FB9C-4431-944F-C1113FEFC942}" dt="2026-09-17T09:38:11.879" v="2364" actId="478"/>
-          <ac:spMkLst>
-            <pc:docMk/>
-            <pc:sldMk cId="3544987491" sldId="270"/>
-            <ac:spMk id="9" creationId="{3040E961-6459-8AB1-1F3F-F9803FF1C81C}"/>
-          </ac:spMkLst>
-        </pc:spChg>
-        <pc:spChg chg="add del mod">
-          <ac:chgData name="Swkratis Giannoutsos" userId="635c5988b0ac75cb" providerId="LiveId" clId="{2A7595ED-FB9C-4431-944F-C1113FEFC942}" dt="2026-09-17T09:38:10.227" v="2363"/>
-          <ac:spMkLst>
-            <pc:docMk/>
-            <pc:sldMk cId="3544987491" sldId="270"/>
-            <ac:spMk id="11" creationId="{1EC9A65B-A5F8-5732-E131-AF66F2CFF7A8}"/>
-          </ac:spMkLst>
-        </pc:spChg>
-        <pc:spChg chg="add del mod">
-          <ac:chgData name="Swkratis Giannoutsos" userId="635c5988b0ac75cb" providerId="LiveId" clId="{2A7595ED-FB9C-4431-944F-C1113FEFC942}" dt="2026-09-17T09:38:33.562" v="2402"/>
-          <ac:spMkLst>
-            <pc:docMk/>
-            <pc:sldMk cId="3544987491" sldId="270"/>
-            <ac:spMk id="14" creationId="{02CAB4F5-A481-AECB-657C-81F708EBFAE2}"/>
           </ac:spMkLst>
         </pc:spChg>
         <pc:spChg chg="add mod">
